--- a/Description/ReservationCards.pptx
+++ b/Description/ReservationCards.pptx
@@ -5,11 +5,12 @@
     <p:sldMasterId id="2147483648" r:id="rId1"/>
   </p:sldMasterIdLst>
   <p:sldIdLst>
-    <p:sldId id="256" r:id="rId2"/>
-    <p:sldId id="259" r:id="rId3"/>
-    <p:sldId id="260" r:id="rId4"/>
-    <p:sldId id="257" r:id="rId5"/>
-    <p:sldId id="258" r:id="rId6"/>
+    <p:sldId id="259" r:id="rId2"/>
+    <p:sldId id="261" r:id="rId3"/>
+    <p:sldId id="256" r:id="rId4"/>
+    <p:sldId id="260" r:id="rId5"/>
+    <p:sldId id="257" r:id="rId6"/>
+    <p:sldId id="258" r:id="rId7"/>
   </p:sldIdLst>
   <p:sldSz cx="12192000" cy="6858000"/>
   <p:notesSz cx="6661150" cy="9866313"/>
@@ -270,7 +271,7 @@
           <a:p>
             <a:fld id="{DDCE6D58-9B57-4731-A47B-3CD41B48F0A9}" type="datetimeFigureOut">
               <a:rPr lang="de-CH" smtClean="0"/>
-              <a:t>01.03.2026</a:t>
+              <a:t>04.03.2026</a:t>
             </a:fld>
             <a:endParaRPr lang="de-CH"/>
           </a:p>
@@ -440,7 +441,7 @@
           <a:p>
             <a:fld id="{DDCE6D58-9B57-4731-A47B-3CD41B48F0A9}" type="datetimeFigureOut">
               <a:rPr lang="de-CH" smtClean="0"/>
-              <a:t>01.03.2026</a:t>
+              <a:t>04.03.2026</a:t>
             </a:fld>
             <a:endParaRPr lang="de-CH"/>
           </a:p>
@@ -620,7 +621,7 @@
           <a:p>
             <a:fld id="{DDCE6D58-9B57-4731-A47B-3CD41B48F0A9}" type="datetimeFigureOut">
               <a:rPr lang="de-CH" smtClean="0"/>
-              <a:t>01.03.2026</a:t>
+              <a:t>04.03.2026</a:t>
             </a:fld>
             <a:endParaRPr lang="de-CH"/>
           </a:p>
@@ -790,7 +791,7 @@
           <a:p>
             <a:fld id="{DDCE6D58-9B57-4731-A47B-3CD41B48F0A9}" type="datetimeFigureOut">
               <a:rPr lang="de-CH" smtClean="0"/>
-              <a:t>01.03.2026</a:t>
+              <a:t>04.03.2026</a:t>
             </a:fld>
             <a:endParaRPr lang="de-CH"/>
           </a:p>
@@ -1036,7 +1037,7 @@
           <a:p>
             <a:fld id="{DDCE6D58-9B57-4731-A47B-3CD41B48F0A9}" type="datetimeFigureOut">
               <a:rPr lang="de-CH" smtClean="0"/>
-              <a:t>01.03.2026</a:t>
+              <a:t>04.03.2026</a:t>
             </a:fld>
             <a:endParaRPr lang="de-CH"/>
           </a:p>
@@ -1268,7 +1269,7 @@
           <a:p>
             <a:fld id="{DDCE6D58-9B57-4731-A47B-3CD41B48F0A9}" type="datetimeFigureOut">
               <a:rPr lang="de-CH" smtClean="0"/>
-              <a:t>01.03.2026</a:t>
+              <a:t>04.03.2026</a:t>
             </a:fld>
             <a:endParaRPr lang="de-CH"/>
           </a:p>
@@ -1635,7 +1636,7 @@
           <a:p>
             <a:fld id="{DDCE6D58-9B57-4731-A47B-3CD41B48F0A9}" type="datetimeFigureOut">
               <a:rPr lang="de-CH" smtClean="0"/>
-              <a:t>01.03.2026</a:t>
+              <a:t>04.03.2026</a:t>
             </a:fld>
             <a:endParaRPr lang="de-CH"/>
           </a:p>
@@ -1753,7 +1754,7 @@
           <a:p>
             <a:fld id="{DDCE6D58-9B57-4731-A47B-3CD41B48F0A9}" type="datetimeFigureOut">
               <a:rPr lang="de-CH" smtClean="0"/>
-              <a:t>01.03.2026</a:t>
+              <a:t>04.03.2026</a:t>
             </a:fld>
             <a:endParaRPr lang="de-CH"/>
           </a:p>
@@ -1848,7 +1849,7 @@
           <a:p>
             <a:fld id="{DDCE6D58-9B57-4731-A47B-3CD41B48F0A9}" type="datetimeFigureOut">
               <a:rPr lang="de-CH" smtClean="0"/>
-              <a:t>01.03.2026</a:t>
+              <a:t>04.03.2026</a:t>
             </a:fld>
             <a:endParaRPr lang="de-CH"/>
           </a:p>
@@ -2125,7 +2126,7 @@
           <a:p>
             <a:fld id="{DDCE6D58-9B57-4731-A47B-3CD41B48F0A9}" type="datetimeFigureOut">
               <a:rPr lang="de-CH" smtClean="0"/>
-              <a:t>01.03.2026</a:t>
+              <a:t>04.03.2026</a:t>
             </a:fld>
             <a:endParaRPr lang="de-CH"/>
           </a:p>
@@ -2378,7 +2379,7 @@
           <a:p>
             <a:fld id="{DDCE6D58-9B57-4731-A47B-3CD41B48F0A9}" type="datetimeFigureOut">
               <a:rPr lang="de-CH" smtClean="0"/>
-              <a:t>01.03.2026</a:t>
+              <a:t>04.03.2026</a:t>
             </a:fld>
             <a:endParaRPr lang="de-CH"/>
           </a:p>
@@ -2591,7 +2592,7 @@
           <a:p>
             <a:fld id="{DDCE6D58-9B57-4731-A47B-3CD41B48F0A9}" type="datetimeFigureOut">
               <a:rPr lang="de-CH" smtClean="0"/>
-              <a:t>01.03.2026</a:t>
+              <a:t>04.03.2026</a:t>
             </a:fld>
             <a:endParaRPr lang="de-CH"/>
           </a:p>
@@ -3001,7 +3002,7 @@
           <p:cNvPr id="2" name="Textfeld 1">
             <a:extLst>
               <a:ext uri="{FF2B5EF4-FFF2-40B4-BE49-F238E27FC236}">
-                <a16:creationId xmlns:a16="http://schemas.microsoft.com/office/drawing/2014/main" id="{94B31F23-BA0A-6A89-0DE8-72155A1AEE36}"/>
+                <a16:creationId xmlns:a16="http://schemas.microsoft.com/office/drawing/2014/main" id="{B42A3284-E7C4-58EB-4E8B-EDDC3F6171EA}"/>
               </a:ext>
             </a:extLst>
           </p:cNvPr>
@@ -3039,10 +3040,27 @@
               </a:rPr>
               <a:t>cards</a:t>
             </a:r>
-            <a:endParaRPr lang="de-CH" b="1" dirty="0">
-              <a:latin typeface="Arial" panose="020B0604020202020204" pitchFamily="34" charset="0"/>
-              <a:cs typeface="Arial" panose="020B0604020202020204" pitchFamily="34" charset="0"/>
-            </a:endParaRPr>
+            <a:r>
+              <a:rPr lang="de-CH" b="1" dirty="0">
+                <a:latin typeface="Arial" panose="020B0604020202020204" pitchFamily="34" charset="0"/>
+                <a:cs typeface="Arial" panose="020B0604020202020204" pitchFamily="34" charset="0"/>
+              </a:rPr>
+              <a:t> </a:t>
+            </a:r>
+            <a:r>
+              <a:rPr lang="de-CH" b="1" dirty="0" err="1">
+                <a:latin typeface="Arial" panose="020B0604020202020204" pitchFamily="34" charset="0"/>
+                <a:cs typeface="Arial" panose="020B0604020202020204" pitchFamily="34" charset="0"/>
+              </a:rPr>
+              <a:t>Application</a:t>
+            </a:r>
+            <a:r>
+              <a:rPr lang="de-CH" b="1" dirty="0">
+                <a:latin typeface="Arial" panose="020B0604020202020204" pitchFamily="34" charset="0"/>
+                <a:cs typeface="Arial" panose="020B0604020202020204" pitchFamily="34" charset="0"/>
+              </a:rPr>
+              <a:t> Cards</a:t>
+            </a:r>
           </a:p>
         </p:txBody>
       </p:sp>
@@ -3051,7 +3069,7 @@
           <p:cNvPr id="4" name="Grafik 3">
             <a:extLst>
               <a:ext uri="{FF2B5EF4-FFF2-40B4-BE49-F238E27FC236}">
-                <a16:creationId xmlns:a16="http://schemas.microsoft.com/office/drawing/2014/main" id="{C7534687-C8C7-0D06-2D5B-CF7DB9CD19F3}"/>
+                <a16:creationId xmlns:a16="http://schemas.microsoft.com/office/drawing/2014/main" id="{8ABE5CEA-5795-AA21-D3EC-428D5F0D5253}"/>
               </a:ext>
             </a:extLst>
           </p:cNvPr>
@@ -3068,8 +3086,8 @@
         </p:blipFill>
         <p:spPr>
           <a:xfrm>
-            <a:off x="879088" y="1128384"/>
-            <a:ext cx="2276190" cy="904762"/>
+            <a:off x="233538" y="1879135"/>
+            <a:ext cx="2809524" cy="1790476"/>
           </a:xfrm>
           <a:prstGeom prst="rect">
             <a:avLst/>
@@ -3078,10 +3096,49 @@
       </p:pic>
       <p:sp>
         <p:nvSpPr>
-          <p:cNvPr id="5" name="Rechteck 4">
+          <p:cNvPr id="5" name="Textfeld 4">
             <a:extLst>
               <a:ext uri="{FF2B5EF4-FFF2-40B4-BE49-F238E27FC236}">
-                <a16:creationId xmlns:a16="http://schemas.microsoft.com/office/drawing/2014/main" id="{C4881A30-E4F3-25B6-AEAD-7B4EE3169AE8}"/>
+                <a16:creationId xmlns:a16="http://schemas.microsoft.com/office/drawing/2014/main" id="{4CDCBA1B-F13E-686B-8489-ED929404E0F0}"/>
+              </a:ext>
+            </a:extLst>
+          </p:cNvPr>
+          <p:cNvSpPr txBox="1"/>
+          <p:nvPr/>
+        </p:nvSpPr>
+        <p:spPr>
+          <a:xfrm>
+            <a:off x="389100" y="1509803"/>
+            <a:ext cx="2653962" cy="369332"/>
+          </a:xfrm>
+          <a:prstGeom prst="rect">
+            <a:avLst/>
+          </a:prstGeom>
+          <a:noFill/>
+        </p:spPr>
+        <p:txBody>
+          <a:bodyPr wrap="square">
+            <a:spAutoFit/>
+          </a:bodyPr>
+          <a:lstStyle/>
+          <a:p>
+            <a:pPr algn="ctr"/>
+            <a:r>
+              <a:rPr lang="de-CH" b="1" dirty="0">
+                <a:latin typeface="Arial" panose="020B0604020202020204" pitchFamily="34" charset="0"/>
+                <a:cs typeface="Arial" panose="020B0604020202020204" pitchFamily="34" charset="0"/>
+              </a:rPr>
+              <a:t>ReservationCards.htm</a:t>
+            </a:r>
+          </a:p>
+        </p:txBody>
+      </p:sp>
+      <p:sp>
+        <p:nvSpPr>
+          <p:cNvPr id="6" name="Rechteck 5">
+            <a:extLst>
+              <a:ext uri="{FF2B5EF4-FFF2-40B4-BE49-F238E27FC236}">
+                <a16:creationId xmlns:a16="http://schemas.microsoft.com/office/drawing/2014/main" id="{FFDE8347-E7B7-9BAD-317D-3022D3BC2291}"/>
               </a:ext>
             </a:extLst>
           </p:cNvPr>
@@ -3090,8 +3147,8 @@
         </p:nvSpPr>
         <p:spPr>
           <a:xfrm>
-            <a:off x="3786940" y="1436290"/>
-            <a:ext cx="2799757" cy="1992709"/>
+            <a:off x="316198" y="4523589"/>
+            <a:ext cx="2799757" cy="1094167"/>
           </a:xfrm>
           <a:prstGeom prst="rect">
             <a:avLst/>
@@ -3132,7 +3189,223 @@
                 <a:latin typeface="Arial" panose="020B0604020202020204" pitchFamily="34" charset="0"/>
                 <a:cs typeface="Arial" panose="020B0604020202020204" pitchFamily="34" charset="0"/>
               </a:rPr>
-              <a:t>openPageReservationPrint</a:t>
+              <a:t>initReservationCards</a:t>
+            </a:r>
+            <a:r>
+              <a:rPr lang="de-CH" sz="1400" b="1" dirty="0">
+                <a:solidFill>
+                  <a:schemeClr val="tx1"/>
+                </a:solidFill>
+                <a:latin typeface="Arial" panose="020B0604020202020204" pitchFamily="34" charset="0"/>
+                <a:cs typeface="Arial" panose="020B0604020202020204" pitchFamily="34" charset="0"/>
+              </a:rPr>
+              <a:t>()</a:t>
+            </a:r>
+          </a:p>
+          <a:p>
+            <a:endParaRPr lang="de-CH" sz="1000" b="1" dirty="0">
+              <a:solidFill>
+                <a:schemeClr val="tx1"/>
+              </a:solidFill>
+              <a:latin typeface="Arial" panose="020B0604020202020204" pitchFamily="34" charset="0"/>
+              <a:cs typeface="Arial" panose="020B0604020202020204" pitchFamily="34" charset="0"/>
+            </a:endParaRPr>
+          </a:p>
+          <a:p>
+            <a:r>
+              <a:rPr lang="de-CH" sz="1000" b="1" dirty="0" err="1">
+                <a:solidFill>
+                  <a:schemeClr val="tx1"/>
+                </a:solidFill>
+                <a:latin typeface="Arial" panose="020B0604020202020204" pitchFamily="34" charset="0"/>
+                <a:cs typeface="Arial" panose="020B0604020202020204" pitchFamily="34" charset="0"/>
+              </a:rPr>
+              <a:t>createReservationCardsControls</a:t>
+            </a:r>
+            <a:r>
+              <a:rPr lang="de-CH" sz="1000" b="1" dirty="0">
+                <a:solidFill>
+                  <a:schemeClr val="tx1"/>
+                </a:solidFill>
+                <a:latin typeface="Arial" panose="020B0604020202020204" pitchFamily="34" charset="0"/>
+                <a:cs typeface="Arial" panose="020B0604020202020204" pitchFamily="34" charset="0"/>
+              </a:rPr>
+              <a:t>()</a:t>
+            </a:r>
+          </a:p>
+          <a:p>
+            <a:r>
+              <a:rPr lang="de-CH" sz="1000" b="1" i="1" dirty="0">
+                <a:solidFill>
+                  <a:schemeClr val="tx1"/>
+                </a:solidFill>
+                <a:latin typeface="Arial" panose="020B0604020202020204" pitchFamily="34" charset="0"/>
+                <a:cs typeface="Arial" panose="020B0604020202020204" pitchFamily="34" charset="0"/>
+              </a:rPr>
+              <a:t>Create </a:t>
+            </a:r>
+            <a:r>
+              <a:rPr lang="de-CH" sz="1000" b="1" i="1" dirty="0" err="1">
+                <a:solidFill>
+                  <a:schemeClr val="tx1"/>
+                </a:solidFill>
+                <a:latin typeface="Arial" panose="020B0604020202020204" pitchFamily="34" charset="0"/>
+                <a:cs typeface="Arial" panose="020B0604020202020204" pitchFamily="34" charset="0"/>
+              </a:rPr>
+              <a:t>the</a:t>
+            </a:r>
+            <a:r>
+              <a:rPr lang="de-CH" sz="1000" b="1" i="1" dirty="0">
+                <a:solidFill>
+                  <a:schemeClr val="tx1"/>
+                </a:solidFill>
+                <a:latin typeface="Arial" panose="020B0604020202020204" pitchFamily="34" charset="0"/>
+                <a:cs typeface="Arial" panose="020B0604020202020204" pitchFamily="34" charset="0"/>
+              </a:rPr>
+              <a:t> </a:t>
+            </a:r>
+            <a:r>
+              <a:rPr lang="de-CH" sz="1000" b="1" i="1" dirty="0" err="1">
+                <a:solidFill>
+                  <a:schemeClr val="tx1"/>
+                </a:solidFill>
+                <a:latin typeface="Arial" panose="020B0604020202020204" pitchFamily="34" charset="0"/>
+                <a:cs typeface="Arial" panose="020B0604020202020204" pitchFamily="34" charset="0"/>
+              </a:rPr>
+              <a:t>controls</a:t>
+            </a:r>
+            <a:r>
+              <a:rPr lang="de-CH" sz="1000" b="1" i="1" dirty="0">
+                <a:solidFill>
+                  <a:schemeClr val="tx1"/>
+                </a:solidFill>
+                <a:latin typeface="Arial" panose="020B0604020202020204" pitchFamily="34" charset="0"/>
+                <a:cs typeface="Arial" panose="020B0604020202020204" pitchFamily="34" charset="0"/>
+              </a:rPr>
+              <a:t> </a:t>
+            </a:r>
+            <a:r>
+              <a:rPr lang="de-CH" sz="1000" b="1" i="1" dirty="0" err="1">
+                <a:solidFill>
+                  <a:schemeClr val="tx1"/>
+                </a:solidFill>
+                <a:latin typeface="Arial" panose="020B0604020202020204" pitchFamily="34" charset="0"/>
+                <a:cs typeface="Arial" panose="020B0604020202020204" pitchFamily="34" charset="0"/>
+              </a:rPr>
+              <a:t>for</a:t>
+            </a:r>
+            <a:r>
+              <a:rPr lang="de-CH" sz="1000" b="1" i="1" dirty="0">
+                <a:solidFill>
+                  <a:schemeClr val="tx1"/>
+                </a:solidFill>
+                <a:latin typeface="Arial" panose="020B0604020202020204" pitchFamily="34" charset="0"/>
+                <a:cs typeface="Arial" panose="020B0604020202020204" pitchFamily="34" charset="0"/>
+              </a:rPr>
+              <a:t> </a:t>
+            </a:r>
+            <a:r>
+              <a:rPr lang="de-CH" sz="1000" b="1" i="1" dirty="0" err="1">
+                <a:solidFill>
+                  <a:schemeClr val="tx1"/>
+                </a:solidFill>
+                <a:latin typeface="Arial" panose="020B0604020202020204" pitchFamily="34" charset="0"/>
+                <a:cs typeface="Arial" panose="020B0604020202020204" pitchFamily="34" charset="0"/>
+              </a:rPr>
+              <a:t>the</a:t>
+            </a:r>
+            <a:r>
+              <a:rPr lang="de-CH" sz="1000" b="1" i="1" dirty="0">
+                <a:solidFill>
+                  <a:schemeClr val="tx1"/>
+                </a:solidFill>
+                <a:latin typeface="Arial" panose="020B0604020202020204" pitchFamily="34" charset="0"/>
+                <a:cs typeface="Arial" panose="020B0604020202020204" pitchFamily="34" charset="0"/>
+              </a:rPr>
+              <a:t> </a:t>
+            </a:r>
+            <a:r>
+              <a:rPr lang="de-CH" sz="1000" b="1" i="1" dirty="0" err="1">
+                <a:solidFill>
+                  <a:schemeClr val="tx1"/>
+                </a:solidFill>
+                <a:latin typeface="Arial" panose="020B0604020202020204" pitchFamily="34" charset="0"/>
+                <a:cs typeface="Arial" panose="020B0604020202020204" pitchFamily="34" charset="0"/>
+              </a:rPr>
+              <a:t>application</a:t>
+            </a:r>
+            <a:endParaRPr lang="de-CH" sz="1000" b="1" i="1" dirty="0">
+              <a:solidFill>
+                <a:schemeClr val="tx1"/>
+              </a:solidFill>
+              <a:latin typeface="Arial" panose="020B0604020202020204" pitchFamily="34" charset="0"/>
+              <a:cs typeface="Arial" panose="020B0604020202020204" pitchFamily="34" charset="0"/>
+            </a:endParaRPr>
+          </a:p>
+          <a:p>
+            <a:endParaRPr lang="de-CH" sz="1000" b="1" dirty="0">
+              <a:solidFill>
+                <a:schemeClr val="tx1"/>
+              </a:solidFill>
+              <a:latin typeface="Arial" panose="020B0604020202020204" pitchFamily="34" charset="0"/>
+              <a:cs typeface="Arial" panose="020B0604020202020204" pitchFamily="34" charset="0"/>
+            </a:endParaRPr>
+          </a:p>
+        </p:txBody>
+      </p:sp>
+      <p:sp>
+        <p:nvSpPr>
+          <p:cNvPr id="8" name="Pfeil: nach rechts 7">
+            <a:extLst>
+              <a:ext uri="{FF2B5EF4-FFF2-40B4-BE49-F238E27FC236}">
+                <a16:creationId xmlns:a16="http://schemas.microsoft.com/office/drawing/2014/main" id="{479F2877-3AA3-F94C-3BB7-F02DF178E119}"/>
+              </a:ext>
+            </a:extLst>
+          </p:cNvPr>
+          <p:cNvSpPr/>
+          <p:nvPr/>
+        </p:nvSpPr>
+        <p:spPr>
+          <a:xfrm rot="5400000">
+            <a:off x="1348356" y="3725111"/>
+            <a:ext cx="735443" cy="653048"/>
+          </a:xfrm>
+          <a:prstGeom prst="rightArrow">
+            <a:avLst/>
+          </a:prstGeom>
+          <a:noFill/>
+          <a:ln w="25400"/>
+        </p:spPr>
+        <p:style>
+          <a:lnRef idx="2">
+            <a:schemeClr val="accent1">
+              <a:shade val="15000"/>
+            </a:schemeClr>
+          </a:lnRef>
+          <a:fillRef idx="1">
+            <a:schemeClr val="accent1"/>
+          </a:fillRef>
+          <a:effectRef idx="0">
+            <a:schemeClr val="accent1"/>
+          </a:effectRef>
+          <a:fontRef idx="minor">
+            <a:schemeClr val="lt1"/>
+          </a:fontRef>
+        </p:style>
+        <p:txBody>
+          <a:bodyPr rtlCol="0" anchor="ctr"/>
+          <a:lstStyle/>
+          <a:p>
+            <a:pPr algn="ctr"/>
+            <a:r>
+              <a:rPr lang="de-CH" sz="1400" b="1" dirty="0" err="1">
+                <a:solidFill>
+                  <a:schemeClr val="tx1"/>
+                </a:solidFill>
+                <a:latin typeface="Arial" panose="020B0604020202020204" pitchFamily="34" charset="0"/>
+                <a:cs typeface="Arial" panose="020B0604020202020204" pitchFamily="34" charset="0"/>
+              </a:rPr>
+              <a:t>init</a:t>
             </a:r>
             <a:endParaRPr lang="de-CH" sz="1400" b="1" dirty="0">
               <a:solidFill>
@@ -3142,479 +3415,14 @@
               <a:cs typeface="Arial" panose="020B0604020202020204" pitchFamily="34" charset="0"/>
             </a:endParaRPr>
           </a:p>
-          <a:p>
-            <a:endParaRPr lang="de-CH" sz="1000" b="1" dirty="0">
-              <a:solidFill>
-                <a:schemeClr val="tx1"/>
-              </a:solidFill>
-              <a:latin typeface="Arial" panose="020B0604020202020204" pitchFamily="34" charset="0"/>
-              <a:cs typeface="Arial" panose="020B0604020202020204" pitchFamily="34" charset="0"/>
-            </a:endParaRPr>
-          </a:p>
-          <a:p>
-            <a:endParaRPr lang="de-CH" sz="1000" b="1" dirty="0">
-              <a:solidFill>
-                <a:schemeClr val="tx1"/>
-              </a:solidFill>
-              <a:latin typeface="Arial" panose="020B0604020202020204" pitchFamily="34" charset="0"/>
-              <a:cs typeface="Arial" panose="020B0604020202020204" pitchFamily="34" charset="0"/>
-            </a:endParaRPr>
-          </a:p>
-          <a:p>
-            <a:r>
-              <a:rPr lang="de-CH" sz="1000" b="1" dirty="0" err="1">
-                <a:solidFill>
-                  <a:schemeClr val="tx1"/>
-                </a:solidFill>
-                <a:latin typeface="Arial" panose="020B0604020202020204" pitchFamily="34" charset="0"/>
-                <a:cs typeface="Arial" panose="020B0604020202020204" pitchFamily="34" charset="0"/>
-              </a:rPr>
-              <a:t>Get</a:t>
-            </a:r>
-            <a:r>
-              <a:rPr lang="de-CH" sz="1000" b="1" dirty="0">
-                <a:solidFill>
-                  <a:schemeClr val="tx1"/>
-                </a:solidFill>
-                <a:latin typeface="Arial" panose="020B0604020202020204" pitchFamily="34" charset="0"/>
-                <a:cs typeface="Arial" panose="020B0604020202020204" pitchFamily="34" charset="0"/>
-              </a:rPr>
-              <a:t> HTML </a:t>
-            </a:r>
-            <a:r>
-              <a:rPr lang="de-CH" sz="1000" b="1" dirty="0" err="1">
-                <a:solidFill>
-                  <a:schemeClr val="tx1"/>
-                </a:solidFill>
-                <a:latin typeface="Arial" panose="020B0604020202020204" pitchFamily="34" charset="0"/>
-                <a:cs typeface="Arial" panose="020B0604020202020204" pitchFamily="34" charset="0"/>
-              </a:rPr>
-              <a:t>string</a:t>
-            </a:r>
-            <a:r>
-              <a:rPr lang="de-CH" sz="1000" b="1" dirty="0">
-                <a:solidFill>
-                  <a:schemeClr val="tx1"/>
-                </a:solidFill>
-                <a:latin typeface="Arial" panose="020B0604020202020204" pitchFamily="34" charset="0"/>
-                <a:cs typeface="Arial" panose="020B0604020202020204" pitchFamily="34" charset="0"/>
-              </a:rPr>
-              <a:t> </a:t>
-            </a:r>
-            <a:r>
-              <a:rPr lang="de-CH" sz="1000" b="1" dirty="0" err="1">
-                <a:solidFill>
-                  <a:schemeClr val="tx1"/>
-                </a:solidFill>
-                <a:latin typeface="Arial" panose="020B0604020202020204" pitchFamily="34" charset="0"/>
-                <a:cs typeface="Arial" panose="020B0604020202020204" pitchFamily="34" charset="0"/>
-              </a:rPr>
-              <a:t>for</a:t>
-            </a:r>
-            <a:r>
-              <a:rPr lang="de-CH" sz="1000" b="1" dirty="0">
-                <a:solidFill>
-                  <a:schemeClr val="tx1"/>
-                </a:solidFill>
-                <a:latin typeface="Arial" panose="020B0604020202020204" pitchFamily="34" charset="0"/>
-                <a:cs typeface="Arial" panose="020B0604020202020204" pitchFamily="34" charset="0"/>
-              </a:rPr>
-              <a:t> </a:t>
-            </a:r>
-            <a:r>
-              <a:rPr lang="de-CH" sz="1000" b="1" dirty="0" err="1">
-                <a:solidFill>
-                  <a:schemeClr val="tx1"/>
-                </a:solidFill>
-                <a:latin typeface="Arial" panose="020B0604020202020204" pitchFamily="34" charset="0"/>
-                <a:cs typeface="Arial" panose="020B0604020202020204" pitchFamily="34" charset="0"/>
-              </a:rPr>
-              <a:t>seat</a:t>
-            </a:r>
-            <a:r>
-              <a:rPr lang="de-CH" sz="1000" b="1" dirty="0">
-                <a:solidFill>
-                  <a:schemeClr val="tx1"/>
-                </a:solidFill>
-                <a:latin typeface="Arial" panose="020B0604020202020204" pitchFamily="34" charset="0"/>
-                <a:cs typeface="Arial" panose="020B0604020202020204" pitchFamily="34" charset="0"/>
-              </a:rPr>
-              <a:t> plan </a:t>
-            </a:r>
-            <a:r>
-              <a:rPr lang="de-CH" sz="1000" b="1" dirty="0" err="1">
-                <a:solidFill>
-                  <a:schemeClr val="tx1"/>
-                </a:solidFill>
-                <a:latin typeface="Arial" panose="020B0604020202020204" pitchFamily="34" charset="0"/>
-                <a:cs typeface="Arial" panose="020B0604020202020204" pitchFamily="34" charset="0"/>
-              </a:rPr>
-              <a:t>with</a:t>
-            </a:r>
-            <a:r>
-              <a:rPr lang="de-CH" sz="1000" b="1" dirty="0">
-                <a:solidFill>
-                  <a:schemeClr val="tx1"/>
-                </a:solidFill>
-                <a:latin typeface="Arial" panose="020B0604020202020204" pitchFamily="34" charset="0"/>
-                <a:cs typeface="Arial" panose="020B0604020202020204" pitchFamily="34" charset="0"/>
-              </a:rPr>
-              <a:t> </a:t>
-            </a:r>
-            <a:r>
-              <a:rPr lang="de-CH" sz="1000" b="1" dirty="0" err="1">
-                <a:solidFill>
-                  <a:schemeClr val="tx1"/>
-                </a:solidFill>
-                <a:latin typeface="Arial" panose="020B0604020202020204" pitchFamily="34" charset="0"/>
-                <a:cs typeface="Arial" panose="020B0604020202020204" pitchFamily="34" charset="0"/>
-              </a:rPr>
-              <a:t>names</a:t>
-            </a:r>
-            <a:endParaRPr lang="de-CH" sz="1000" b="1" dirty="0">
-              <a:solidFill>
-                <a:schemeClr val="tx1"/>
-              </a:solidFill>
-              <a:latin typeface="Arial" panose="020B0604020202020204" pitchFamily="34" charset="0"/>
-              <a:cs typeface="Arial" panose="020B0604020202020204" pitchFamily="34" charset="0"/>
-            </a:endParaRPr>
-          </a:p>
-          <a:p>
-            <a:endParaRPr lang="de-CH" sz="1000" b="1" dirty="0">
-              <a:solidFill>
-                <a:schemeClr val="tx1"/>
-              </a:solidFill>
-              <a:latin typeface="Arial" panose="020B0604020202020204" pitchFamily="34" charset="0"/>
-              <a:cs typeface="Arial" panose="020B0604020202020204" pitchFamily="34" charset="0"/>
-            </a:endParaRPr>
-          </a:p>
-          <a:p>
-            <a:endParaRPr lang="de-CH" sz="1000" b="1" dirty="0">
-              <a:solidFill>
-                <a:schemeClr val="tx1"/>
-              </a:solidFill>
-              <a:latin typeface="Arial" panose="020B0604020202020204" pitchFamily="34" charset="0"/>
-              <a:cs typeface="Arial" panose="020B0604020202020204" pitchFamily="34" charset="0"/>
-            </a:endParaRPr>
-          </a:p>
-          <a:p>
-            <a:r>
-              <a:rPr lang="de-CH" sz="1000" b="1" dirty="0" err="1">
-                <a:solidFill>
-                  <a:schemeClr val="tx1"/>
-                </a:solidFill>
-                <a:latin typeface="Arial" panose="020B0604020202020204" pitchFamily="34" charset="0"/>
-                <a:cs typeface="Arial" panose="020B0604020202020204" pitchFamily="34" charset="0"/>
-              </a:rPr>
-              <a:t>Get</a:t>
-            </a:r>
-            <a:r>
-              <a:rPr lang="de-CH" sz="1000" b="1" dirty="0">
-                <a:solidFill>
-                  <a:schemeClr val="tx1"/>
-                </a:solidFill>
-                <a:latin typeface="Arial" panose="020B0604020202020204" pitchFamily="34" charset="0"/>
-                <a:cs typeface="Arial" panose="020B0604020202020204" pitchFamily="34" charset="0"/>
-              </a:rPr>
-              <a:t> HTML </a:t>
-            </a:r>
-            <a:r>
-              <a:rPr lang="de-CH" sz="1000" b="1" dirty="0" err="1">
-                <a:solidFill>
-                  <a:schemeClr val="tx1"/>
-                </a:solidFill>
-                <a:latin typeface="Arial" panose="020B0604020202020204" pitchFamily="34" charset="0"/>
-                <a:cs typeface="Arial" panose="020B0604020202020204" pitchFamily="34" charset="0"/>
-              </a:rPr>
-              <a:t>strings</a:t>
-            </a:r>
-            <a:r>
-              <a:rPr lang="de-CH" sz="1000" b="1" dirty="0">
-                <a:solidFill>
-                  <a:schemeClr val="tx1"/>
-                </a:solidFill>
-                <a:latin typeface="Arial" panose="020B0604020202020204" pitchFamily="34" charset="0"/>
-                <a:cs typeface="Arial" panose="020B0604020202020204" pitchFamily="34" charset="0"/>
-              </a:rPr>
-              <a:t> (Table) </a:t>
-            </a:r>
-            <a:r>
-              <a:rPr lang="de-CH" sz="1000" b="1" dirty="0" err="1">
-                <a:solidFill>
-                  <a:schemeClr val="tx1"/>
-                </a:solidFill>
-                <a:latin typeface="Arial" panose="020B0604020202020204" pitchFamily="34" charset="0"/>
-                <a:cs typeface="Arial" panose="020B0604020202020204" pitchFamily="34" charset="0"/>
-              </a:rPr>
-              <a:t>for</a:t>
-            </a:r>
-            <a:r>
-              <a:rPr lang="de-CH" sz="1000" b="1" dirty="0">
-                <a:solidFill>
-                  <a:schemeClr val="tx1"/>
-                </a:solidFill>
-                <a:latin typeface="Arial" panose="020B0604020202020204" pitchFamily="34" charset="0"/>
-                <a:cs typeface="Arial" panose="020B0604020202020204" pitchFamily="34" charset="0"/>
-              </a:rPr>
-              <a:t> </a:t>
-            </a:r>
-            <a:r>
-              <a:rPr lang="de-CH" sz="1000" b="1" dirty="0" err="1">
-                <a:solidFill>
-                  <a:schemeClr val="tx1"/>
-                </a:solidFill>
-                <a:latin typeface="Arial" panose="020B0604020202020204" pitchFamily="34" charset="0"/>
-                <a:cs typeface="Arial" panose="020B0604020202020204" pitchFamily="34" charset="0"/>
-              </a:rPr>
-              <a:t>the</a:t>
-            </a:r>
-            <a:r>
-              <a:rPr lang="de-CH" sz="1000" b="1" dirty="0">
-                <a:solidFill>
-                  <a:schemeClr val="tx1"/>
-                </a:solidFill>
-                <a:latin typeface="Arial" panose="020B0604020202020204" pitchFamily="34" charset="0"/>
-                <a:cs typeface="Arial" panose="020B0604020202020204" pitchFamily="34" charset="0"/>
-              </a:rPr>
-              <a:t> </a:t>
-            </a:r>
-            <a:r>
-              <a:rPr lang="de-CH" sz="1000" b="1" dirty="0" err="1">
-                <a:solidFill>
-                  <a:schemeClr val="tx1"/>
-                </a:solidFill>
-                <a:latin typeface="Arial" panose="020B0604020202020204" pitchFamily="34" charset="0"/>
-                <a:cs typeface="Arial" panose="020B0604020202020204" pitchFamily="34" charset="0"/>
-              </a:rPr>
-              <a:t>cards</a:t>
-            </a:r>
-            <a:endParaRPr lang="de-CH" sz="1000" b="1" dirty="0">
-              <a:solidFill>
-                <a:schemeClr val="tx1"/>
-              </a:solidFill>
-              <a:latin typeface="Arial" panose="020B0604020202020204" pitchFamily="34" charset="0"/>
-              <a:cs typeface="Arial" panose="020B0604020202020204" pitchFamily="34" charset="0"/>
-            </a:endParaRPr>
-          </a:p>
-          <a:p>
-            <a:endParaRPr lang="de-CH" sz="1000" b="1" dirty="0">
-              <a:solidFill>
-                <a:schemeClr val="tx1"/>
-              </a:solidFill>
-              <a:latin typeface="Arial" panose="020B0604020202020204" pitchFamily="34" charset="0"/>
-              <a:cs typeface="Arial" panose="020B0604020202020204" pitchFamily="34" charset="0"/>
-            </a:endParaRPr>
-          </a:p>
-          <a:p>
-            <a:r>
-              <a:rPr lang="de-CH" sz="1000" b="1" dirty="0" err="1">
-                <a:solidFill>
-                  <a:schemeClr val="tx1"/>
-                </a:solidFill>
-                <a:latin typeface="Arial" panose="020B0604020202020204" pitchFamily="34" charset="0"/>
-                <a:cs typeface="Arial" panose="020B0604020202020204" pitchFamily="34" charset="0"/>
-              </a:rPr>
-              <a:t>Window.open</a:t>
-            </a:r>
-            <a:r>
-              <a:rPr lang="de-CH" sz="1000" b="1" dirty="0">
-                <a:solidFill>
-                  <a:schemeClr val="tx1"/>
-                </a:solidFill>
-                <a:latin typeface="Arial" panose="020B0604020202020204" pitchFamily="34" charset="0"/>
-                <a:cs typeface="Arial" panose="020B0604020202020204" pitchFamily="34" charset="0"/>
-              </a:rPr>
-              <a:t>(ReservationPrint.htm)</a:t>
-            </a:r>
-          </a:p>
-          <a:p>
-            <a:endParaRPr lang="de-CH" sz="1000" b="1" dirty="0">
-              <a:solidFill>
-                <a:schemeClr val="tx1"/>
-              </a:solidFill>
-              <a:latin typeface="Arial" panose="020B0604020202020204" pitchFamily="34" charset="0"/>
-              <a:cs typeface="Arial" panose="020B0604020202020204" pitchFamily="34" charset="0"/>
-            </a:endParaRPr>
-          </a:p>
-          <a:p>
-            <a:r>
-              <a:rPr lang="de-CH" sz="1000" b="1" dirty="0">
-                <a:solidFill>
-                  <a:schemeClr val="tx1"/>
-                </a:solidFill>
-                <a:latin typeface="Arial" panose="020B0604020202020204" pitchFamily="34" charset="0"/>
-                <a:cs typeface="Arial" panose="020B0604020202020204" pitchFamily="34" charset="0"/>
-              </a:rPr>
-              <a:t>Pass </a:t>
-            </a:r>
-            <a:r>
-              <a:rPr lang="de-CH" sz="1000" b="1" dirty="0" err="1">
-                <a:solidFill>
-                  <a:schemeClr val="tx1"/>
-                </a:solidFill>
-                <a:latin typeface="Arial" panose="020B0604020202020204" pitchFamily="34" charset="0"/>
-                <a:cs typeface="Arial" panose="020B0604020202020204" pitchFamily="34" charset="0"/>
-              </a:rPr>
-              <a:t>data</a:t>
-            </a:r>
-            <a:r>
-              <a:rPr lang="de-CH" sz="1000" b="1" dirty="0">
-                <a:solidFill>
-                  <a:schemeClr val="tx1"/>
-                </a:solidFill>
-                <a:latin typeface="Arial" panose="020B0604020202020204" pitchFamily="34" charset="0"/>
-                <a:cs typeface="Arial" panose="020B0604020202020204" pitchFamily="34" charset="0"/>
-              </a:rPr>
-              <a:t> </a:t>
-            </a:r>
-            <a:r>
-              <a:rPr lang="de-CH" sz="1000" b="1" dirty="0" err="1">
-                <a:solidFill>
-                  <a:schemeClr val="tx1"/>
-                </a:solidFill>
-                <a:latin typeface="Arial" panose="020B0604020202020204" pitchFamily="34" charset="0"/>
-                <a:cs typeface="Arial" panose="020B0604020202020204" pitchFamily="34" charset="0"/>
-              </a:rPr>
-              <a:t>to</a:t>
-            </a:r>
-            <a:r>
-              <a:rPr lang="de-CH" sz="1000" b="1" dirty="0">
-                <a:solidFill>
-                  <a:schemeClr val="tx1"/>
-                </a:solidFill>
-                <a:latin typeface="Arial" panose="020B0604020202020204" pitchFamily="34" charset="0"/>
-                <a:cs typeface="Arial" panose="020B0604020202020204" pitchFamily="34" charset="0"/>
-              </a:rPr>
-              <a:t> </a:t>
-            </a:r>
-            <a:r>
-              <a:rPr lang="de-CH" sz="1000" b="1" dirty="0" err="1">
-                <a:solidFill>
-                  <a:schemeClr val="tx1"/>
-                </a:solidFill>
-                <a:latin typeface="Arial" panose="020B0604020202020204" pitchFamily="34" charset="0"/>
-                <a:cs typeface="Arial" panose="020B0604020202020204" pitchFamily="34" charset="0"/>
-              </a:rPr>
-              <a:t>the</a:t>
-            </a:r>
-            <a:r>
-              <a:rPr lang="de-CH" sz="1000" b="1" dirty="0">
-                <a:solidFill>
-                  <a:schemeClr val="tx1"/>
-                </a:solidFill>
-                <a:latin typeface="Arial" panose="020B0604020202020204" pitchFamily="34" charset="0"/>
-                <a:cs typeface="Arial" panose="020B0604020202020204" pitchFamily="34" charset="0"/>
-              </a:rPr>
-              <a:t> </a:t>
-            </a:r>
-            <a:r>
-              <a:rPr lang="de-CH" sz="1000" b="1" dirty="0" err="1">
-                <a:solidFill>
-                  <a:schemeClr val="tx1"/>
-                </a:solidFill>
-                <a:latin typeface="Arial" panose="020B0604020202020204" pitchFamily="34" charset="0"/>
-                <a:cs typeface="Arial" panose="020B0604020202020204" pitchFamily="34" charset="0"/>
-              </a:rPr>
-              <a:t>opened</a:t>
-            </a:r>
-            <a:r>
-              <a:rPr lang="de-CH" sz="1000" b="1" dirty="0">
-                <a:solidFill>
-                  <a:schemeClr val="tx1"/>
-                </a:solidFill>
-                <a:latin typeface="Arial" panose="020B0604020202020204" pitchFamily="34" charset="0"/>
-                <a:cs typeface="Arial" panose="020B0604020202020204" pitchFamily="34" charset="0"/>
-              </a:rPr>
-              <a:t> </a:t>
-            </a:r>
-            <a:r>
-              <a:rPr lang="de-CH" sz="1000" b="1" dirty="0" err="1">
-                <a:solidFill>
-                  <a:schemeClr val="tx1"/>
-                </a:solidFill>
-                <a:latin typeface="Arial" panose="020B0604020202020204" pitchFamily="34" charset="0"/>
-                <a:cs typeface="Arial" panose="020B0604020202020204" pitchFamily="34" charset="0"/>
-              </a:rPr>
-              <a:t>object</a:t>
-            </a:r>
-            <a:r>
-              <a:rPr lang="de-CH" sz="1000" b="1" dirty="0">
-                <a:solidFill>
-                  <a:schemeClr val="tx1"/>
-                </a:solidFill>
-                <a:latin typeface="Arial" panose="020B0604020202020204" pitchFamily="34" charset="0"/>
-                <a:cs typeface="Arial" panose="020B0604020202020204" pitchFamily="34" charset="0"/>
-              </a:rPr>
-              <a:t> and </a:t>
-            </a:r>
-          </a:p>
-          <a:p>
-            <a:r>
-              <a:rPr lang="de-CH" sz="1000" b="1" dirty="0" err="1">
-                <a:solidFill>
-                  <a:schemeClr val="tx1"/>
-                </a:solidFill>
-                <a:latin typeface="Arial" panose="020B0604020202020204" pitchFamily="34" charset="0"/>
-                <a:cs typeface="Arial" panose="020B0604020202020204" pitchFamily="34" charset="0"/>
-              </a:rPr>
-              <a:t>To</a:t>
-            </a:r>
-            <a:r>
-              <a:rPr lang="de-CH" sz="1000" b="1" dirty="0">
-                <a:solidFill>
-                  <a:schemeClr val="tx1"/>
-                </a:solidFill>
-                <a:latin typeface="Arial" panose="020B0604020202020204" pitchFamily="34" charset="0"/>
-                <a:cs typeface="Arial" panose="020B0604020202020204" pitchFamily="34" charset="0"/>
-              </a:rPr>
-              <a:t> </a:t>
-            </a:r>
-            <a:r>
-              <a:rPr lang="de-CH" sz="1000" b="1" dirty="0" err="1">
-                <a:solidFill>
-                  <a:schemeClr val="tx1"/>
-                </a:solidFill>
-                <a:latin typeface="Arial" panose="020B0604020202020204" pitchFamily="34" charset="0"/>
-                <a:cs typeface="Arial" panose="020B0604020202020204" pitchFamily="34" charset="0"/>
-              </a:rPr>
-              <a:t>local</a:t>
-            </a:r>
-            <a:r>
-              <a:rPr lang="de-CH" sz="1000" b="1" dirty="0">
-                <a:solidFill>
-                  <a:schemeClr val="tx1"/>
-                </a:solidFill>
-                <a:latin typeface="Arial" panose="020B0604020202020204" pitchFamily="34" charset="0"/>
-                <a:cs typeface="Arial" panose="020B0604020202020204" pitchFamily="34" charset="0"/>
-              </a:rPr>
-              <a:t> </a:t>
-            </a:r>
-            <a:r>
-              <a:rPr lang="de-CH" sz="1000" b="1" dirty="0" err="1">
-                <a:solidFill>
-                  <a:schemeClr val="tx1"/>
-                </a:solidFill>
-                <a:latin typeface="Arial" panose="020B0604020202020204" pitchFamily="34" charset="0"/>
-                <a:cs typeface="Arial" panose="020B0604020202020204" pitchFamily="34" charset="0"/>
-              </a:rPr>
-              <a:t>storage</a:t>
-            </a:r>
-            <a:endParaRPr lang="de-CH" sz="1000" b="1" dirty="0">
-              <a:solidFill>
-                <a:schemeClr val="tx1"/>
-              </a:solidFill>
-              <a:latin typeface="Arial" panose="020B0604020202020204" pitchFamily="34" charset="0"/>
-              <a:cs typeface="Arial" panose="020B0604020202020204" pitchFamily="34" charset="0"/>
-            </a:endParaRPr>
-          </a:p>
-        </p:txBody>
-      </p:sp>
-      <p:sp>
-        <p:nvSpPr>
-          <p:cNvPr id="6" name="Rechteck 5">
+        </p:txBody>
+      </p:sp>
+      <p:sp>
+        <p:nvSpPr>
+          <p:cNvPr id="9" name="Rechteck 8">
             <a:extLst>
               <a:ext uri="{FF2B5EF4-FFF2-40B4-BE49-F238E27FC236}">
-                <a16:creationId xmlns:a16="http://schemas.microsoft.com/office/drawing/2014/main" id="{EB651EB5-C44A-7F89-CEDA-CF6CDE156510}"/>
+                <a16:creationId xmlns:a16="http://schemas.microsoft.com/office/drawing/2014/main" id="{BE7AF109-4FA9-CA37-A81C-C79F7D021E38}"/>
               </a:ext>
             </a:extLst>
           </p:cNvPr>
@@ -3623,8 +3431,8 @@
         </p:nvSpPr>
         <p:spPr>
           <a:xfrm>
-            <a:off x="7211626" y="884208"/>
-            <a:ext cx="2974904" cy="470139"/>
+            <a:off x="3483281" y="2061652"/>
+            <a:ext cx="2221330" cy="889233"/>
           </a:xfrm>
           <a:prstGeom prst="rect">
             <a:avLst/>
@@ -3658,24 +3466,123 @@
           <a:p>
             <a:pPr algn="ctr"/>
             <a:r>
-              <a:rPr lang="de-CH" sz="1600" b="1" dirty="0">
-                <a:solidFill>
-                  <a:schemeClr val="tx1"/>
-                </a:solidFill>
-                <a:latin typeface="Arial" panose="020B0604020202020204" pitchFamily="34" charset="0"/>
-                <a:cs typeface="Arial" panose="020B0604020202020204" pitchFamily="34" charset="0"/>
-              </a:rPr>
-              <a:t>ReservationPrint.htm</a:t>
-            </a:r>
-          </a:p>
-        </p:txBody>
-      </p:sp>
-      <p:sp>
-        <p:nvSpPr>
-          <p:cNvPr id="7" name="Rechteck 6">
+              <a:rPr lang="de-CH" sz="1050" b="1" dirty="0" err="1">
+                <a:solidFill>
+                  <a:schemeClr val="tx1"/>
+                </a:solidFill>
+                <a:latin typeface="Arial" panose="020B0604020202020204" pitchFamily="34" charset="0"/>
+                <a:cs typeface="Arial" panose="020B0604020202020204" pitchFamily="34" charset="0"/>
+              </a:rPr>
+              <a:t>onClickOfNameCardsButton</a:t>
+            </a:r>
+            <a:r>
+              <a:rPr lang="de-CH" sz="1050" b="1" dirty="0">
+                <a:solidFill>
+                  <a:schemeClr val="tx1"/>
+                </a:solidFill>
+                <a:latin typeface="Arial" panose="020B0604020202020204" pitchFamily="34" charset="0"/>
+                <a:cs typeface="Arial" panose="020B0604020202020204" pitchFamily="34" charset="0"/>
+              </a:rPr>
+              <a:t>()</a:t>
+            </a:r>
+          </a:p>
+          <a:p>
+            <a:endParaRPr lang="de-CH" sz="1000" b="1" dirty="0">
+              <a:solidFill>
+                <a:schemeClr val="tx1"/>
+              </a:solidFill>
+              <a:latin typeface="Arial" panose="020B0604020202020204" pitchFamily="34" charset="0"/>
+              <a:cs typeface="Arial" panose="020B0604020202020204" pitchFamily="34" charset="0"/>
+            </a:endParaRPr>
+          </a:p>
+          <a:p>
+            <a:r>
+              <a:rPr lang="de-CH" sz="1000" b="1" i="1" dirty="0" err="1">
+                <a:solidFill>
+                  <a:schemeClr val="tx1"/>
+                </a:solidFill>
+                <a:latin typeface="Arial" panose="020B0604020202020204" pitchFamily="34" charset="0"/>
+                <a:cs typeface="Arial" panose="020B0604020202020204" pitchFamily="34" charset="0"/>
+              </a:rPr>
+              <a:t>execCreateNameCards</a:t>
+            </a:r>
+            <a:r>
+              <a:rPr lang="de-CH" sz="1000" b="1" i="1" dirty="0">
+                <a:solidFill>
+                  <a:schemeClr val="tx1"/>
+                </a:solidFill>
+                <a:latin typeface="Arial" panose="020B0604020202020204" pitchFamily="34" charset="0"/>
+                <a:cs typeface="Arial" panose="020B0604020202020204" pitchFamily="34" charset="0"/>
+              </a:rPr>
+              <a:t>()</a:t>
+            </a:r>
+          </a:p>
+          <a:p>
+            <a:r>
+              <a:rPr lang="de-CH" sz="1000" b="1" i="1" dirty="0">
+                <a:solidFill>
+                  <a:schemeClr val="tx1"/>
+                </a:solidFill>
+                <a:latin typeface="Arial" panose="020B0604020202020204" pitchFamily="34" charset="0"/>
+                <a:cs typeface="Arial" panose="020B0604020202020204" pitchFamily="34" charset="0"/>
+              </a:rPr>
+              <a:t>Set </a:t>
+            </a:r>
+            <a:r>
+              <a:rPr lang="de-CH" sz="1000" b="1" i="1" dirty="0" err="1">
+                <a:solidFill>
+                  <a:schemeClr val="tx1"/>
+                </a:solidFill>
+                <a:latin typeface="Arial" panose="020B0604020202020204" pitchFamily="34" charset="0"/>
+                <a:cs typeface="Arial" panose="020B0604020202020204" pitchFamily="34" charset="0"/>
+              </a:rPr>
+              <a:t>callback</a:t>
+            </a:r>
+            <a:r>
+              <a:rPr lang="de-CH" sz="1000" b="1" i="1" dirty="0">
+                <a:solidFill>
+                  <a:schemeClr val="tx1"/>
+                </a:solidFill>
+                <a:latin typeface="Arial" panose="020B0604020202020204" pitchFamily="34" charset="0"/>
+                <a:cs typeface="Arial" panose="020B0604020202020204" pitchFamily="34" charset="0"/>
+              </a:rPr>
+              <a:t> </a:t>
+            </a:r>
+            <a:r>
+              <a:rPr lang="de-CH" sz="1000" b="1" i="1" dirty="0" err="1">
+                <a:solidFill>
+                  <a:schemeClr val="tx1"/>
+                </a:solidFill>
+                <a:latin typeface="Arial" panose="020B0604020202020204" pitchFamily="34" charset="0"/>
+                <a:cs typeface="Arial" panose="020B0604020202020204" pitchFamily="34" charset="0"/>
+              </a:rPr>
+              <a:t>function</a:t>
+            </a:r>
+            <a:endParaRPr lang="de-CH" sz="1000" b="1" i="1" dirty="0">
+              <a:solidFill>
+                <a:schemeClr val="tx1"/>
+              </a:solidFill>
+              <a:latin typeface="Arial" panose="020B0604020202020204" pitchFamily="34" charset="0"/>
+              <a:cs typeface="Arial" panose="020B0604020202020204" pitchFamily="34" charset="0"/>
+            </a:endParaRPr>
+          </a:p>
+          <a:p>
+            <a:endParaRPr lang="de-CH" sz="1000" b="1" dirty="0">
+              <a:solidFill>
+                <a:schemeClr val="tx1"/>
+              </a:solidFill>
+              <a:latin typeface="Arial" panose="020B0604020202020204" pitchFamily="34" charset="0"/>
+              <a:cs typeface="Arial" panose="020B0604020202020204" pitchFamily="34" charset="0"/>
+            </a:endParaRPr>
+          </a:p>
+        </p:txBody>
+      </p:sp>
+      <p:sp>
+        <p:nvSpPr>
+          <p:cNvPr id="10" name="Rechteck 9">
             <a:extLst>
               <a:ext uri="{FF2B5EF4-FFF2-40B4-BE49-F238E27FC236}">
-                <a16:creationId xmlns:a16="http://schemas.microsoft.com/office/drawing/2014/main" id="{D301F0B5-9AB6-6505-1D92-BFA105F73C7B}"/>
+                <a16:creationId xmlns:a16="http://schemas.microsoft.com/office/drawing/2014/main" id="{6DCAD88E-59E4-7404-37A6-5ACC10F772BE}"/>
               </a:ext>
             </a:extLst>
           </p:cNvPr>
@@ -3684,8 +3591,8 @@
         </p:nvSpPr>
         <p:spPr>
           <a:xfrm>
-            <a:off x="7220253" y="1353841"/>
-            <a:ext cx="2974904" cy="583640"/>
+            <a:off x="3483280" y="3063012"/>
+            <a:ext cx="2221330" cy="889233"/>
           </a:xfrm>
           <a:prstGeom prst="rect">
             <a:avLst/>
@@ -3717,61 +3624,82 @@
           <a:bodyPr rtlCol="0" anchor="ctr"/>
           <a:lstStyle/>
           <a:p>
-            <a:r>
-              <a:rPr lang="de-CH" sz="1000" b="1" dirty="0">
-                <a:solidFill>
-                  <a:schemeClr val="tx1"/>
-                </a:solidFill>
-                <a:latin typeface="Arial" panose="020B0604020202020204" pitchFamily="34" charset="0"/>
-                <a:cs typeface="Arial" panose="020B0604020202020204" pitchFamily="34" charset="0"/>
-              </a:rPr>
-              <a:t>&lt;</a:t>
-            </a:r>
-            <a:r>
-              <a:rPr lang="de-CH" sz="1000" b="1" dirty="0" err="1">
-                <a:solidFill>
-                  <a:schemeClr val="tx1"/>
-                </a:solidFill>
-                <a:latin typeface="Arial" panose="020B0604020202020204" pitchFamily="34" charset="0"/>
-                <a:cs typeface="Arial" panose="020B0604020202020204" pitchFamily="34" charset="0"/>
-              </a:rPr>
-              <a:t>header</a:t>
-            </a:r>
-            <a:r>
-              <a:rPr lang="de-CH" sz="1000" b="1" dirty="0">
-                <a:solidFill>
-                  <a:schemeClr val="tx1"/>
-                </a:solidFill>
-                <a:latin typeface="Arial" panose="020B0604020202020204" pitchFamily="34" charset="0"/>
-                <a:cs typeface="Arial" panose="020B0604020202020204" pitchFamily="34" charset="0"/>
-              </a:rPr>
-              <a:t>&gt;</a:t>
-            </a:r>
-          </a:p>
-          <a:p>
             <a:pPr algn="ctr"/>
             <a:r>
-              <a:rPr lang="de-CH" sz="1000" b="1" dirty="0">
-                <a:solidFill>
-                  <a:schemeClr val="tx1"/>
-                </a:solidFill>
-                <a:latin typeface="Arial" panose="020B0604020202020204" pitchFamily="34" charset="0"/>
-                <a:cs typeface="Arial" panose="020B0604020202020204" pitchFamily="34" charset="0"/>
-              </a:rPr>
-              <a:t>Styles </a:t>
-            </a:r>
-            <a:r>
-              <a:rPr lang="de-CH" sz="1000" b="1" dirty="0" err="1">
-                <a:solidFill>
-                  <a:schemeClr val="tx1"/>
-                </a:solidFill>
-                <a:latin typeface="Arial" panose="020B0604020202020204" pitchFamily="34" charset="0"/>
-                <a:cs typeface="Arial" panose="020B0604020202020204" pitchFamily="34" charset="0"/>
-              </a:rPr>
-              <a:t>for</a:t>
-            </a:r>
-            <a:r>
-              <a:rPr lang="de-CH" sz="1000" b="1" dirty="0">
+              <a:rPr lang="de-CH" sz="1100" b="1" dirty="0" err="1">
+                <a:solidFill>
+                  <a:schemeClr val="tx1"/>
+                </a:solidFill>
+                <a:latin typeface="Arial" panose="020B0604020202020204" pitchFamily="34" charset="0"/>
+                <a:cs typeface="Arial" panose="020B0604020202020204" pitchFamily="34" charset="0"/>
+              </a:rPr>
+              <a:t>onClickOfTicketCardsButton</a:t>
+            </a:r>
+            <a:r>
+              <a:rPr lang="de-CH" sz="1100" b="1" dirty="0">
+                <a:solidFill>
+                  <a:schemeClr val="tx1"/>
+                </a:solidFill>
+                <a:latin typeface="Arial" panose="020B0604020202020204" pitchFamily="34" charset="0"/>
+                <a:cs typeface="Arial" panose="020B0604020202020204" pitchFamily="34" charset="0"/>
+              </a:rPr>
+              <a:t>()</a:t>
+            </a:r>
+          </a:p>
+          <a:p>
+            <a:endParaRPr lang="de-CH" sz="1000" b="1" dirty="0">
+              <a:solidFill>
+                <a:schemeClr val="tx1"/>
+              </a:solidFill>
+              <a:latin typeface="Arial" panose="020B0604020202020204" pitchFamily="34" charset="0"/>
+              <a:cs typeface="Arial" panose="020B0604020202020204" pitchFamily="34" charset="0"/>
+            </a:endParaRPr>
+          </a:p>
+          <a:p>
+            <a:r>
+              <a:rPr lang="de-CH" sz="1000" b="1" i="1" dirty="0" err="1">
+                <a:solidFill>
+                  <a:schemeClr val="tx1"/>
+                </a:solidFill>
+                <a:latin typeface="Arial" panose="020B0604020202020204" pitchFamily="34" charset="0"/>
+                <a:cs typeface="Arial" panose="020B0604020202020204" pitchFamily="34" charset="0"/>
+              </a:rPr>
+              <a:t>execCreateTicketCards</a:t>
+            </a:r>
+            <a:r>
+              <a:rPr lang="de-CH" sz="1000" b="1" i="1" dirty="0">
+                <a:solidFill>
+                  <a:schemeClr val="tx1"/>
+                </a:solidFill>
+                <a:latin typeface="Arial" panose="020B0604020202020204" pitchFamily="34" charset="0"/>
+                <a:cs typeface="Arial" panose="020B0604020202020204" pitchFamily="34" charset="0"/>
+              </a:rPr>
+              <a:t>()</a:t>
+            </a:r>
+          </a:p>
+          <a:p>
+            <a:r>
+              <a:rPr lang="de-CH" sz="1000" b="1" i="1" dirty="0">
+                <a:solidFill>
+                  <a:schemeClr val="tx1"/>
+                </a:solidFill>
+                <a:latin typeface="Arial" panose="020B0604020202020204" pitchFamily="34" charset="0"/>
+                <a:cs typeface="Arial" panose="020B0604020202020204" pitchFamily="34" charset="0"/>
+              </a:rPr>
+              <a:t>Set </a:t>
+            </a:r>
+            <a:r>
+              <a:rPr lang="de-CH" sz="1000" b="1" i="1" dirty="0" err="1">
+                <a:solidFill>
+                  <a:schemeClr val="tx1"/>
+                </a:solidFill>
+                <a:latin typeface="Arial" panose="020B0604020202020204" pitchFamily="34" charset="0"/>
+                <a:cs typeface="Arial" panose="020B0604020202020204" pitchFamily="34" charset="0"/>
+              </a:rPr>
+              <a:t>callback</a:t>
+            </a:r>
+            <a:r>
+              <a:rPr lang="de-CH" sz="1000" b="1" i="1" dirty="0">
                 <a:solidFill>
                   <a:schemeClr val="tx1"/>
                 </a:solidFill>
@@ -3781,77 +3709,40 @@
               <a:t> </a:t>
             </a:r>
             <a:r>
-              <a:rPr lang="de-CH" sz="1000" b="1" dirty="0" err="1">
-                <a:solidFill>
-                  <a:schemeClr val="tx1"/>
-                </a:solidFill>
-                <a:latin typeface="Arial" panose="020B0604020202020204" pitchFamily="34" charset="0"/>
-                <a:cs typeface="Arial" panose="020B0604020202020204" pitchFamily="34" charset="0"/>
-              </a:rPr>
-              <a:t>print</a:t>
-            </a:r>
-            <a:r>
-              <a:rPr lang="de-CH" sz="1000" b="1" dirty="0">
-                <a:solidFill>
-                  <a:schemeClr val="tx1"/>
-                </a:solidFill>
-                <a:latin typeface="Arial" panose="020B0604020202020204" pitchFamily="34" charset="0"/>
-                <a:cs typeface="Arial" panose="020B0604020202020204" pitchFamily="34" charset="0"/>
-              </a:rPr>
-              <a:t>: Page </a:t>
-            </a:r>
-            <a:r>
-              <a:rPr lang="de-CH" sz="1000" b="1" dirty="0" err="1">
-                <a:solidFill>
-                  <a:schemeClr val="tx1"/>
-                </a:solidFill>
-                <a:latin typeface="Arial" panose="020B0604020202020204" pitchFamily="34" charset="0"/>
-                <a:cs typeface="Arial" panose="020B0604020202020204" pitchFamily="34" charset="0"/>
-              </a:rPr>
-              <a:t>breaks</a:t>
-            </a:r>
-            <a:r>
-              <a:rPr lang="de-CH" sz="1000" b="1" dirty="0">
-                <a:solidFill>
-                  <a:schemeClr val="tx1"/>
-                </a:solidFill>
-                <a:latin typeface="Arial" panose="020B0604020202020204" pitchFamily="34" charset="0"/>
-                <a:cs typeface="Arial" panose="020B0604020202020204" pitchFamily="34" charset="0"/>
-              </a:rPr>
-              <a:t>, etc.</a:t>
-            </a:r>
-          </a:p>
-          <a:p>
-            <a:pPr algn="ctr"/>
-            <a:r>
-              <a:rPr lang="de-CH" sz="1000" b="1" dirty="0" err="1">
-                <a:solidFill>
-                  <a:schemeClr val="tx1"/>
-                </a:solidFill>
-                <a:latin typeface="Arial" panose="020B0604020202020204" pitchFamily="34" charset="0"/>
-                <a:cs typeface="Arial" panose="020B0604020202020204" pitchFamily="34" charset="0"/>
-              </a:rPr>
-              <a:t>Incude</a:t>
-            </a:r>
-            <a:r>
-              <a:rPr lang="de-CH" sz="1000" b="1" dirty="0">
-                <a:solidFill>
-                  <a:schemeClr val="tx1"/>
-                </a:solidFill>
-                <a:latin typeface="Arial" panose="020B0604020202020204" pitchFamily="34" charset="0"/>
-                <a:cs typeface="Arial" panose="020B0604020202020204" pitchFamily="34" charset="0"/>
-              </a:rPr>
-              <a:t> Reservation.js ReservationFiles.js</a:t>
-            </a:r>
-          </a:p>
-        </p:txBody>
-      </p:sp>
-      <p:sp>
-        <p:nvSpPr>
-          <p:cNvPr id="8" name="Rechteck 7">
+              <a:rPr lang="de-CH" sz="1000" b="1" i="1" dirty="0" err="1">
+                <a:solidFill>
+                  <a:schemeClr val="tx1"/>
+                </a:solidFill>
+                <a:latin typeface="Arial" panose="020B0604020202020204" pitchFamily="34" charset="0"/>
+                <a:cs typeface="Arial" panose="020B0604020202020204" pitchFamily="34" charset="0"/>
+              </a:rPr>
+              <a:t>function</a:t>
+            </a:r>
+            <a:endParaRPr lang="de-CH" sz="1000" b="1" i="1" dirty="0">
+              <a:solidFill>
+                <a:schemeClr val="tx1"/>
+              </a:solidFill>
+              <a:latin typeface="Arial" panose="020B0604020202020204" pitchFamily="34" charset="0"/>
+              <a:cs typeface="Arial" panose="020B0604020202020204" pitchFamily="34" charset="0"/>
+            </a:endParaRPr>
+          </a:p>
+          <a:p>
+            <a:endParaRPr lang="de-CH" sz="1000" b="1" dirty="0">
+              <a:solidFill>
+                <a:schemeClr val="tx1"/>
+              </a:solidFill>
+              <a:latin typeface="Arial" panose="020B0604020202020204" pitchFamily="34" charset="0"/>
+              <a:cs typeface="Arial" panose="020B0604020202020204" pitchFamily="34" charset="0"/>
+            </a:endParaRPr>
+          </a:p>
+        </p:txBody>
+      </p:sp>
+      <p:sp>
+        <p:nvSpPr>
+          <p:cNvPr id="11" name="Pfeil: nach rechts 10">
             <a:extLst>
               <a:ext uri="{FF2B5EF4-FFF2-40B4-BE49-F238E27FC236}">
-                <a16:creationId xmlns:a16="http://schemas.microsoft.com/office/drawing/2014/main" id="{BE9CA6F3-5312-C481-D651-3FA3CDE88C91}"/>
+                <a16:creationId xmlns:a16="http://schemas.microsoft.com/office/drawing/2014/main" id="{C7672A86-9434-AA43-435A-332A0C10F1D8}"/>
               </a:ext>
             </a:extLst>
           </p:cNvPr>
@@ -3860,8 +3751,283 @@
         </p:nvSpPr>
         <p:spPr>
           <a:xfrm>
-            <a:off x="7211626" y="1937481"/>
-            <a:ext cx="2974904" cy="1155248"/>
+            <a:off x="3115955" y="2618230"/>
+            <a:ext cx="322300" cy="218488"/>
+          </a:xfrm>
+          <a:prstGeom prst="rightArrow">
+            <a:avLst/>
+          </a:prstGeom>
+          <a:noFill/>
+          <a:ln w="25400"/>
+        </p:spPr>
+        <p:style>
+          <a:lnRef idx="2">
+            <a:schemeClr val="accent1">
+              <a:shade val="15000"/>
+            </a:schemeClr>
+          </a:lnRef>
+          <a:fillRef idx="1">
+            <a:schemeClr val="accent1"/>
+          </a:fillRef>
+          <a:effectRef idx="0">
+            <a:schemeClr val="accent1"/>
+          </a:effectRef>
+          <a:fontRef idx="minor">
+            <a:schemeClr val="lt1"/>
+          </a:fontRef>
+        </p:style>
+        <p:txBody>
+          <a:bodyPr rtlCol="0" anchor="ctr"/>
+          <a:lstStyle/>
+          <a:p>
+            <a:pPr algn="ctr"/>
+            <a:endParaRPr lang="de-CH"/>
+          </a:p>
+        </p:txBody>
+      </p:sp>
+      <p:sp>
+        <p:nvSpPr>
+          <p:cNvPr id="12" name="Pfeil: nach rechts 11">
+            <a:extLst>
+              <a:ext uri="{FF2B5EF4-FFF2-40B4-BE49-F238E27FC236}">
+                <a16:creationId xmlns:a16="http://schemas.microsoft.com/office/drawing/2014/main" id="{E4A8B09B-48C1-E9FB-A72B-784B9B129BEA}"/>
+              </a:ext>
+            </a:extLst>
+          </p:cNvPr>
+          <p:cNvSpPr/>
+          <p:nvPr/>
+        </p:nvSpPr>
+        <p:spPr>
+          <a:xfrm>
+            <a:off x="3102021" y="3162402"/>
+            <a:ext cx="322300" cy="218488"/>
+          </a:xfrm>
+          <a:prstGeom prst="rightArrow">
+            <a:avLst/>
+          </a:prstGeom>
+          <a:noFill/>
+          <a:ln w="25400"/>
+        </p:spPr>
+        <p:style>
+          <a:lnRef idx="2">
+            <a:schemeClr val="accent1">
+              <a:shade val="15000"/>
+            </a:schemeClr>
+          </a:lnRef>
+          <a:fillRef idx="1">
+            <a:schemeClr val="accent1"/>
+          </a:fillRef>
+          <a:effectRef idx="0">
+            <a:schemeClr val="accent1"/>
+          </a:effectRef>
+          <a:fontRef idx="minor">
+            <a:schemeClr val="lt1"/>
+          </a:fontRef>
+        </p:style>
+        <p:txBody>
+          <a:bodyPr rtlCol="0" anchor="ctr"/>
+          <a:lstStyle/>
+          <a:p>
+            <a:pPr algn="ctr"/>
+            <a:endParaRPr lang="de-CH"/>
+          </a:p>
+        </p:txBody>
+      </p:sp>
+      <p:sp>
+        <p:nvSpPr>
+          <p:cNvPr id="13" name="Rechteck 12">
+            <a:extLst>
+              <a:ext uri="{FF2B5EF4-FFF2-40B4-BE49-F238E27FC236}">
+                <a16:creationId xmlns:a16="http://schemas.microsoft.com/office/drawing/2014/main" id="{3D9BC2DD-AEE5-0F0A-F136-B30BB24F9F1B}"/>
+              </a:ext>
+            </a:extLst>
+          </p:cNvPr>
+          <p:cNvSpPr/>
+          <p:nvPr/>
+        </p:nvSpPr>
+        <p:spPr>
+          <a:xfrm>
+            <a:off x="6369963" y="2774373"/>
+            <a:ext cx="2067456" cy="470139"/>
+          </a:xfrm>
+          <a:prstGeom prst="rect">
+            <a:avLst/>
+          </a:prstGeom>
+          <a:solidFill>
+            <a:schemeClr val="bg1">
+              <a:lumMod val="85000"/>
+            </a:schemeClr>
+          </a:solidFill>
+          <a:ln>
+            <a:solidFill>
+              <a:schemeClr val="tx1"/>
+            </a:solidFill>
+          </a:ln>
+        </p:spPr>
+        <p:style>
+          <a:lnRef idx="2">
+            <a:schemeClr val="accent1">
+              <a:shade val="50000"/>
+            </a:schemeClr>
+          </a:lnRef>
+          <a:fillRef idx="1">
+            <a:schemeClr val="accent1"/>
+          </a:fillRef>
+          <a:effectRef idx="0">
+            <a:schemeClr val="accent1"/>
+          </a:effectRef>
+          <a:fontRef idx="minor">
+            <a:schemeClr val="lt1"/>
+          </a:fontRef>
+        </p:style>
+        <p:txBody>
+          <a:bodyPr rtlCol="0" anchor="ctr"/>
+          <a:lstStyle/>
+          <a:p>
+            <a:pPr algn="ctr"/>
+            <a:r>
+              <a:rPr lang="de-CH" sz="1400" b="1" dirty="0">
+                <a:solidFill>
+                  <a:schemeClr val="tx1"/>
+                </a:solidFill>
+                <a:latin typeface="Arial" panose="020B0604020202020204" pitchFamily="34" charset="0"/>
+                <a:cs typeface="Arial" panose="020B0604020202020204" pitchFamily="34" charset="0"/>
+              </a:rPr>
+              <a:t>Class </a:t>
+            </a:r>
+          </a:p>
+          <a:p>
+            <a:pPr algn="ctr"/>
+            <a:r>
+              <a:rPr lang="de-CH" sz="1400" b="1" dirty="0" err="1">
+                <a:solidFill>
+                  <a:schemeClr val="tx1"/>
+                </a:solidFill>
+                <a:latin typeface="Arial" panose="020B0604020202020204" pitchFamily="34" charset="0"/>
+                <a:cs typeface="Arial" panose="020B0604020202020204" pitchFamily="34" charset="0"/>
+              </a:rPr>
+              <a:t>ReservationEventXml</a:t>
+            </a:r>
+            <a:r>
+              <a:rPr lang="de-CH" sz="1400" b="1" dirty="0">
+                <a:solidFill>
+                  <a:schemeClr val="tx1"/>
+                </a:solidFill>
+                <a:latin typeface="Arial" panose="020B0604020202020204" pitchFamily="34" charset="0"/>
+                <a:cs typeface="Arial" panose="020B0604020202020204" pitchFamily="34" charset="0"/>
+              </a:rPr>
+              <a:t>    </a:t>
+            </a:r>
+          </a:p>
+        </p:txBody>
+      </p:sp>
+      <p:sp>
+        <p:nvSpPr>
+          <p:cNvPr id="20" name="Pfeil: nach rechts 19">
+            <a:extLst>
+              <a:ext uri="{FF2B5EF4-FFF2-40B4-BE49-F238E27FC236}">
+                <a16:creationId xmlns:a16="http://schemas.microsoft.com/office/drawing/2014/main" id="{876612BA-18DA-7774-ED77-29C0BD6D190B}"/>
+              </a:ext>
+            </a:extLst>
+          </p:cNvPr>
+          <p:cNvSpPr/>
+          <p:nvPr/>
+        </p:nvSpPr>
+        <p:spPr>
+          <a:xfrm>
+            <a:off x="5876136" y="2646724"/>
+            <a:ext cx="322300" cy="761493"/>
+          </a:xfrm>
+          <a:prstGeom prst="rightArrow">
+            <a:avLst/>
+          </a:prstGeom>
+          <a:noFill/>
+          <a:ln w="25400"/>
+        </p:spPr>
+        <p:style>
+          <a:lnRef idx="2">
+            <a:schemeClr val="accent1">
+              <a:shade val="15000"/>
+            </a:schemeClr>
+          </a:lnRef>
+          <a:fillRef idx="1">
+            <a:schemeClr val="accent1"/>
+          </a:fillRef>
+          <a:effectRef idx="0">
+            <a:schemeClr val="accent1"/>
+          </a:effectRef>
+          <a:fontRef idx="minor">
+            <a:schemeClr val="lt1"/>
+          </a:fontRef>
+        </p:style>
+        <p:txBody>
+          <a:bodyPr rtlCol="0" anchor="ctr"/>
+          <a:lstStyle/>
+          <a:p>
+            <a:pPr algn="ctr"/>
+            <a:endParaRPr lang="de-CH"/>
+          </a:p>
+        </p:txBody>
+      </p:sp>
+      <p:sp>
+        <p:nvSpPr>
+          <p:cNvPr id="21" name="Textfeld 20">
+            <a:extLst>
+              <a:ext uri="{FF2B5EF4-FFF2-40B4-BE49-F238E27FC236}">
+                <a16:creationId xmlns:a16="http://schemas.microsoft.com/office/drawing/2014/main" id="{CDF10561-F2FE-1DE1-87C6-0432A5664037}"/>
+              </a:ext>
+            </a:extLst>
+          </p:cNvPr>
+          <p:cNvSpPr txBox="1"/>
+          <p:nvPr/>
+        </p:nvSpPr>
+        <p:spPr>
+          <a:xfrm>
+            <a:off x="5704610" y="2479730"/>
+            <a:ext cx="3372572" cy="276999"/>
+          </a:xfrm>
+          <a:prstGeom prst="rect">
+            <a:avLst/>
+          </a:prstGeom>
+          <a:noFill/>
+        </p:spPr>
+        <p:txBody>
+          <a:bodyPr wrap="square">
+            <a:spAutoFit/>
+          </a:bodyPr>
+          <a:lstStyle/>
+          <a:p>
+            <a:pPr algn="ctr"/>
+            <a:r>
+              <a:rPr lang="de-CH" sz="1200" b="1" dirty="0" err="1">
+                <a:latin typeface="Arial" panose="020B0604020202020204" pitchFamily="34" charset="0"/>
+                <a:cs typeface="Arial" panose="020B0604020202020204" pitchFamily="34" charset="0"/>
+              </a:rPr>
+              <a:t>g_reservation_concert_xml</a:t>
+            </a:r>
+            <a:endParaRPr lang="de-CH" sz="1200" b="1" dirty="0">
+              <a:latin typeface="Arial" panose="020B0604020202020204" pitchFamily="34" charset="0"/>
+              <a:cs typeface="Arial" panose="020B0604020202020204" pitchFamily="34" charset="0"/>
+            </a:endParaRPr>
+          </a:p>
+        </p:txBody>
+      </p:sp>
+      <p:sp>
+        <p:nvSpPr>
+          <p:cNvPr id="22" name="Rechteck 21">
+            <a:extLst>
+              <a:ext uri="{FF2B5EF4-FFF2-40B4-BE49-F238E27FC236}">
+                <a16:creationId xmlns:a16="http://schemas.microsoft.com/office/drawing/2014/main" id="{40A314E1-1D88-22F3-7A49-E314FFAF5F54}"/>
+              </a:ext>
+            </a:extLst>
+          </p:cNvPr>
+          <p:cNvSpPr/>
+          <p:nvPr/>
+        </p:nvSpPr>
+        <p:spPr>
+          <a:xfrm>
+            <a:off x="8955825" y="2402842"/>
+            <a:ext cx="2458392" cy="606599"/>
           </a:xfrm>
           <a:prstGeom prst="rect">
             <a:avLst/>
@@ -3894,6 +4060,16 @@
           <a:lstStyle/>
           <a:p>
             <a:r>
+              <a:rPr lang="de-CH" sz="1000" b="1" dirty="0" err="1">
+                <a:solidFill>
+                  <a:schemeClr val="tx1"/>
+                </a:solidFill>
+                <a:latin typeface="Arial" panose="020B0604020202020204" pitchFamily="34" charset="0"/>
+                <a:cs typeface="Arial" panose="020B0604020202020204" pitchFamily="34" charset="0"/>
+              </a:rPr>
+              <a:t>afterLoadingOfNameCardsXmlData</a:t>
+            </a:r>
+            <a:r>
               <a:rPr lang="de-CH" sz="1000" b="1" dirty="0">
                 <a:solidFill>
                   <a:schemeClr val="tx1"/>
@@ -3901,27 +4077,59 @@
                 <a:latin typeface="Arial" panose="020B0604020202020204" pitchFamily="34" charset="0"/>
                 <a:cs typeface="Arial" panose="020B0604020202020204" pitchFamily="34" charset="0"/>
               </a:rPr>
-              <a:t>&lt;</a:t>
-            </a:r>
-            <a:r>
-              <a:rPr lang="de-CH" sz="1000" b="1" dirty="0" err="1">
-                <a:solidFill>
-                  <a:schemeClr val="tx1"/>
-                </a:solidFill>
-                <a:latin typeface="Arial" panose="020B0604020202020204" pitchFamily="34" charset="0"/>
-                <a:cs typeface="Arial" panose="020B0604020202020204" pitchFamily="34" charset="0"/>
-              </a:rPr>
-              <a:t>body</a:t>
-            </a:r>
-            <a:r>
-              <a:rPr lang="de-CH" sz="1000" b="1" dirty="0">
-                <a:solidFill>
-                  <a:schemeClr val="tx1"/>
-                </a:solidFill>
-                <a:latin typeface="Arial" panose="020B0604020202020204" pitchFamily="34" charset="0"/>
-                <a:cs typeface="Arial" panose="020B0604020202020204" pitchFamily="34" charset="0"/>
-              </a:rPr>
-              <a:t>&gt;</a:t>
+              <a:t>()</a:t>
+            </a:r>
+          </a:p>
+          <a:p>
+            <a:r>
+              <a:rPr lang="de-CH" sz="1000" b="1" i="1" dirty="0">
+                <a:solidFill>
+                  <a:schemeClr val="tx1"/>
+                </a:solidFill>
+                <a:latin typeface="Arial" panose="020B0604020202020204" pitchFamily="34" charset="0"/>
+                <a:cs typeface="Arial" panose="020B0604020202020204" pitchFamily="34" charset="0"/>
+              </a:rPr>
+              <a:t>Set </a:t>
+            </a:r>
+            <a:r>
+              <a:rPr lang="de-CH" sz="1000" b="1" i="1" dirty="0" err="1">
+                <a:solidFill>
+                  <a:schemeClr val="tx1"/>
+                </a:solidFill>
+                <a:latin typeface="Arial" panose="020B0604020202020204" pitchFamily="34" charset="0"/>
+                <a:cs typeface="Arial" panose="020B0604020202020204" pitchFamily="34" charset="0"/>
+              </a:rPr>
+              <a:t>case</a:t>
+            </a:r>
+            <a:r>
+              <a:rPr lang="de-CH" sz="1000" b="1" i="1" dirty="0">
+                <a:solidFill>
+                  <a:schemeClr val="tx1"/>
+                </a:solidFill>
+                <a:latin typeface="Arial" panose="020B0604020202020204" pitchFamily="34" charset="0"/>
+                <a:cs typeface="Arial" panose="020B0604020202020204" pitchFamily="34" charset="0"/>
+              </a:rPr>
+              <a:t> ‘</a:t>
+            </a:r>
+            <a:r>
+              <a:rPr lang="de-CH" sz="1000" b="1" i="1" dirty="0" err="1">
+                <a:solidFill>
+                  <a:schemeClr val="tx1"/>
+                </a:solidFill>
+                <a:latin typeface="Arial" panose="020B0604020202020204" pitchFamily="34" charset="0"/>
+                <a:cs typeface="Arial" panose="020B0604020202020204" pitchFamily="34" charset="0"/>
+              </a:rPr>
+              <a:t>name_cards</a:t>
+            </a:r>
+            <a:r>
+              <a:rPr lang="de-CH" sz="1000" b="1" i="1" dirty="0">
+                <a:solidFill>
+                  <a:schemeClr val="tx1"/>
+                </a:solidFill>
+                <a:latin typeface="Arial" panose="020B0604020202020204" pitchFamily="34" charset="0"/>
+                <a:cs typeface="Arial" panose="020B0604020202020204" pitchFamily="34" charset="0"/>
+              </a:rPr>
+              <a:t>’</a:t>
             </a:r>
           </a:p>
           <a:p>
@@ -3933,151 +4141,14 @@
               <a:cs typeface="Arial" panose="020B0604020202020204" pitchFamily="34" charset="0"/>
             </a:endParaRPr>
           </a:p>
-          <a:p>
-            <a:r>
-              <a:rPr lang="fr-FR" sz="1000" b="1" dirty="0">
-                <a:solidFill>
-                  <a:schemeClr val="tx1"/>
-                </a:solidFill>
-                <a:latin typeface="Arial" panose="020B0604020202020204" pitchFamily="34" charset="0"/>
-                <a:cs typeface="Arial" panose="020B0604020202020204" pitchFamily="34" charset="0"/>
-              </a:rPr>
-              <a:t>    &lt;script </a:t>
-            </a:r>
-            <a:r>
-              <a:rPr lang="fr-FR" sz="1000" b="1" dirty="0" err="1">
-                <a:solidFill>
-                  <a:schemeClr val="tx1"/>
-                </a:solidFill>
-                <a:latin typeface="Arial" panose="020B0604020202020204" pitchFamily="34" charset="0"/>
-                <a:cs typeface="Arial" panose="020B0604020202020204" pitchFamily="34" charset="0"/>
-              </a:rPr>
-              <a:t>language</a:t>
-            </a:r>
-            <a:r>
-              <a:rPr lang="fr-FR" sz="1000" b="1" dirty="0">
-                <a:solidFill>
-                  <a:schemeClr val="tx1"/>
-                </a:solidFill>
-                <a:latin typeface="Arial" panose="020B0604020202020204" pitchFamily="34" charset="0"/>
-                <a:cs typeface="Arial" panose="020B0604020202020204" pitchFamily="34" charset="0"/>
-              </a:rPr>
-              <a:t>="JavaScript"&gt;</a:t>
-            </a:r>
-          </a:p>
-          <a:p>
-            <a:r>
-              <a:rPr lang="fr-FR" sz="1000" b="1" dirty="0">
-                <a:solidFill>
-                  <a:schemeClr val="tx1"/>
-                </a:solidFill>
-                <a:latin typeface="Arial" panose="020B0604020202020204" pitchFamily="34" charset="0"/>
-                <a:cs typeface="Arial" panose="020B0604020202020204" pitchFamily="34" charset="0"/>
-              </a:rPr>
-              <a:t>        </a:t>
-            </a:r>
-            <a:r>
-              <a:rPr lang="fr-FR" sz="1000" b="1" dirty="0" err="1">
-                <a:solidFill>
-                  <a:schemeClr val="tx1"/>
-                </a:solidFill>
-                <a:latin typeface="Arial" panose="020B0604020202020204" pitchFamily="34" charset="0"/>
-                <a:cs typeface="Arial" panose="020B0604020202020204" pitchFamily="34" charset="0"/>
-              </a:rPr>
-              <a:t>Document.write</a:t>
-            </a:r>
-            <a:r>
-              <a:rPr lang="fr-FR" sz="1000" b="1" dirty="0">
-                <a:solidFill>
-                  <a:schemeClr val="tx1"/>
-                </a:solidFill>
-                <a:latin typeface="Arial" panose="020B0604020202020204" pitchFamily="34" charset="0"/>
-                <a:cs typeface="Arial" panose="020B0604020202020204" pitchFamily="34" charset="0"/>
-              </a:rPr>
-              <a:t>(</a:t>
-            </a:r>
-            <a:r>
-              <a:rPr lang="fr-FR" sz="1000" b="1" dirty="0" err="1">
-                <a:solidFill>
-                  <a:schemeClr val="tx1"/>
-                </a:solidFill>
-                <a:latin typeface="Arial" panose="020B0604020202020204" pitchFamily="34" charset="0"/>
-                <a:cs typeface="Arial" panose="020B0604020202020204" pitchFamily="34" charset="0"/>
-              </a:rPr>
-              <a:t>mainReservationCards</a:t>
-            </a:r>
-            <a:r>
-              <a:rPr lang="fr-FR" sz="1000" b="1" dirty="0">
-                <a:solidFill>
-                  <a:schemeClr val="tx1"/>
-                </a:solidFill>
-                <a:latin typeface="Arial" panose="020B0604020202020204" pitchFamily="34" charset="0"/>
-                <a:cs typeface="Arial" panose="020B0604020202020204" pitchFamily="34" charset="0"/>
-              </a:rPr>
-              <a:t>())</a:t>
-            </a:r>
-          </a:p>
-          <a:p>
-            <a:r>
-              <a:rPr lang="fr-FR" sz="1000" b="1" dirty="0">
-                <a:solidFill>
-                  <a:schemeClr val="tx1"/>
-                </a:solidFill>
-                <a:latin typeface="Arial" panose="020B0604020202020204" pitchFamily="34" charset="0"/>
-                <a:cs typeface="Arial" panose="020B0604020202020204" pitchFamily="34" charset="0"/>
-              </a:rPr>
-              <a:t>     &lt;/script&gt;</a:t>
-            </a:r>
-          </a:p>
-          <a:p>
-            <a:endParaRPr lang="fr-FR" sz="1000" b="1" dirty="0">
-              <a:solidFill>
-                <a:schemeClr val="tx1"/>
-              </a:solidFill>
-              <a:latin typeface="Arial" panose="020B0604020202020204" pitchFamily="34" charset="0"/>
-              <a:cs typeface="Arial" panose="020B0604020202020204" pitchFamily="34" charset="0"/>
-            </a:endParaRPr>
-          </a:p>
-          <a:p>
-            <a:r>
-              <a:rPr lang="de-CH" sz="1000" b="1" dirty="0">
-                <a:solidFill>
-                  <a:schemeClr val="tx1"/>
-                </a:solidFill>
-                <a:latin typeface="Arial" panose="020B0604020202020204" pitchFamily="34" charset="0"/>
-                <a:cs typeface="Arial" panose="020B0604020202020204" pitchFamily="34" charset="0"/>
-              </a:rPr>
-              <a:t>&lt;/</a:t>
-            </a:r>
-            <a:r>
-              <a:rPr lang="de-CH" sz="1000" b="1" dirty="0" err="1">
-                <a:solidFill>
-                  <a:schemeClr val="tx1"/>
-                </a:solidFill>
-                <a:latin typeface="Arial" panose="020B0604020202020204" pitchFamily="34" charset="0"/>
-                <a:cs typeface="Arial" panose="020B0604020202020204" pitchFamily="34" charset="0"/>
-              </a:rPr>
-              <a:t>body</a:t>
-            </a:r>
-            <a:r>
-              <a:rPr lang="de-CH" sz="1000" b="1" dirty="0">
-                <a:solidFill>
-                  <a:schemeClr val="tx1"/>
-                </a:solidFill>
-                <a:latin typeface="Arial" panose="020B0604020202020204" pitchFamily="34" charset="0"/>
-                <a:cs typeface="Arial" panose="020B0604020202020204" pitchFamily="34" charset="0"/>
-              </a:rPr>
-              <a:t>&gt;</a:t>
-            </a:r>
-          </a:p>
-        </p:txBody>
-      </p:sp>
-      <p:sp>
-        <p:nvSpPr>
-          <p:cNvPr id="9" name="Rechteck 8">
+        </p:txBody>
+      </p:sp>
+      <p:sp>
+        <p:nvSpPr>
+          <p:cNvPr id="23" name="Rechteck 22">
             <a:extLst>
               <a:ext uri="{FF2B5EF4-FFF2-40B4-BE49-F238E27FC236}">
-                <a16:creationId xmlns:a16="http://schemas.microsoft.com/office/drawing/2014/main" id="{8C70B0F7-971B-978B-0DAB-64A1143C4FE1}"/>
+                <a16:creationId xmlns:a16="http://schemas.microsoft.com/office/drawing/2014/main" id="{7EE65A88-9259-0980-AF9A-FFEE2682D882}"/>
               </a:ext>
             </a:extLst>
           </p:cNvPr>
@@ -4086,8 +4157,8 @@
         </p:nvSpPr>
         <p:spPr>
           <a:xfrm>
-            <a:off x="879088" y="2731532"/>
-            <a:ext cx="2434959" cy="2604261"/>
+            <a:off x="8955825" y="3063012"/>
+            <a:ext cx="2458392" cy="606599"/>
           </a:xfrm>
           <a:prstGeom prst="rect">
             <a:avLst/>
@@ -4120,6 +4191,15 @@
           <a:lstStyle/>
           <a:p>
             <a:pPr algn="ctr"/>
+            <a:endParaRPr lang="de-CH" sz="1100" b="1" dirty="0">
+              <a:solidFill>
+                <a:schemeClr val="tx1"/>
+              </a:solidFill>
+              <a:latin typeface="Arial" panose="020B0604020202020204" pitchFamily="34" charset="0"/>
+              <a:cs typeface="Arial" panose="020B0604020202020204" pitchFamily="34" charset="0"/>
+            </a:endParaRPr>
+          </a:p>
+          <a:p>
             <a:r>
               <a:rPr lang="de-CH" sz="1000" b="1" dirty="0" err="1">
                 <a:solidFill>
@@ -4128,7 +4208,7 @@
                 <a:latin typeface="Arial" panose="020B0604020202020204" pitchFamily="34" charset="0"/>
                 <a:cs typeface="Arial" panose="020B0604020202020204" pitchFamily="34" charset="0"/>
               </a:rPr>
-              <a:t>getAllReservationCardsHtml</a:t>
+              <a:t>afterLoadingOfTicketCardsXmlData</a:t>
             </a:r>
             <a:endParaRPr lang="de-CH" sz="1000" b="1" dirty="0">
               <a:solidFill>
@@ -4139,7 +4219,58 @@
             </a:endParaRPr>
           </a:p>
           <a:p>
-            <a:pPr algn="ctr"/>
+            <a:r>
+              <a:rPr lang="de-CH" sz="1000" b="1" i="1" dirty="0">
+                <a:solidFill>
+                  <a:schemeClr val="tx1"/>
+                </a:solidFill>
+                <a:latin typeface="Arial" panose="020B0604020202020204" pitchFamily="34" charset="0"/>
+                <a:cs typeface="Arial" panose="020B0604020202020204" pitchFamily="34" charset="0"/>
+              </a:rPr>
+              <a:t>Set </a:t>
+            </a:r>
+            <a:r>
+              <a:rPr lang="de-CH" sz="1000" b="1" i="1" dirty="0" err="1">
+                <a:solidFill>
+                  <a:schemeClr val="tx1"/>
+                </a:solidFill>
+                <a:latin typeface="Arial" panose="020B0604020202020204" pitchFamily="34" charset="0"/>
+                <a:cs typeface="Arial" panose="020B0604020202020204" pitchFamily="34" charset="0"/>
+              </a:rPr>
+              <a:t>case</a:t>
+            </a:r>
+            <a:r>
+              <a:rPr lang="de-CH" sz="1000" b="1" i="1" dirty="0">
+                <a:solidFill>
+                  <a:schemeClr val="tx1"/>
+                </a:solidFill>
+                <a:latin typeface="Arial" panose="020B0604020202020204" pitchFamily="34" charset="0"/>
+                <a:cs typeface="Arial" panose="020B0604020202020204" pitchFamily="34" charset="0"/>
+              </a:rPr>
+              <a:t> ‘</a:t>
+            </a:r>
+            <a:r>
+              <a:rPr lang="de-CH" sz="1000" b="1" i="1" dirty="0" err="1">
+                <a:solidFill>
+                  <a:schemeClr val="tx1"/>
+                </a:solidFill>
+                <a:latin typeface="Arial" panose="020B0604020202020204" pitchFamily="34" charset="0"/>
+                <a:cs typeface="Arial" panose="020B0604020202020204" pitchFamily="34" charset="0"/>
+              </a:rPr>
+              <a:t>ticket_cards</a:t>
+            </a:r>
+            <a:r>
+              <a:rPr lang="de-CH" sz="1000" b="1" i="1" dirty="0">
+                <a:solidFill>
+                  <a:schemeClr val="tx1"/>
+                </a:solidFill>
+                <a:latin typeface="Arial" panose="020B0604020202020204" pitchFamily="34" charset="0"/>
+                <a:cs typeface="Arial" panose="020B0604020202020204" pitchFamily="34" charset="0"/>
+              </a:rPr>
+              <a:t>’</a:t>
+            </a:r>
+          </a:p>
+          <a:p>
             <a:endParaRPr lang="de-CH" sz="1000" b="1" dirty="0">
               <a:solidFill>
                 <a:schemeClr val="tx1"/>
@@ -4148,409 +4279,14 @@
               <a:cs typeface="Arial" panose="020B0604020202020204" pitchFamily="34" charset="0"/>
             </a:endParaRPr>
           </a:p>
-          <a:p>
-            <a:r>
-              <a:rPr lang="de-CH" sz="1000" b="1" dirty="0" err="1">
-                <a:solidFill>
-                  <a:schemeClr val="tx1"/>
-                </a:solidFill>
-                <a:latin typeface="Arial" panose="020B0604020202020204" pitchFamily="34" charset="0"/>
-                <a:cs typeface="Arial" panose="020B0604020202020204" pitchFamily="34" charset="0"/>
-              </a:rPr>
-              <a:t>getArrayReservationCards</a:t>
-            </a:r>
-            <a:r>
-              <a:rPr lang="de-CH" sz="1000" b="1" dirty="0">
-                <a:solidFill>
-                  <a:schemeClr val="tx1"/>
-                </a:solidFill>
-                <a:latin typeface="Arial" panose="020B0604020202020204" pitchFamily="34" charset="0"/>
-                <a:cs typeface="Arial" panose="020B0604020202020204" pitchFamily="34" charset="0"/>
-              </a:rPr>
-              <a:t>("</a:t>
-            </a:r>
-            <a:r>
-              <a:rPr lang="de-CH" sz="1000" b="1" dirty="0" err="1">
-                <a:solidFill>
-                  <a:schemeClr val="tx1"/>
-                </a:solidFill>
-                <a:latin typeface="Arial" panose="020B0604020202020204" pitchFamily="34" charset="0"/>
-                <a:cs typeface="Arial" panose="020B0604020202020204" pitchFamily="34" charset="0"/>
-              </a:rPr>
-              <a:t>names</a:t>
-            </a:r>
-            <a:r>
-              <a:rPr lang="de-CH" sz="1000" b="1" dirty="0">
-                <a:solidFill>
-                  <a:schemeClr val="tx1"/>
-                </a:solidFill>
-                <a:latin typeface="Arial" panose="020B0604020202020204" pitchFamily="34" charset="0"/>
-                <a:cs typeface="Arial" panose="020B0604020202020204" pitchFamily="34" charset="0"/>
-              </a:rPr>
-              <a:t>")</a:t>
-            </a:r>
-          </a:p>
-          <a:p>
-            <a:r>
-              <a:rPr lang="de-CH" sz="1000" b="1" dirty="0" err="1">
-                <a:solidFill>
-                  <a:schemeClr val="tx1"/>
-                </a:solidFill>
-                <a:latin typeface="Arial" panose="020B0604020202020204" pitchFamily="34" charset="0"/>
-                <a:cs typeface="Arial" panose="020B0604020202020204" pitchFamily="34" charset="0"/>
-              </a:rPr>
-              <a:t>getArrayReservationCards</a:t>
-            </a:r>
-            <a:r>
-              <a:rPr lang="de-CH" sz="1000" b="1" dirty="0">
-                <a:solidFill>
-                  <a:schemeClr val="tx1"/>
-                </a:solidFill>
-                <a:latin typeface="Arial" panose="020B0604020202020204" pitchFamily="34" charset="0"/>
-                <a:cs typeface="Arial" panose="020B0604020202020204" pitchFamily="34" charset="0"/>
-              </a:rPr>
-              <a:t>("</a:t>
-            </a:r>
-            <a:r>
-              <a:rPr lang="de-CH" sz="1000" b="1" dirty="0" err="1">
-                <a:solidFill>
-                  <a:schemeClr val="tx1"/>
-                </a:solidFill>
-                <a:latin typeface="Arial" panose="020B0604020202020204" pitchFamily="34" charset="0"/>
-                <a:cs typeface="Arial" panose="020B0604020202020204" pitchFamily="34" charset="0"/>
-              </a:rPr>
-              <a:t>seats</a:t>
-            </a:r>
-            <a:r>
-              <a:rPr lang="de-CH" sz="1000" b="1" dirty="0">
-                <a:solidFill>
-                  <a:schemeClr val="tx1"/>
-                </a:solidFill>
-                <a:latin typeface="Arial" panose="020B0604020202020204" pitchFamily="34" charset="0"/>
-                <a:cs typeface="Arial" panose="020B0604020202020204" pitchFamily="34" charset="0"/>
-              </a:rPr>
-              <a:t>")</a:t>
-            </a:r>
-          </a:p>
-          <a:p>
-            <a:r>
-              <a:rPr lang="de-CH" sz="1000" b="1" dirty="0" err="1">
-                <a:solidFill>
-                  <a:schemeClr val="tx1"/>
-                </a:solidFill>
-                <a:latin typeface="Arial" panose="020B0604020202020204" pitchFamily="34" charset="0"/>
-                <a:cs typeface="Arial" panose="020B0604020202020204" pitchFamily="34" charset="0"/>
-              </a:rPr>
-              <a:t>addStartTable</a:t>
-            </a:r>
-            <a:endParaRPr lang="de-CH" sz="1000" b="1" dirty="0">
-              <a:solidFill>
-                <a:schemeClr val="tx1"/>
-              </a:solidFill>
-              <a:latin typeface="Arial" panose="020B0604020202020204" pitchFamily="34" charset="0"/>
-              <a:cs typeface="Arial" panose="020B0604020202020204" pitchFamily="34" charset="0"/>
-            </a:endParaRPr>
-          </a:p>
-          <a:p>
-            <a:r>
-              <a:rPr lang="de-CH" sz="1000" b="1" dirty="0" err="1">
-                <a:solidFill>
-                  <a:schemeClr val="tx1"/>
-                </a:solidFill>
-                <a:latin typeface="Arial" panose="020B0604020202020204" pitchFamily="34" charset="0"/>
-                <a:cs typeface="Arial" panose="020B0604020202020204" pitchFamily="34" charset="0"/>
-              </a:rPr>
-              <a:t>addEmptyRow</a:t>
-            </a:r>
-            <a:endParaRPr lang="de-CH" sz="1000" b="1" dirty="0">
-              <a:solidFill>
-                <a:schemeClr val="tx1"/>
-              </a:solidFill>
-              <a:latin typeface="Arial" panose="020B0604020202020204" pitchFamily="34" charset="0"/>
-              <a:cs typeface="Arial" panose="020B0604020202020204" pitchFamily="34" charset="0"/>
-            </a:endParaRPr>
-          </a:p>
-          <a:p>
-            <a:r>
-              <a:rPr lang="de-CH" sz="1000" b="1" dirty="0" err="1">
-                <a:solidFill>
-                  <a:schemeClr val="tx1"/>
-                </a:solidFill>
-                <a:latin typeface="Arial" panose="020B0604020202020204" pitchFamily="34" charset="0"/>
-                <a:cs typeface="Arial" panose="020B0604020202020204" pitchFamily="34" charset="0"/>
-              </a:rPr>
-              <a:t>addRow</a:t>
-            </a:r>
-            <a:endParaRPr lang="de-CH" sz="1000" b="1" dirty="0">
-              <a:solidFill>
-                <a:schemeClr val="tx1"/>
-              </a:solidFill>
-              <a:latin typeface="Arial" panose="020B0604020202020204" pitchFamily="34" charset="0"/>
-              <a:cs typeface="Arial" panose="020B0604020202020204" pitchFamily="34" charset="0"/>
-            </a:endParaRPr>
-          </a:p>
-          <a:p>
-            <a:r>
-              <a:rPr lang="de-CH" sz="1000" b="1" dirty="0">
-                <a:solidFill>
-                  <a:schemeClr val="tx1"/>
-                </a:solidFill>
-                <a:latin typeface="Arial" panose="020B0604020202020204" pitchFamily="34" charset="0"/>
-                <a:cs typeface="Arial" panose="020B0604020202020204" pitchFamily="34" charset="0"/>
-              </a:rPr>
-              <a:t>  </a:t>
-            </a:r>
-            <a:r>
-              <a:rPr lang="de-CH" sz="1000" b="1" dirty="0" err="1">
-                <a:solidFill>
-                  <a:schemeClr val="tx1"/>
-                </a:solidFill>
-                <a:latin typeface="Arial" panose="020B0604020202020204" pitchFamily="34" charset="0"/>
-                <a:cs typeface="Arial" panose="020B0604020202020204" pitchFamily="34" charset="0"/>
-              </a:rPr>
-              <a:t>addStartRow</a:t>
-            </a:r>
-            <a:endParaRPr lang="de-CH" sz="1000" b="1" dirty="0">
-              <a:solidFill>
-                <a:schemeClr val="tx1"/>
-              </a:solidFill>
-              <a:latin typeface="Arial" panose="020B0604020202020204" pitchFamily="34" charset="0"/>
-              <a:cs typeface="Arial" panose="020B0604020202020204" pitchFamily="34" charset="0"/>
-            </a:endParaRPr>
-          </a:p>
-          <a:p>
-            <a:r>
-              <a:rPr lang="de-CH" sz="1000" b="1" dirty="0">
-                <a:solidFill>
-                  <a:schemeClr val="tx1"/>
-                </a:solidFill>
-                <a:latin typeface="Arial" panose="020B0604020202020204" pitchFamily="34" charset="0"/>
-                <a:cs typeface="Arial" panose="020B0604020202020204" pitchFamily="34" charset="0"/>
-              </a:rPr>
-              <a:t>  </a:t>
-            </a:r>
-            <a:r>
-              <a:rPr lang="de-CH" sz="1000" b="1" dirty="0" err="1">
-                <a:solidFill>
-                  <a:schemeClr val="tx1"/>
-                </a:solidFill>
-                <a:latin typeface="Arial" panose="020B0604020202020204" pitchFamily="34" charset="0"/>
-                <a:cs typeface="Arial" panose="020B0604020202020204" pitchFamily="34" charset="0"/>
-              </a:rPr>
-              <a:t>addColumn</a:t>
-            </a:r>
-            <a:r>
-              <a:rPr lang="de-CH" sz="1000" b="1" dirty="0">
-                <a:solidFill>
-                  <a:schemeClr val="tx1"/>
-                </a:solidFill>
-                <a:latin typeface="Arial" panose="020B0604020202020204" pitchFamily="34" charset="0"/>
-                <a:cs typeface="Arial" panose="020B0604020202020204" pitchFamily="34" charset="0"/>
-              </a:rPr>
-              <a:t> </a:t>
-            </a:r>
-          </a:p>
-          <a:p>
-            <a:r>
-              <a:rPr lang="de-CH" sz="1000" b="1" dirty="0">
-                <a:solidFill>
-                  <a:schemeClr val="tx1"/>
-                </a:solidFill>
-                <a:latin typeface="Arial" panose="020B0604020202020204" pitchFamily="34" charset="0"/>
-                <a:cs typeface="Arial" panose="020B0604020202020204" pitchFamily="34" charset="0"/>
-              </a:rPr>
-              <a:t>     </a:t>
-            </a:r>
-            <a:r>
-              <a:rPr lang="de-CH" sz="1000" b="1" dirty="0" err="1">
-                <a:solidFill>
-                  <a:schemeClr val="tx1"/>
-                </a:solidFill>
-                <a:latin typeface="Arial" panose="020B0604020202020204" pitchFamily="34" charset="0"/>
-                <a:cs typeface="Arial" panose="020B0604020202020204" pitchFamily="34" charset="0"/>
-              </a:rPr>
-              <a:t>addStartColumn</a:t>
-            </a:r>
-            <a:endParaRPr lang="de-CH" sz="1000" b="1" dirty="0">
-              <a:solidFill>
-                <a:schemeClr val="tx1"/>
-              </a:solidFill>
-              <a:latin typeface="Arial" panose="020B0604020202020204" pitchFamily="34" charset="0"/>
-              <a:cs typeface="Arial" panose="020B0604020202020204" pitchFamily="34" charset="0"/>
-            </a:endParaRPr>
-          </a:p>
-          <a:p>
-            <a:r>
-              <a:rPr lang="de-CH" sz="1000" b="1" dirty="0">
-                <a:solidFill>
-                  <a:schemeClr val="tx1"/>
-                </a:solidFill>
-                <a:latin typeface="Arial" panose="020B0604020202020204" pitchFamily="34" charset="0"/>
-                <a:cs typeface="Arial" panose="020B0604020202020204" pitchFamily="34" charset="0"/>
-              </a:rPr>
-              <a:t>     </a:t>
-            </a:r>
-            <a:r>
-              <a:rPr lang="de-CH" sz="1000" b="1" dirty="0" err="1">
-                <a:solidFill>
-                  <a:schemeClr val="tx1"/>
-                </a:solidFill>
-                <a:latin typeface="Arial" panose="020B0604020202020204" pitchFamily="34" charset="0"/>
-                <a:cs typeface="Arial" panose="020B0604020202020204" pitchFamily="34" charset="0"/>
-              </a:rPr>
-              <a:t>addJazzLiveAarau</a:t>
-            </a:r>
-            <a:endParaRPr lang="de-CH" sz="1000" b="1" dirty="0">
-              <a:solidFill>
-                <a:schemeClr val="tx1"/>
-              </a:solidFill>
-              <a:latin typeface="Arial" panose="020B0604020202020204" pitchFamily="34" charset="0"/>
-              <a:cs typeface="Arial" panose="020B0604020202020204" pitchFamily="34" charset="0"/>
-            </a:endParaRPr>
-          </a:p>
-          <a:p>
-            <a:r>
-              <a:rPr lang="de-CH" sz="1000" b="1" dirty="0">
-                <a:solidFill>
-                  <a:schemeClr val="tx1"/>
-                </a:solidFill>
-                <a:latin typeface="Arial" panose="020B0604020202020204" pitchFamily="34" charset="0"/>
-                <a:cs typeface="Arial" panose="020B0604020202020204" pitchFamily="34" charset="0"/>
-              </a:rPr>
-              <a:t>     </a:t>
-            </a:r>
-            <a:r>
-              <a:rPr lang="de-CH" sz="1000" b="1" dirty="0" err="1">
-                <a:solidFill>
-                  <a:schemeClr val="tx1"/>
-                </a:solidFill>
-                <a:latin typeface="Arial" panose="020B0604020202020204" pitchFamily="34" charset="0"/>
-                <a:cs typeface="Arial" panose="020B0604020202020204" pitchFamily="34" charset="0"/>
-              </a:rPr>
-              <a:t>addName</a:t>
-            </a:r>
-            <a:endParaRPr lang="de-CH" sz="1000" b="1" dirty="0">
-              <a:solidFill>
-                <a:schemeClr val="tx1"/>
-              </a:solidFill>
-              <a:latin typeface="Arial" panose="020B0604020202020204" pitchFamily="34" charset="0"/>
-              <a:cs typeface="Arial" panose="020B0604020202020204" pitchFamily="34" charset="0"/>
-            </a:endParaRPr>
-          </a:p>
-          <a:p>
-            <a:r>
-              <a:rPr lang="de-CH" sz="1000" b="1" dirty="0">
-                <a:solidFill>
-                  <a:schemeClr val="tx1"/>
-                </a:solidFill>
-                <a:latin typeface="Arial" panose="020B0604020202020204" pitchFamily="34" charset="0"/>
-                <a:cs typeface="Arial" panose="020B0604020202020204" pitchFamily="34" charset="0"/>
-              </a:rPr>
-              <a:t>     </a:t>
-            </a:r>
-            <a:r>
-              <a:rPr lang="de-CH" sz="1000" b="1" dirty="0" err="1">
-                <a:solidFill>
-                  <a:schemeClr val="tx1"/>
-                </a:solidFill>
-                <a:latin typeface="Arial" panose="020B0604020202020204" pitchFamily="34" charset="0"/>
-                <a:cs typeface="Arial" panose="020B0604020202020204" pitchFamily="34" charset="0"/>
-              </a:rPr>
-              <a:t>addDateTableSeat</a:t>
-            </a:r>
-            <a:endParaRPr lang="de-CH" sz="1000" b="1" dirty="0">
-              <a:solidFill>
-                <a:schemeClr val="tx1"/>
-              </a:solidFill>
-              <a:latin typeface="Arial" panose="020B0604020202020204" pitchFamily="34" charset="0"/>
-              <a:cs typeface="Arial" panose="020B0604020202020204" pitchFamily="34" charset="0"/>
-            </a:endParaRPr>
-          </a:p>
-          <a:p>
-            <a:r>
-              <a:rPr lang="de-CH" sz="1000" b="1" dirty="0">
-                <a:solidFill>
-                  <a:schemeClr val="tx1"/>
-                </a:solidFill>
-                <a:latin typeface="Arial" panose="020B0604020202020204" pitchFamily="34" charset="0"/>
-                <a:cs typeface="Arial" panose="020B0604020202020204" pitchFamily="34" charset="0"/>
-              </a:rPr>
-              <a:t>  </a:t>
-            </a:r>
-            <a:r>
-              <a:rPr lang="de-CH" sz="1000" b="1" dirty="0" err="1">
-                <a:solidFill>
-                  <a:schemeClr val="tx1"/>
-                </a:solidFill>
-                <a:latin typeface="Arial" panose="020B0604020202020204" pitchFamily="34" charset="0"/>
-                <a:cs typeface="Arial" panose="020B0604020202020204" pitchFamily="34" charset="0"/>
-              </a:rPr>
-              <a:t>addColumn</a:t>
-            </a:r>
-            <a:endParaRPr lang="de-CH" sz="1000" b="1" dirty="0">
-              <a:solidFill>
-                <a:schemeClr val="tx1"/>
-              </a:solidFill>
-              <a:latin typeface="Arial" panose="020B0604020202020204" pitchFamily="34" charset="0"/>
-              <a:cs typeface="Arial" panose="020B0604020202020204" pitchFamily="34" charset="0"/>
-            </a:endParaRPr>
-          </a:p>
-          <a:p>
-            <a:r>
-              <a:rPr lang="de-CH" sz="1000" b="1" dirty="0">
-                <a:solidFill>
-                  <a:schemeClr val="tx1"/>
-                </a:solidFill>
-                <a:latin typeface="Arial" panose="020B0604020202020204" pitchFamily="34" charset="0"/>
-                <a:cs typeface="Arial" panose="020B0604020202020204" pitchFamily="34" charset="0"/>
-              </a:rPr>
-              <a:t>  </a:t>
-            </a:r>
-            <a:r>
-              <a:rPr lang="de-CH" sz="1000" b="1" dirty="0" err="1">
-                <a:solidFill>
-                  <a:schemeClr val="tx1"/>
-                </a:solidFill>
-                <a:latin typeface="Arial" panose="020B0604020202020204" pitchFamily="34" charset="0"/>
-                <a:cs typeface="Arial" panose="020B0604020202020204" pitchFamily="34" charset="0"/>
-              </a:rPr>
-              <a:t>addColumn</a:t>
-            </a:r>
-            <a:endParaRPr lang="de-CH" sz="1000" b="1" dirty="0">
-              <a:solidFill>
-                <a:schemeClr val="tx1"/>
-              </a:solidFill>
-              <a:latin typeface="Arial" panose="020B0604020202020204" pitchFamily="34" charset="0"/>
-              <a:cs typeface="Arial" panose="020B0604020202020204" pitchFamily="34" charset="0"/>
-            </a:endParaRPr>
-          </a:p>
-          <a:p>
-            <a:r>
-              <a:rPr lang="de-CH" sz="1000" b="1" dirty="0" err="1">
-                <a:solidFill>
-                  <a:schemeClr val="tx1"/>
-                </a:solidFill>
-                <a:latin typeface="Arial" panose="020B0604020202020204" pitchFamily="34" charset="0"/>
-                <a:cs typeface="Arial" panose="020B0604020202020204" pitchFamily="34" charset="0"/>
-              </a:rPr>
-              <a:t>addEndTable</a:t>
-            </a:r>
-            <a:endParaRPr lang="de-CH" sz="1000" b="1" dirty="0">
-              <a:solidFill>
-                <a:schemeClr val="tx1"/>
-              </a:solidFill>
-              <a:latin typeface="Arial" panose="020B0604020202020204" pitchFamily="34" charset="0"/>
-              <a:cs typeface="Arial" panose="020B0604020202020204" pitchFamily="34" charset="0"/>
-            </a:endParaRPr>
-          </a:p>
-        </p:txBody>
-      </p:sp>
-      <p:sp>
-        <p:nvSpPr>
-          <p:cNvPr id="10" name="Rechteck 9">
+        </p:txBody>
+      </p:sp>
+      <p:sp>
+        <p:nvSpPr>
+          <p:cNvPr id="24" name="Pfeil: nach rechts 23">
             <a:extLst>
               <a:ext uri="{FF2B5EF4-FFF2-40B4-BE49-F238E27FC236}">
-                <a16:creationId xmlns:a16="http://schemas.microsoft.com/office/drawing/2014/main" id="{63A8D429-2416-E038-0E91-94C1F1FA1AB7}"/>
+                <a16:creationId xmlns:a16="http://schemas.microsoft.com/office/drawing/2014/main" id="{863A464E-C120-3EED-B3A9-1FD978FD35DB}"/>
               </a:ext>
             </a:extLst>
           </p:cNvPr>
@@ -4559,8 +4295,56 @@
         </p:nvSpPr>
         <p:spPr>
           <a:xfrm>
-            <a:off x="879088" y="2131265"/>
-            <a:ext cx="2434959" cy="369333"/>
+            <a:off x="8535472" y="2628695"/>
+            <a:ext cx="322300" cy="761493"/>
+          </a:xfrm>
+          <a:prstGeom prst="rightArrow">
+            <a:avLst/>
+          </a:prstGeom>
+          <a:noFill/>
+          <a:ln w="25400"/>
+        </p:spPr>
+        <p:style>
+          <a:lnRef idx="2">
+            <a:schemeClr val="accent1">
+              <a:shade val="15000"/>
+            </a:schemeClr>
+          </a:lnRef>
+          <a:fillRef idx="1">
+            <a:schemeClr val="accent1"/>
+          </a:fillRef>
+          <a:effectRef idx="0">
+            <a:schemeClr val="accent1"/>
+          </a:effectRef>
+          <a:fontRef idx="minor">
+            <a:schemeClr val="lt1"/>
+          </a:fontRef>
+        </p:style>
+        <p:txBody>
+          <a:bodyPr rtlCol="0" anchor="ctr"/>
+          <a:lstStyle/>
+          <a:p>
+            <a:pPr algn="ctr"/>
+            <a:endParaRPr lang="de-CH"/>
+          </a:p>
+        </p:txBody>
+      </p:sp>
+      <p:sp>
+        <p:nvSpPr>
+          <p:cNvPr id="25" name="Rechteck 24">
+            <a:extLst>
+              <a:ext uri="{FF2B5EF4-FFF2-40B4-BE49-F238E27FC236}">
+                <a16:creationId xmlns:a16="http://schemas.microsoft.com/office/drawing/2014/main" id="{6EBE9B99-530B-197D-39F1-5448CEB1B7E6}"/>
+              </a:ext>
+            </a:extLst>
+          </p:cNvPr>
+          <p:cNvSpPr/>
+          <p:nvPr/>
+        </p:nvSpPr>
+        <p:spPr>
+          <a:xfrm>
+            <a:off x="6369963" y="3240473"/>
+            <a:ext cx="2067456" cy="341843"/>
           </a:xfrm>
           <a:prstGeom prst="rect">
             <a:avLst/>
@@ -4594,34 +4378,41 @@
           <a:p>
             <a:pPr algn="ctr"/>
             <a:r>
-              <a:rPr lang="de-CH" sz="1000" b="1" dirty="0" err="1">
-                <a:solidFill>
-                  <a:schemeClr val="tx1"/>
-                </a:solidFill>
-                <a:latin typeface="Arial" panose="020B0604020202020204" pitchFamily="34" charset="0"/>
-                <a:cs typeface="Arial" panose="020B0604020202020204" pitchFamily="34" charset="0"/>
-              </a:rPr>
-              <a:t>DisplayNames.getPrintHtmlString</a:t>
-            </a:r>
-            <a:r>
-              <a:rPr lang="de-CH" sz="1000" b="1" dirty="0">
-                <a:solidFill>
-                  <a:schemeClr val="tx1"/>
-                </a:solidFill>
-                <a:latin typeface="Arial" panose="020B0604020202020204" pitchFamily="34" charset="0"/>
-                <a:cs typeface="Arial" panose="020B0604020202020204" pitchFamily="34" charset="0"/>
-              </a:rPr>
-              <a:t>()</a:t>
-            </a:r>
-          </a:p>
-        </p:txBody>
-      </p:sp>
-      <p:sp>
-        <p:nvSpPr>
-          <p:cNvPr id="11" name="Rechteck 10">
+              <a:rPr lang="de-CH" sz="1400" dirty="0">
+                <a:solidFill>
+                  <a:schemeClr val="tx1"/>
+                </a:solidFill>
+                <a:latin typeface="Arial" panose="020B0604020202020204" pitchFamily="34" charset="0"/>
+                <a:cs typeface="Arial" panose="020B0604020202020204" pitchFamily="34" charset="0"/>
+              </a:rPr>
+              <a:t>Create </a:t>
+            </a:r>
+            <a:r>
+              <a:rPr lang="de-CH" sz="1400" dirty="0" err="1">
+                <a:solidFill>
+                  <a:schemeClr val="tx1"/>
+                </a:solidFill>
+                <a:latin typeface="Arial" panose="020B0604020202020204" pitchFamily="34" charset="0"/>
+                <a:cs typeface="Arial" panose="020B0604020202020204" pitchFamily="34" charset="0"/>
+              </a:rPr>
+              <a:t>instance</a:t>
+            </a:r>
+            <a:endParaRPr lang="de-CH" sz="1400" dirty="0">
+              <a:solidFill>
+                <a:schemeClr val="tx1"/>
+              </a:solidFill>
+              <a:latin typeface="Arial" panose="020B0604020202020204" pitchFamily="34" charset="0"/>
+              <a:cs typeface="Arial" panose="020B0604020202020204" pitchFamily="34" charset="0"/>
+            </a:endParaRPr>
+          </a:p>
+        </p:txBody>
+      </p:sp>
+      <p:sp>
+        <p:nvSpPr>
+          <p:cNvPr id="26" name="Rechteck 25">
             <a:extLst>
               <a:ext uri="{FF2B5EF4-FFF2-40B4-BE49-F238E27FC236}">
-                <a16:creationId xmlns:a16="http://schemas.microsoft.com/office/drawing/2014/main" id="{84BFAD17-B8BD-AC49-C0ED-C38386E6EA5C}"/>
+                <a16:creationId xmlns:a16="http://schemas.microsoft.com/office/drawing/2014/main" id="{9B3E79A4-A8E1-70B8-1F69-EA8F589FF3AC}"/>
               </a:ext>
             </a:extLst>
           </p:cNvPr>
@@ -4630,8 +4421,93 @@
         </p:nvSpPr>
         <p:spPr>
           <a:xfrm>
-            <a:off x="7220253" y="3413903"/>
-            <a:ext cx="2974904" cy="1004978"/>
+            <a:off x="8709506" y="4239492"/>
+            <a:ext cx="2799757" cy="470139"/>
+          </a:xfrm>
+          <a:prstGeom prst="rect">
+            <a:avLst/>
+          </a:prstGeom>
+          <a:solidFill>
+            <a:schemeClr val="bg1">
+              <a:lumMod val="85000"/>
+            </a:schemeClr>
+          </a:solidFill>
+          <a:ln>
+            <a:solidFill>
+              <a:schemeClr val="tx1"/>
+            </a:solidFill>
+          </a:ln>
+        </p:spPr>
+        <p:style>
+          <a:lnRef idx="2">
+            <a:schemeClr val="accent1">
+              <a:shade val="50000"/>
+            </a:schemeClr>
+          </a:lnRef>
+          <a:fillRef idx="1">
+            <a:schemeClr val="accent1"/>
+          </a:fillRef>
+          <a:effectRef idx="0">
+            <a:schemeClr val="accent1"/>
+          </a:effectRef>
+          <a:fontRef idx="minor">
+            <a:schemeClr val="lt1"/>
+          </a:fontRef>
+        </p:style>
+        <p:txBody>
+          <a:bodyPr rtlCol="0" anchor="ctr"/>
+          <a:lstStyle/>
+          <a:p>
+            <a:pPr algn="ctr"/>
+            <a:r>
+              <a:rPr lang="de-CH" sz="1400" b="1" dirty="0">
+                <a:solidFill>
+                  <a:schemeClr val="tx1"/>
+                </a:solidFill>
+                <a:latin typeface="Arial" panose="020B0604020202020204" pitchFamily="34" charset="0"/>
+                <a:cs typeface="Arial" panose="020B0604020202020204" pitchFamily="34" charset="0"/>
+              </a:rPr>
+              <a:t>Class </a:t>
+            </a:r>
+          </a:p>
+          <a:p>
+            <a:pPr algn="ctr"/>
+            <a:r>
+              <a:rPr lang="de-CH" sz="1400" b="1" dirty="0" err="1">
+                <a:solidFill>
+                  <a:schemeClr val="tx1"/>
+                </a:solidFill>
+                <a:latin typeface="Arial" panose="020B0604020202020204" pitchFamily="34" charset="0"/>
+                <a:cs typeface="Arial" panose="020B0604020202020204" pitchFamily="34" charset="0"/>
+              </a:rPr>
+              <a:t>NameCards</a:t>
+            </a:r>
+            <a:endParaRPr lang="de-CH" sz="1400" b="1" dirty="0">
+              <a:solidFill>
+                <a:schemeClr val="tx1"/>
+              </a:solidFill>
+              <a:latin typeface="Arial" panose="020B0604020202020204" pitchFamily="34" charset="0"/>
+              <a:cs typeface="Arial" panose="020B0604020202020204" pitchFamily="34" charset="0"/>
+            </a:endParaRPr>
+          </a:p>
+        </p:txBody>
+      </p:sp>
+      <p:sp>
+        <p:nvSpPr>
+          <p:cNvPr id="27" name="Rechteck 26">
+            <a:extLst>
+              <a:ext uri="{FF2B5EF4-FFF2-40B4-BE49-F238E27FC236}">
+                <a16:creationId xmlns:a16="http://schemas.microsoft.com/office/drawing/2014/main" id="{4E3F0551-F117-857D-8FE8-1A659640FF92}"/>
+              </a:ext>
+            </a:extLst>
+          </p:cNvPr>
+          <p:cNvSpPr/>
+          <p:nvPr/>
+        </p:nvSpPr>
+        <p:spPr>
+          <a:xfrm>
+            <a:off x="8709506" y="4705592"/>
+            <a:ext cx="2799757" cy="731084"/>
           </a:xfrm>
           <a:prstGeom prst="rect">
             <a:avLst/>
@@ -4665,16 +4541,179 @@
           <a:p>
             <a:pPr algn="ctr"/>
             <a:r>
-              <a:rPr lang="de-CH" sz="1400" b="1" dirty="0" err="1">
-                <a:solidFill>
-                  <a:schemeClr val="tx1"/>
-                </a:solidFill>
-                <a:latin typeface="Arial" panose="020B0604020202020204" pitchFamily="34" charset="0"/>
-                <a:cs typeface="Arial" panose="020B0604020202020204" pitchFamily="34" charset="0"/>
-              </a:rPr>
-              <a:t>mainReservationCards</a:t>
-            </a:r>
-            <a:endParaRPr lang="de-CH" sz="1400" b="1" dirty="0">
+              <a:rPr lang="de-CH" sz="1400" dirty="0">
+                <a:solidFill>
+                  <a:schemeClr val="tx1"/>
+                </a:solidFill>
+                <a:latin typeface="Arial" panose="020B0604020202020204" pitchFamily="34" charset="0"/>
+                <a:cs typeface="Arial" panose="020B0604020202020204" pitchFamily="34" charset="0"/>
+              </a:rPr>
+              <a:t>Create </a:t>
+            </a:r>
+            <a:r>
+              <a:rPr lang="de-CH" sz="1400" dirty="0" err="1">
+                <a:solidFill>
+                  <a:schemeClr val="tx1"/>
+                </a:solidFill>
+                <a:latin typeface="Arial" panose="020B0604020202020204" pitchFamily="34" charset="0"/>
+                <a:cs typeface="Arial" panose="020B0604020202020204" pitchFamily="34" charset="0"/>
+              </a:rPr>
+              <a:t>instance</a:t>
+            </a:r>
+            <a:r>
+              <a:rPr lang="de-CH" sz="1400" dirty="0">
+                <a:solidFill>
+                  <a:schemeClr val="tx1"/>
+                </a:solidFill>
+                <a:latin typeface="Arial" panose="020B0604020202020204" pitchFamily="34" charset="0"/>
+                <a:cs typeface="Arial" panose="020B0604020202020204" pitchFamily="34" charset="0"/>
+              </a:rPr>
+              <a:t> and </a:t>
+            </a:r>
+            <a:r>
+              <a:rPr lang="de-CH" sz="1400" dirty="0" err="1">
+                <a:solidFill>
+                  <a:schemeClr val="tx1"/>
+                </a:solidFill>
+                <a:latin typeface="Arial" panose="020B0604020202020204" pitchFamily="34" charset="0"/>
+                <a:cs typeface="Arial" panose="020B0604020202020204" pitchFamily="34" charset="0"/>
+              </a:rPr>
+              <a:t>execute</a:t>
+            </a:r>
+            <a:r>
+              <a:rPr lang="de-CH" sz="1400" dirty="0">
+                <a:solidFill>
+                  <a:schemeClr val="tx1"/>
+                </a:solidFill>
+                <a:latin typeface="Arial" panose="020B0604020202020204" pitchFamily="34" charset="0"/>
+                <a:cs typeface="Arial" panose="020B0604020202020204" pitchFamily="34" charset="0"/>
+              </a:rPr>
+              <a:t>.</a:t>
+            </a:r>
+          </a:p>
+          <a:p>
+            <a:pPr algn="ctr"/>
+            <a:r>
+              <a:rPr lang="de-CH" sz="1400" dirty="0">
+                <a:solidFill>
+                  <a:schemeClr val="tx1"/>
+                </a:solidFill>
+                <a:latin typeface="Arial" panose="020B0604020202020204" pitchFamily="34" charset="0"/>
+                <a:cs typeface="Arial" panose="020B0604020202020204" pitchFamily="34" charset="0"/>
+              </a:rPr>
+              <a:t>A Blob </a:t>
+            </a:r>
+            <a:r>
+              <a:rPr lang="de-CH" sz="1400" dirty="0" err="1">
+                <a:solidFill>
+                  <a:schemeClr val="tx1"/>
+                </a:solidFill>
+                <a:latin typeface="Arial" panose="020B0604020202020204" pitchFamily="34" charset="0"/>
+                <a:cs typeface="Arial" panose="020B0604020202020204" pitchFamily="34" charset="0"/>
+              </a:rPr>
+              <a:t>object</a:t>
+            </a:r>
+            <a:r>
+              <a:rPr lang="de-CH" sz="1400" dirty="0">
+                <a:solidFill>
+                  <a:schemeClr val="tx1"/>
+                </a:solidFill>
+                <a:latin typeface="Arial" panose="020B0604020202020204" pitchFamily="34" charset="0"/>
+                <a:cs typeface="Arial" panose="020B0604020202020204" pitchFamily="34" charset="0"/>
+              </a:rPr>
+              <a:t> Tab </a:t>
+            </a:r>
+            <a:r>
+              <a:rPr lang="de-CH" sz="1400" dirty="0" err="1">
+                <a:solidFill>
+                  <a:schemeClr val="tx1"/>
+                </a:solidFill>
+                <a:latin typeface="Arial" panose="020B0604020202020204" pitchFamily="34" charset="0"/>
+                <a:cs typeface="Arial" panose="020B0604020202020204" pitchFamily="34" charset="0"/>
+              </a:rPr>
+              <a:t>opens</a:t>
+            </a:r>
+            <a:r>
+              <a:rPr lang="de-CH" sz="1400" dirty="0">
+                <a:solidFill>
+                  <a:schemeClr val="tx1"/>
+                </a:solidFill>
+                <a:latin typeface="Arial" panose="020B0604020202020204" pitchFamily="34" charset="0"/>
+                <a:cs typeface="Arial" panose="020B0604020202020204" pitchFamily="34" charset="0"/>
+              </a:rPr>
+              <a:t> </a:t>
+            </a:r>
+            <a:r>
+              <a:rPr lang="de-CH" sz="1400" dirty="0" err="1">
+                <a:solidFill>
+                  <a:schemeClr val="tx1"/>
+                </a:solidFill>
+                <a:latin typeface="Arial" panose="020B0604020202020204" pitchFamily="34" charset="0"/>
+                <a:cs typeface="Arial" panose="020B0604020202020204" pitchFamily="34" charset="0"/>
+              </a:rPr>
+              <a:t>displaying</a:t>
+            </a:r>
+            <a:r>
+              <a:rPr lang="de-CH" sz="1400" dirty="0">
+                <a:solidFill>
+                  <a:schemeClr val="tx1"/>
+                </a:solidFill>
+                <a:latin typeface="Arial" panose="020B0604020202020204" pitchFamily="34" charset="0"/>
+                <a:cs typeface="Arial" panose="020B0604020202020204" pitchFamily="34" charset="0"/>
+              </a:rPr>
+              <a:t> </a:t>
+            </a:r>
+            <a:r>
+              <a:rPr lang="de-CH" sz="1400" dirty="0" err="1">
+                <a:solidFill>
+                  <a:schemeClr val="tx1"/>
+                </a:solidFill>
+                <a:latin typeface="Arial" panose="020B0604020202020204" pitchFamily="34" charset="0"/>
+                <a:cs typeface="Arial" panose="020B0604020202020204" pitchFamily="34" charset="0"/>
+              </a:rPr>
+              <a:t>the</a:t>
+            </a:r>
+            <a:r>
+              <a:rPr lang="de-CH" sz="1400" dirty="0">
+                <a:solidFill>
+                  <a:schemeClr val="tx1"/>
+                </a:solidFill>
+                <a:latin typeface="Arial" panose="020B0604020202020204" pitchFamily="34" charset="0"/>
+                <a:cs typeface="Arial" panose="020B0604020202020204" pitchFamily="34" charset="0"/>
+              </a:rPr>
+              <a:t> </a:t>
+            </a:r>
+            <a:r>
+              <a:rPr lang="de-CH" sz="1400" dirty="0" err="1">
+                <a:solidFill>
+                  <a:schemeClr val="tx1"/>
+                </a:solidFill>
+                <a:latin typeface="Arial" panose="020B0604020202020204" pitchFamily="34" charset="0"/>
+                <a:cs typeface="Arial" panose="020B0604020202020204" pitchFamily="34" charset="0"/>
+              </a:rPr>
+              <a:t>output</a:t>
+            </a:r>
+            <a:r>
+              <a:rPr lang="de-CH" sz="1400" dirty="0">
+                <a:solidFill>
+                  <a:schemeClr val="tx1"/>
+                </a:solidFill>
+                <a:latin typeface="Arial" panose="020B0604020202020204" pitchFamily="34" charset="0"/>
+                <a:cs typeface="Arial" panose="020B0604020202020204" pitchFamily="34" charset="0"/>
+              </a:rPr>
+              <a:t> </a:t>
+            </a:r>
+            <a:r>
+              <a:rPr lang="de-CH" sz="1400" dirty="0" err="1">
+                <a:solidFill>
+                  <a:schemeClr val="tx1"/>
+                </a:solidFill>
+                <a:latin typeface="Arial" panose="020B0604020202020204" pitchFamily="34" charset="0"/>
+                <a:cs typeface="Arial" panose="020B0604020202020204" pitchFamily="34" charset="0"/>
+              </a:rPr>
+              <a:t>cards</a:t>
+            </a:r>
+            <a:endParaRPr lang="de-CH" sz="1400" dirty="0">
               <a:solidFill>
                 <a:schemeClr val="tx1"/>
               </a:solidFill>
@@ -4682,242 +4721,14 @@
               <a:cs typeface="Arial" panose="020B0604020202020204" pitchFamily="34" charset="0"/>
             </a:endParaRPr>
           </a:p>
-          <a:p>
-            <a:endParaRPr lang="de-CH" sz="1000" b="1" dirty="0">
-              <a:solidFill>
-                <a:schemeClr val="tx1"/>
-              </a:solidFill>
-              <a:latin typeface="Arial" panose="020B0604020202020204" pitchFamily="34" charset="0"/>
-              <a:cs typeface="Arial" panose="020B0604020202020204" pitchFamily="34" charset="0"/>
-            </a:endParaRPr>
-          </a:p>
-          <a:p>
-            <a:r>
-              <a:rPr lang="de-CH" sz="1000" b="1" dirty="0" err="1">
-                <a:solidFill>
-                  <a:schemeClr val="tx1"/>
-                </a:solidFill>
-                <a:latin typeface="Arial" panose="020B0604020202020204" pitchFamily="34" charset="0"/>
-                <a:cs typeface="Arial" panose="020B0604020202020204" pitchFamily="34" charset="0"/>
-              </a:rPr>
-              <a:t>Get</a:t>
-            </a:r>
-            <a:r>
-              <a:rPr lang="de-CH" sz="1000" b="1" dirty="0">
-                <a:solidFill>
-                  <a:schemeClr val="tx1"/>
-                </a:solidFill>
-                <a:latin typeface="Arial" panose="020B0604020202020204" pitchFamily="34" charset="0"/>
-                <a:cs typeface="Arial" panose="020B0604020202020204" pitchFamily="34" charset="0"/>
-              </a:rPr>
-              <a:t> </a:t>
-            </a:r>
-            <a:r>
-              <a:rPr lang="de-CH" sz="1000" b="1" dirty="0" err="1">
-                <a:solidFill>
-                  <a:schemeClr val="tx1"/>
-                </a:solidFill>
-                <a:latin typeface="Arial" panose="020B0604020202020204" pitchFamily="34" charset="0"/>
-                <a:cs typeface="Arial" panose="020B0604020202020204" pitchFamily="34" charset="0"/>
-              </a:rPr>
-              <a:t>passed</a:t>
-            </a:r>
-            <a:r>
-              <a:rPr lang="de-CH" sz="1000" b="1" dirty="0">
-                <a:solidFill>
-                  <a:schemeClr val="tx1"/>
-                </a:solidFill>
-                <a:latin typeface="Arial" panose="020B0604020202020204" pitchFamily="34" charset="0"/>
-                <a:cs typeface="Arial" panose="020B0604020202020204" pitchFamily="34" charset="0"/>
-              </a:rPr>
-              <a:t> </a:t>
-            </a:r>
-            <a:r>
-              <a:rPr lang="de-CH" sz="1000" b="1" dirty="0" err="1">
-                <a:solidFill>
-                  <a:schemeClr val="tx1"/>
-                </a:solidFill>
-                <a:latin typeface="Arial" panose="020B0604020202020204" pitchFamily="34" charset="0"/>
-                <a:cs typeface="Arial" panose="020B0604020202020204" pitchFamily="34" charset="0"/>
-              </a:rPr>
-              <a:t>data</a:t>
-            </a:r>
-            <a:r>
-              <a:rPr lang="de-CH" sz="1000" b="1" dirty="0">
-                <a:solidFill>
-                  <a:schemeClr val="tx1"/>
-                </a:solidFill>
-                <a:latin typeface="Arial" panose="020B0604020202020204" pitchFamily="34" charset="0"/>
-                <a:cs typeface="Arial" panose="020B0604020202020204" pitchFamily="34" charset="0"/>
-              </a:rPr>
-              <a:t> </a:t>
-            </a:r>
-            <a:r>
-              <a:rPr lang="de-CH" sz="1000" b="1" dirty="0" err="1">
-                <a:solidFill>
-                  <a:schemeClr val="tx1"/>
-                </a:solidFill>
-                <a:latin typeface="Arial" panose="020B0604020202020204" pitchFamily="34" charset="0"/>
-                <a:cs typeface="Arial" panose="020B0604020202020204" pitchFamily="34" charset="0"/>
-              </a:rPr>
-              <a:t>fom</a:t>
-            </a:r>
-            <a:r>
-              <a:rPr lang="de-CH" sz="1000" b="1" dirty="0">
-                <a:solidFill>
-                  <a:schemeClr val="tx1"/>
-                </a:solidFill>
-                <a:latin typeface="Arial" panose="020B0604020202020204" pitchFamily="34" charset="0"/>
-                <a:cs typeface="Arial" panose="020B0604020202020204" pitchFamily="34" charset="0"/>
-              </a:rPr>
-              <a:t> </a:t>
-            </a:r>
-            <a:r>
-              <a:rPr lang="de-CH" sz="1000" b="1" dirty="0" err="1">
-                <a:solidFill>
-                  <a:schemeClr val="tx1"/>
-                </a:solidFill>
-                <a:latin typeface="Arial" panose="020B0604020202020204" pitchFamily="34" charset="0"/>
-                <a:cs typeface="Arial" panose="020B0604020202020204" pitchFamily="34" charset="0"/>
-              </a:rPr>
-              <a:t>the</a:t>
-            </a:r>
-            <a:r>
-              <a:rPr lang="de-CH" sz="1000" b="1" dirty="0">
-                <a:solidFill>
-                  <a:schemeClr val="tx1"/>
-                </a:solidFill>
-                <a:latin typeface="Arial" panose="020B0604020202020204" pitchFamily="34" charset="0"/>
-                <a:cs typeface="Arial" panose="020B0604020202020204" pitchFamily="34" charset="0"/>
-              </a:rPr>
-              <a:t> </a:t>
-            </a:r>
-            <a:r>
-              <a:rPr lang="de-CH" sz="1000" b="1" dirty="0" err="1">
-                <a:solidFill>
-                  <a:schemeClr val="tx1"/>
-                </a:solidFill>
-                <a:latin typeface="Arial" panose="020B0604020202020204" pitchFamily="34" charset="0"/>
-                <a:cs typeface="Arial" panose="020B0604020202020204" pitchFamily="34" charset="0"/>
-              </a:rPr>
-              <a:t>opened</a:t>
-            </a:r>
-            <a:r>
-              <a:rPr lang="de-CH" sz="1000" b="1" dirty="0">
-                <a:solidFill>
-                  <a:schemeClr val="tx1"/>
-                </a:solidFill>
-                <a:latin typeface="Arial" panose="020B0604020202020204" pitchFamily="34" charset="0"/>
-                <a:cs typeface="Arial" panose="020B0604020202020204" pitchFamily="34" charset="0"/>
-              </a:rPr>
-              <a:t> </a:t>
-            </a:r>
-            <a:r>
-              <a:rPr lang="de-CH" sz="1000" b="1" dirty="0" err="1">
-                <a:solidFill>
-                  <a:schemeClr val="tx1"/>
-                </a:solidFill>
-                <a:latin typeface="Arial" panose="020B0604020202020204" pitchFamily="34" charset="0"/>
-                <a:cs typeface="Arial" panose="020B0604020202020204" pitchFamily="34" charset="0"/>
-              </a:rPr>
-              <a:t>object</a:t>
-            </a:r>
-            <a:r>
-              <a:rPr lang="de-CH" sz="1000" b="1" dirty="0">
-                <a:solidFill>
-                  <a:schemeClr val="tx1"/>
-                </a:solidFill>
-                <a:latin typeface="Arial" panose="020B0604020202020204" pitchFamily="34" charset="0"/>
-                <a:cs typeface="Arial" panose="020B0604020202020204" pitchFamily="34" charset="0"/>
-              </a:rPr>
-              <a:t> </a:t>
-            </a:r>
-            <a:r>
-              <a:rPr lang="de-CH" sz="1000" b="1" dirty="0" err="1">
-                <a:solidFill>
-                  <a:schemeClr val="tx1"/>
-                </a:solidFill>
-                <a:latin typeface="Arial" panose="020B0604020202020204" pitchFamily="34" charset="0"/>
-                <a:cs typeface="Arial" panose="020B0604020202020204" pitchFamily="34" charset="0"/>
-              </a:rPr>
-              <a:t>or</a:t>
-            </a:r>
-            <a:r>
-              <a:rPr lang="de-CH" sz="1000" b="1" dirty="0">
-                <a:solidFill>
-                  <a:schemeClr val="tx1"/>
-                </a:solidFill>
-                <a:latin typeface="Arial" panose="020B0604020202020204" pitchFamily="34" charset="0"/>
-                <a:cs typeface="Arial" panose="020B0604020202020204" pitchFamily="34" charset="0"/>
-              </a:rPr>
-              <a:t> </a:t>
-            </a:r>
-            <a:r>
-              <a:rPr lang="de-CH" sz="1000" b="1" dirty="0" err="1">
-                <a:solidFill>
-                  <a:schemeClr val="tx1"/>
-                </a:solidFill>
-                <a:latin typeface="Arial" panose="020B0604020202020204" pitchFamily="34" charset="0"/>
-                <a:cs typeface="Arial" panose="020B0604020202020204" pitchFamily="34" charset="0"/>
-              </a:rPr>
-              <a:t>from</a:t>
-            </a:r>
-            <a:r>
-              <a:rPr lang="de-CH" sz="1000" b="1" dirty="0">
-                <a:solidFill>
-                  <a:schemeClr val="tx1"/>
-                </a:solidFill>
-                <a:latin typeface="Arial" panose="020B0604020202020204" pitchFamily="34" charset="0"/>
-                <a:cs typeface="Arial" panose="020B0604020202020204" pitchFamily="34" charset="0"/>
-              </a:rPr>
-              <a:t>  </a:t>
-            </a:r>
-            <a:r>
-              <a:rPr lang="de-CH" sz="1000" b="1" dirty="0" err="1">
-                <a:solidFill>
-                  <a:schemeClr val="tx1"/>
-                </a:solidFill>
-                <a:latin typeface="Arial" panose="020B0604020202020204" pitchFamily="34" charset="0"/>
-                <a:cs typeface="Arial" panose="020B0604020202020204" pitchFamily="34" charset="0"/>
-              </a:rPr>
-              <a:t>local</a:t>
-            </a:r>
-            <a:r>
-              <a:rPr lang="de-CH" sz="1000" b="1" dirty="0">
-                <a:solidFill>
-                  <a:schemeClr val="tx1"/>
-                </a:solidFill>
-                <a:latin typeface="Arial" panose="020B0604020202020204" pitchFamily="34" charset="0"/>
-                <a:cs typeface="Arial" panose="020B0604020202020204" pitchFamily="34" charset="0"/>
-              </a:rPr>
-              <a:t> </a:t>
-            </a:r>
-            <a:r>
-              <a:rPr lang="de-CH" sz="1000" b="1" dirty="0" err="1">
-                <a:solidFill>
-                  <a:schemeClr val="tx1"/>
-                </a:solidFill>
-                <a:latin typeface="Arial" panose="020B0604020202020204" pitchFamily="34" charset="0"/>
-                <a:cs typeface="Arial" panose="020B0604020202020204" pitchFamily="34" charset="0"/>
-              </a:rPr>
-              <a:t>storage</a:t>
-            </a:r>
-            <a:endParaRPr lang="de-CH" sz="1000" b="1" dirty="0">
-              <a:solidFill>
-                <a:schemeClr val="tx1"/>
-              </a:solidFill>
-              <a:latin typeface="Arial" panose="020B0604020202020204" pitchFamily="34" charset="0"/>
-              <a:cs typeface="Arial" panose="020B0604020202020204" pitchFamily="34" charset="0"/>
-            </a:endParaRPr>
-          </a:p>
-        </p:txBody>
-      </p:sp>
-      <p:sp>
-        <p:nvSpPr>
-          <p:cNvPr id="12" name="Pfeil: nach rechts 11">
+        </p:txBody>
+      </p:sp>
+      <p:sp>
+        <p:nvSpPr>
+          <p:cNvPr id="28" name="Pfeil: nach rechts 27">
             <a:extLst>
               <a:ext uri="{FF2B5EF4-FFF2-40B4-BE49-F238E27FC236}">
-                <a16:creationId xmlns:a16="http://schemas.microsoft.com/office/drawing/2014/main" id="{8CD902AF-2414-06B3-BBCB-5E9638A3676E}"/>
+                <a16:creationId xmlns:a16="http://schemas.microsoft.com/office/drawing/2014/main" id="{2541DD84-382F-2E1F-462D-72C1ABBA6845}"/>
               </a:ext>
             </a:extLst>
           </p:cNvPr>
@@ -4925,9 +4736,9 @@
           <p:nvPr/>
         </p:nvSpPr>
         <p:spPr>
-          <a:xfrm rot="1122447">
-            <a:off x="3268403" y="1342308"/>
-            <a:ext cx="433295" cy="234366"/>
+          <a:xfrm rot="5400000">
+            <a:off x="9948624" y="3573805"/>
+            <a:ext cx="322300" cy="761493"/>
           </a:xfrm>
           <a:prstGeom prst="rightArrow">
             <a:avLst/>
@@ -4960,366 +4771,10 @@
           </a:p>
         </p:txBody>
       </p:sp>
-      <p:sp>
-        <p:nvSpPr>
-          <p:cNvPr id="13" name="Pfeil: nach rechts 12">
-            <a:extLst>
-              <a:ext uri="{FF2B5EF4-FFF2-40B4-BE49-F238E27FC236}">
-                <a16:creationId xmlns:a16="http://schemas.microsoft.com/office/drawing/2014/main" id="{2A26D29E-305A-7C88-F963-184D0156158F}"/>
-              </a:ext>
-            </a:extLst>
-          </p:cNvPr>
-          <p:cNvSpPr/>
-          <p:nvPr/>
-        </p:nvSpPr>
-        <p:spPr>
-          <a:xfrm rot="18983583">
-            <a:off x="3357966" y="2614349"/>
-            <a:ext cx="433295" cy="234366"/>
-          </a:xfrm>
-          <a:prstGeom prst="rightArrow">
-            <a:avLst/>
-          </a:prstGeom>
-          <a:noFill/>
-          <a:ln w="25400"/>
-        </p:spPr>
-        <p:style>
-          <a:lnRef idx="2">
-            <a:schemeClr val="accent1">
-              <a:shade val="15000"/>
-            </a:schemeClr>
-          </a:lnRef>
-          <a:fillRef idx="1">
-            <a:schemeClr val="accent1"/>
-          </a:fillRef>
-          <a:effectRef idx="0">
-            <a:schemeClr val="accent1"/>
-          </a:effectRef>
-          <a:fontRef idx="minor">
-            <a:schemeClr val="lt1"/>
-          </a:fontRef>
-        </p:style>
-        <p:txBody>
-          <a:bodyPr rtlCol="0" anchor="ctr"/>
-          <a:lstStyle/>
-          <a:p>
-            <a:pPr algn="ctr"/>
-            <a:endParaRPr lang="de-CH"/>
-          </a:p>
-        </p:txBody>
-      </p:sp>
-      <p:sp>
-        <p:nvSpPr>
-          <p:cNvPr id="14" name="Pfeil: nach rechts 13">
-            <a:extLst>
-              <a:ext uri="{FF2B5EF4-FFF2-40B4-BE49-F238E27FC236}">
-                <a16:creationId xmlns:a16="http://schemas.microsoft.com/office/drawing/2014/main" id="{10C21F40-0C48-EA7E-D1BE-DDB15A737EBF}"/>
-              </a:ext>
-            </a:extLst>
-          </p:cNvPr>
-          <p:cNvSpPr/>
-          <p:nvPr/>
-        </p:nvSpPr>
-        <p:spPr>
-          <a:xfrm rot="19046199">
-            <a:off x="3333847" y="2106843"/>
-            <a:ext cx="433295" cy="234366"/>
-          </a:xfrm>
-          <a:prstGeom prst="rightArrow">
-            <a:avLst/>
-          </a:prstGeom>
-          <a:noFill/>
-          <a:ln w="25400"/>
-        </p:spPr>
-        <p:style>
-          <a:lnRef idx="2">
-            <a:schemeClr val="accent1">
-              <a:shade val="15000"/>
-            </a:schemeClr>
-          </a:lnRef>
-          <a:fillRef idx="1">
-            <a:schemeClr val="accent1"/>
-          </a:fillRef>
-          <a:effectRef idx="0">
-            <a:schemeClr val="accent1"/>
-          </a:effectRef>
-          <a:fontRef idx="minor">
-            <a:schemeClr val="lt1"/>
-          </a:fontRef>
-        </p:style>
-        <p:txBody>
-          <a:bodyPr rtlCol="0" anchor="ctr"/>
-          <a:lstStyle/>
-          <a:p>
-            <a:pPr algn="ctr"/>
-            <a:endParaRPr lang="de-CH"/>
-          </a:p>
-        </p:txBody>
-      </p:sp>
-      <p:sp>
-        <p:nvSpPr>
-          <p:cNvPr id="15" name="Pfeil: nach rechts 14">
-            <a:extLst>
-              <a:ext uri="{FF2B5EF4-FFF2-40B4-BE49-F238E27FC236}">
-                <a16:creationId xmlns:a16="http://schemas.microsoft.com/office/drawing/2014/main" id="{D22B274E-0788-2D1F-97C3-C0B2E663F2D7}"/>
-              </a:ext>
-            </a:extLst>
-          </p:cNvPr>
-          <p:cNvSpPr/>
-          <p:nvPr/>
-        </p:nvSpPr>
-        <p:spPr>
-          <a:xfrm rot="19821310">
-            <a:off x="6703370" y="2590012"/>
-            <a:ext cx="433295" cy="234366"/>
-          </a:xfrm>
-          <a:prstGeom prst="rightArrow">
-            <a:avLst/>
-          </a:prstGeom>
-          <a:noFill/>
-          <a:ln w="25400"/>
-        </p:spPr>
-        <p:style>
-          <a:lnRef idx="2">
-            <a:schemeClr val="accent1">
-              <a:shade val="15000"/>
-            </a:schemeClr>
-          </a:lnRef>
-          <a:fillRef idx="1">
-            <a:schemeClr val="accent1"/>
-          </a:fillRef>
-          <a:effectRef idx="0">
-            <a:schemeClr val="accent1"/>
-          </a:effectRef>
-          <a:fontRef idx="minor">
-            <a:schemeClr val="lt1"/>
-          </a:fontRef>
-        </p:style>
-        <p:txBody>
-          <a:bodyPr rtlCol="0" anchor="ctr"/>
-          <a:lstStyle/>
-          <a:p>
-            <a:pPr algn="ctr"/>
-            <a:endParaRPr lang="de-CH"/>
-          </a:p>
-        </p:txBody>
-      </p:sp>
-      <p:sp>
-        <p:nvSpPr>
-          <p:cNvPr id="16" name="Pfeil: nach rechts 15">
-            <a:extLst>
-              <a:ext uri="{FF2B5EF4-FFF2-40B4-BE49-F238E27FC236}">
-                <a16:creationId xmlns:a16="http://schemas.microsoft.com/office/drawing/2014/main" id="{70F2DAE6-A7C2-5D21-7A28-03306CD47A25}"/>
-              </a:ext>
-            </a:extLst>
-          </p:cNvPr>
-          <p:cNvSpPr/>
-          <p:nvPr/>
-        </p:nvSpPr>
-        <p:spPr>
-          <a:xfrm rot="16200000">
-            <a:off x="8568108" y="3154919"/>
-            <a:ext cx="279194" cy="196793"/>
-          </a:xfrm>
-          <a:prstGeom prst="rightArrow">
-            <a:avLst/>
-          </a:prstGeom>
-          <a:noFill/>
-          <a:ln w="25400"/>
-        </p:spPr>
-        <p:style>
-          <a:lnRef idx="2">
-            <a:schemeClr val="accent1">
-              <a:shade val="15000"/>
-            </a:schemeClr>
-          </a:lnRef>
-          <a:fillRef idx="1">
-            <a:schemeClr val="accent1"/>
-          </a:fillRef>
-          <a:effectRef idx="0">
-            <a:schemeClr val="accent1"/>
-          </a:effectRef>
-          <a:fontRef idx="minor">
-            <a:schemeClr val="lt1"/>
-          </a:fontRef>
-        </p:style>
-        <p:txBody>
-          <a:bodyPr rtlCol="0" anchor="ctr"/>
-          <a:lstStyle/>
-          <a:p>
-            <a:pPr algn="ctr"/>
-            <a:endParaRPr lang="de-CH"/>
-          </a:p>
-        </p:txBody>
-      </p:sp>
-      <p:sp>
-        <p:nvSpPr>
-          <p:cNvPr id="17" name="Rechteck 16">
-            <a:extLst>
-              <a:ext uri="{FF2B5EF4-FFF2-40B4-BE49-F238E27FC236}">
-                <a16:creationId xmlns:a16="http://schemas.microsoft.com/office/drawing/2014/main" id="{3F01D55D-4F95-9D4C-3AE3-75AAFBB01431}"/>
-              </a:ext>
-            </a:extLst>
-          </p:cNvPr>
-          <p:cNvSpPr/>
-          <p:nvPr/>
-        </p:nvSpPr>
-        <p:spPr>
-          <a:xfrm>
-            <a:off x="3780206" y="3892313"/>
-            <a:ext cx="2806490" cy="369333"/>
-          </a:xfrm>
-          <a:prstGeom prst="rect">
-            <a:avLst/>
-          </a:prstGeom>
-          <a:noFill/>
-          <a:ln>
-            <a:solidFill>
-              <a:schemeClr val="tx1"/>
-            </a:solidFill>
-          </a:ln>
-        </p:spPr>
-        <p:style>
-          <a:lnRef idx="2">
-            <a:schemeClr val="accent1">
-              <a:shade val="50000"/>
-            </a:schemeClr>
-          </a:lnRef>
-          <a:fillRef idx="1">
-            <a:schemeClr val="accent1"/>
-          </a:fillRef>
-          <a:effectRef idx="0">
-            <a:schemeClr val="accent1"/>
-          </a:effectRef>
-          <a:fontRef idx="minor">
-            <a:schemeClr val="lt1"/>
-          </a:fontRef>
-        </p:style>
-        <p:txBody>
-          <a:bodyPr rtlCol="0" anchor="ctr"/>
-          <a:lstStyle/>
-          <a:p>
-            <a:pPr algn="ctr"/>
-            <a:r>
-              <a:rPr lang="de-CH" sz="1000" b="1" dirty="0" err="1">
-                <a:solidFill>
-                  <a:schemeClr val="tx1"/>
-                </a:solidFill>
-                <a:latin typeface="Arial" panose="020B0604020202020204" pitchFamily="34" charset="0"/>
-                <a:cs typeface="Arial" panose="020B0604020202020204" pitchFamily="34" charset="0"/>
-              </a:rPr>
-              <a:t>localStorage</a:t>
-            </a:r>
-            <a:endParaRPr lang="de-CH" sz="1000" b="1" dirty="0">
-              <a:solidFill>
-                <a:schemeClr val="tx1"/>
-              </a:solidFill>
-              <a:latin typeface="Arial" panose="020B0604020202020204" pitchFamily="34" charset="0"/>
-              <a:cs typeface="Arial" panose="020B0604020202020204" pitchFamily="34" charset="0"/>
-            </a:endParaRPr>
-          </a:p>
-        </p:txBody>
-      </p:sp>
-      <p:sp>
-        <p:nvSpPr>
-          <p:cNvPr id="18" name="Pfeil: nach rechts 17">
-            <a:extLst>
-              <a:ext uri="{FF2B5EF4-FFF2-40B4-BE49-F238E27FC236}">
-                <a16:creationId xmlns:a16="http://schemas.microsoft.com/office/drawing/2014/main" id="{55B7035E-B91F-6418-957D-0A1E9A7D0812}"/>
-              </a:ext>
-            </a:extLst>
-          </p:cNvPr>
-          <p:cNvSpPr/>
-          <p:nvPr/>
-        </p:nvSpPr>
-        <p:spPr>
-          <a:xfrm rot="5400000">
-            <a:off x="5142251" y="3610987"/>
-            <a:ext cx="279194" cy="196793"/>
-          </a:xfrm>
-          <a:prstGeom prst="rightArrow">
-            <a:avLst/>
-          </a:prstGeom>
-          <a:noFill/>
-          <a:ln w="25400"/>
-        </p:spPr>
-        <p:style>
-          <a:lnRef idx="2">
-            <a:schemeClr val="accent1">
-              <a:shade val="15000"/>
-            </a:schemeClr>
-          </a:lnRef>
-          <a:fillRef idx="1">
-            <a:schemeClr val="accent1"/>
-          </a:fillRef>
-          <a:effectRef idx="0">
-            <a:schemeClr val="accent1"/>
-          </a:effectRef>
-          <a:fontRef idx="minor">
-            <a:schemeClr val="lt1"/>
-          </a:fontRef>
-        </p:style>
-        <p:txBody>
-          <a:bodyPr rtlCol="0" anchor="ctr"/>
-          <a:lstStyle/>
-          <a:p>
-            <a:pPr algn="ctr"/>
-            <a:endParaRPr lang="de-CH"/>
-          </a:p>
-        </p:txBody>
-      </p:sp>
-      <p:sp>
-        <p:nvSpPr>
-          <p:cNvPr id="19" name="Pfeil: nach rechts 18">
-            <a:extLst>
-              <a:ext uri="{FF2B5EF4-FFF2-40B4-BE49-F238E27FC236}">
-                <a16:creationId xmlns:a16="http://schemas.microsoft.com/office/drawing/2014/main" id="{DDD3A720-E515-D9FC-5FEE-C2931D660549}"/>
-              </a:ext>
-            </a:extLst>
-          </p:cNvPr>
-          <p:cNvSpPr/>
-          <p:nvPr/>
-        </p:nvSpPr>
-        <p:spPr>
-          <a:xfrm>
-            <a:off x="6709318" y="3971003"/>
-            <a:ext cx="433295" cy="234366"/>
-          </a:xfrm>
-          <a:prstGeom prst="rightArrow">
-            <a:avLst/>
-          </a:prstGeom>
-          <a:noFill/>
-          <a:ln w="25400"/>
-        </p:spPr>
-        <p:style>
-          <a:lnRef idx="2">
-            <a:schemeClr val="accent1">
-              <a:shade val="15000"/>
-            </a:schemeClr>
-          </a:lnRef>
-          <a:fillRef idx="1">
-            <a:schemeClr val="accent1"/>
-          </a:fillRef>
-          <a:effectRef idx="0">
-            <a:schemeClr val="accent1"/>
-          </a:effectRef>
-          <a:fontRef idx="minor">
-            <a:schemeClr val="lt1"/>
-          </a:fontRef>
-        </p:style>
-        <p:txBody>
-          <a:bodyPr rtlCol="0" anchor="ctr"/>
-          <a:lstStyle/>
-          <a:p>
-            <a:pPr algn="ctr"/>
-            <a:endParaRPr lang="de-CH"/>
-          </a:p>
-        </p:txBody>
-      </p:sp>
     </p:spTree>
     <p:extLst>
       <p:ext uri="{BB962C8B-B14F-4D97-AF65-F5344CB8AC3E}">
-        <p14:creationId xmlns:p14="http://schemas.microsoft.com/office/powerpoint/2010/main" val="3998550387"/>
+        <p14:creationId xmlns:p14="http://schemas.microsoft.com/office/powerpoint/2010/main" val="3525587389"/>
       </p:ext>
     </p:extLst>
   </p:cSld>
@@ -5346,10 +4801,2214 @@
           <a:chExt cx="0" cy="0"/>
         </a:xfrm>
       </p:grpSpPr>
+      <p:sp>
+        <p:nvSpPr>
+          <p:cNvPr id="2" name="Rechteck 1">
+            <a:extLst>
+              <a:ext uri="{FF2B5EF4-FFF2-40B4-BE49-F238E27FC236}">
+                <a16:creationId xmlns:a16="http://schemas.microsoft.com/office/drawing/2014/main" id="{899FB568-93F2-95E9-640B-8DA5B99927A5}"/>
+              </a:ext>
+            </a:extLst>
+          </p:cNvPr>
+          <p:cNvSpPr/>
+          <p:nvPr/>
+        </p:nvSpPr>
+        <p:spPr>
+          <a:xfrm>
+            <a:off x="4192320" y="670245"/>
+            <a:ext cx="4681516" cy="470139"/>
+          </a:xfrm>
+          <a:prstGeom prst="rect">
+            <a:avLst/>
+          </a:prstGeom>
+          <a:solidFill>
+            <a:schemeClr val="bg1">
+              <a:lumMod val="85000"/>
+            </a:schemeClr>
+          </a:solidFill>
+          <a:ln>
+            <a:solidFill>
+              <a:schemeClr val="tx1"/>
+            </a:solidFill>
+          </a:ln>
+        </p:spPr>
+        <p:style>
+          <a:lnRef idx="2">
+            <a:schemeClr val="accent1">
+              <a:shade val="50000"/>
+            </a:schemeClr>
+          </a:lnRef>
+          <a:fillRef idx="1">
+            <a:schemeClr val="accent1"/>
+          </a:fillRef>
+          <a:effectRef idx="0">
+            <a:schemeClr val="accent1"/>
+          </a:effectRef>
+          <a:fontRef idx="minor">
+            <a:schemeClr val="lt1"/>
+          </a:fontRef>
+        </p:style>
+        <p:txBody>
+          <a:bodyPr rtlCol="0" anchor="ctr"/>
+          <a:lstStyle/>
+          <a:p>
+            <a:pPr algn="ctr"/>
+            <a:r>
+              <a:rPr lang="de-CH" sz="1600" b="1" dirty="0">
+                <a:solidFill>
+                  <a:schemeClr val="tx1"/>
+                </a:solidFill>
+                <a:latin typeface="Arial" panose="020B0604020202020204" pitchFamily="34" charset="0"/>
+                <a:cs typeface="Arial" panose="020B0604020202020204" pitchFamily="34" charset="0"/>
+              </a:rPr>
+              <a:t>Class </a:t>
+            </a:r>
+            <a:r>
+              <a:rPr lang="de-CH" sz="1600" b="1" dirty="0" err="1">
+                <a:solidFill>
+                  <a:schemeClr val="tx1"/>
+                </a:solidFill>
+                <a:latin typeface="Arial" panose="020B0604020202020204" pitchFamily="34" charset="0"/>
+                <a:cs typeface="Arial" panose="020B0604020202020204" pitchFamily="34" charset="0"/>
+              </a:rPr>
+              <a:t>NameCards</a:t>
+            </a:r>
+            <a:endParaRPr lang="de-CH" sz="1600" b="1" dirty="0">
+              <a:solidFill>
+                <a:schemeClr val="tx1"/>
+              </a:solidFill>
+              <a:latin typeface="Arial" panose="020B0604020202020204" pitchFamily="34" charset="0"/>
+              <a:cs typeface="Arial" panose="020B0604020202020204" pitchFamily="34" charset="0"/>
+            </a:endParaRPr>
+          </a:p>
+        </p:txBody>
+      </p:sp>
+      <p:sp>
+        <p:nvSpPr>
+          <p:cNvPr id="3" name="Rechteck 2">
+            <a:extLst>
+              <a:ext uri="{FF2B5EF4-FFF2-40B4-BE49-F238E27FC236}">
+                <a16:creationId xmlns:a16="http://schemas.microsoft.com/office/drawing/2014/main" id="{EE2B39B3-038C-DB32-2350-C93792CB8D1C}"/>
+              </a:ext>
+            </a:extLst>
+          </p:cNvPr>
+          <p:cNvSpPr/>
+          <p:nvPr/>
+        </p:nvSpPr>
+        <p:spPr>
+          <a:xfrm>
+            <a:off x="4192320" y="1140385"/>
+            <a:ext cx="4681516" cy="802715"/>
+          </a:xfrm>
+          <a:prstGeom prst="rect">
+            <a:avLst/>
+          </a:prstGeom>
+          <a:noFill/>
+          <a:ln>
+            <a:solidFill>
+              <a:schemeClr val="tx1"/>
+            </a:solidFill>
+          </a:ln>
+        </p:spPr>
+        <p:style>
+          <a:lnRef idx="2">
+            <a:schemeClr val="accent1">
+              <a:shade val="50000"/>
+            </a:schemeClr>
+          </a:lnRef>
+          <a:fillRef idx="1">
+            <a:schemeClr val="accent1"/>
+          </a:fillRef>
+          <a:effectRef idx="0">
+            <a:schemeClr val="accent1"/>
+          </a:effectRef>
+          <a:fontRef idx="minor">
+            <a:schemeClr val="lt1"/>
+          </a:fontRef>
+        </p:style>
+        <p:txBody>
+          <a:bodyPr rtlCol="0" anchor="ctr"/>
+          <a:lstStyle/>
+          <a:p>
+            <a:r>
+              <a:rPr lang="de-CH" sz="1200" b="1" dirty="0">
+                <a:solidFill>
+                  <a:schemeClr val="tx1"/>
+                </a:solidFill>
+                <a:latin typeface="Arial" panose="020B0604020202020204" pitchFamily="34" charset="0"/>
+                <a:cs typeface="Arial" panose="020B0604020202020204" pitchFamily="34" charset="0"/>
+              </a:rPr>
+              <a:t>All </a:t>
+            </a:r>
+            <a:r>
+              <a:rPr lang="de-CH" sz="1200" b="1" dirty="0" err="1">
+                <a:solidFill>
+                  <a:schemeClr val="tx1"/>
+                </a:solidFill>
+                <a:latin typeface="Arial" panose="020B0604020202020204" pitchFamily="34" charset="0"/>
+                <a:cs typeface="Arial" panose="020B0604020202020204" pitchFamily="34" charset="0"/>
+              </a:rPr>
+              <a:t>information</a:t>
+            </a:r>
+            <a:r>
+              <a:rPr lang="de-CH" sz="1200" b="1" dirty="0">
+                <a:solidFill>
+                  <a:schemeClr val="tx1"/>
+                </a:solidFill>
+                <a:latin typeface="Arial" panose="020B0604020202020204" pitchFamily="34" charset="0"/>
+                <a:cs typeface="Arial" panose="020B0604020202020204" pitchFamily="34" charset="0"/>
+              </a:rPr>
+              <a:t> </a:t>
+            </a:r>
+            <a:r>
+              <a:rPr lang="de-CH" sz="1200" b="1" dirty="0" err="1">
+                <a:solidFill>
+                  <a:schemeClr val="tx1"/>
+                </a:solidFill>
+                <a:latin typeface="Arial" panose="020B0604020202020204" pitchFamily="34" charset="0"/>
+                <a:cs typeface="Arial" panose="020B0604020202020204" pitchFamily="34" charset="0"/>
+              </a:rPr>
+              <a:t>from</a:t>
+            </a:r>
+            <a:r>
+              <a:rPr lang="de-CH" sz="1200" b="1" dirty="0">
+                <a:solidFill>
+                  <a:schemeClr val="tx1"/>
+                </a:solidFill>
+                <a:latin typeface="Arial" panose="020B0604020202020204" pitchFamily="34" charset="0"/>
+                <a:cs typeface="Arial" panose="020B0604020202020204" pitchFamily="34" charset="0"/>
+              </a:rPr>
+              <a:t> </a:t>
+            </a:r>
+            <a:r>
+              <a:rPr lang="de-CH" sz="1200" b="1" dirty="0" err="1">
+                <a:solidFill>
+                  <a:schemeClr val="tx1"/>
+                </a:solidFill>
+                <a:latin typeface="Arial" panose="020B0604020202020204" pitchFamily="34" charset="0"/>
+                <a:cs typeface="Arial" panose="020B0604020202020204" pitchFamily="34" charset="0"/>
+              </a:rPr>
+              <a:t>the</a:t>
+            </a:r>
+            <a:r>
+              <a:rPr lang="de-CH" sz="1200" b="1" dirty="0">
+                <a:solidFill>
+                  <a:schemeClr val="tx1"/>
+                </a:solidFill>
+                <a:latin typeface="Arial" panose="020B0604020202020204" pitchFamily="34" charset="0"/>
+                <a:cs typeface="Arial" panose="020B0604020202020204" pitchFamily="34" charset="0"/>
+              </a:rPr>
+              <a:t> </a:t>
+            </a:r>
+            <a:r>
+              <a:rPr lang="de-CH" sz="1200" b="1" dirty="0" err="1">
+                <a:solidFill>
+                  <a:schemeClr val="tx1"/>
+                </a:solidFill>
+                <a:latin typeface="Arial" panose="020B0604020202020204" pitchFamily="34" charset="0"/>
+                <a:cs typeface="Arial" panose="020B0604020202020204" pitchFamily="34" charset="0"/>
+              </a:rPr>
+              <a:t>reservation</a:t>
+            </a:r>
+            <a:r>
+              <a:rPr lang="de-CH" sz="1200" b="1" dirty="0">
+                <a:solidFill>
+                  <a:schemeClr val="tx1"/>
+                </a:solidFill>
+                <a:latin typeface="Arial" panose="020B0604020202020204" pitchFamily="34" charset="0"/>
+                <a:cs typeface="Arial" panose="020B0604020202020204" pitchFamily="34" charset="0"/>
+              </a:rPr>
+              <a:t> XML </a:t>
+            </a:r>
+            <a:r>
+              <a:rPr lang="de-CH" sz="1200" b="1" dirty="0" err="1">
+                <a:solidFill>
+                  <a:schemeClr val="tx1"/>
+                </a:solidFill>
+                <a:latin typeface="Arial" panose="020B0604020202020204" pitchFamily="34" charset="0"/>
+                <a:cs typeface="Arial" panose="020B0604020202020204" pitchFamily="34" charset="0"/>
+              </a:rPr>
+              <a:t>files</a:t>
+            </a:r>
+            <a:r>
+              <a:rPr lang="de-CH" sz="1200" b="1" dirty="0">
+                <a:solidFill>
+                  <a:schemeClr val="tx1"/>
+                </a:solidFill>
+                <a:latin typeface="Arial" panose="020B0604020202020204" pitchFamily="34" charset="0"/>
+                <a:cs typeface="Arial" panose="020B0604020202020204" pitchFamily="34" charset="0"/>
+              </a:rPr>
+              <a:t> like </a:t>
+            </a:r>
+            <a:r>
+              <a:rPr lang="de-CH" sz="1200" b="1" dirty="0" err="1">
+                <a:solidFill>
+                  <a:schemeClr val="tx1"/>
+                </a:solidFill>
+                <a:latin typeface="Arial" panose="020B0604020202020204" pitchFamily="34" charset="0"/>
+                <a:cs typeface="Arial" panose="020B0604020202020204" pitchFamily="34" charset="0"/>
+              </a:rPr>
+              <a:t>names</a:t>
+            </a:r>
+            <a:r>
+              <a:rPr lang="de-CH" sz="1200" b="1" dirty="0">
+                <a:solidFill>
+                  <a:schemeClr val="tx1"/>
+                </a:solidFill>
+                <a:latin typeface="Arial" panose="020B0604020202020204" pitchFamily="34" charset="0"/>
+                <a:cs typeface="Arial" panose="020B0604020202020204" pitchFamily="34" charset="0"/>
+              </a:rPr>
+              <a:t>, </a:t>
+            </a:r>
+            <a:r>
+              <a:rPr lang="de-CH" sz="1200" b="1" dirty="0" err="1">
+                <a:solidFill>
+                  <a:schemeClr val="tx1"/>
+                </a:solidFill>
+                <a:latin typeface="Arial" panose="020B0604020202020204" pitchFamily="34" charset="0"/>
+                <a:cs typeface="Arial" panose="020B0604020202020204" pitchFamily="34" charset="0"/>
+              </a:rPr>
+              <a:t>bandnames</a:t>
+            </a:r>
+            <a:r>
+              <a:rPr lang="de-CH" sz="1200" b="1" dirty="0">
+                <a:solidFill>
+                  <a:schemeClr val="tx1"/>
+                </a:solidFill>
+                <a:latin typeface="Arial" panose="020B0604020202020204" pitchFamily="34" charset="0"/>
+                <a:cs typeface="Arial" panose="020B0604020202020204" pitchFamily="34" charset="0"/>
+              </a:rPr>
+              <a:t>, </a:t>
+            </a:r>
+            <a:r>
+              <a:rPr lang="de-CH" sz="1200" b="1" dirty="0" err="1">
+                <a:solidFill>
+                  <a:schemeClr val="tx1"/>
+                </a:solidFill>
+                <a:latin typeface="Arial" panose="020B0604020202020204" pitchFamily="34" charset="0"/>
+                <a:cs typeface="Arial" panose="020B0604020202020204" pitchFamily="34" charset="0"/>
+              </a:rPr>
+              <a:t>emails</a:t>
+            </a:r>
+            <a:r>
+              <a:rPr lang="de-CH" sz="1200" b="1" dirty="0">
+                <a:solidFill>
+                  <a:schemeClr val="tx1"/>
+                </a:solidFill>
+                <a:latin typeface="Arial" panose="020B0604020202020204" pitchFamily="34" charset="0"/>
+                <a:cs typeface="Arial" panose="020B0604020202020204" pitchFamily="34" charset="0"/>
+              </a:rPr>
+              <a:t> and </a:t>
+            </a:r>
+            <a:r>
+              <a:rPr lang="de-CH" sz="1200" b="1" dirty="0" err="1">
+                <a:solidFill>
+                  <a:schemeClr val="tx1"/>
+                </a:solidFill>
+                <a:latin typeface="Arial" panose="020B0604020202020204" pitchFamily="34" charset="0"/>
+                <a:cs typeface="Arial" panose="020B0604020202020204" pitchFamily="34" charset="0"/>
+              </a:rPr>
+              <a:t>reserved</a:t>
+            </a:r>
+            <a:r>
+              <a:rPr lang="de-CH" sz="1200" b="1" dirty="0">
+                <a:solidFill>
+                  <a:schemeClr val="tx1"/>
+                </a:solidFill>
+                <a:latin typeface="Arial" panose="020B0604020202020204" pitchFamily="34" charset="0"/>
+                <a:cs typeface="Arial" panose="020B0604020202020204" pitchFamily="34" charset="0"/>
+              </a:rPr>
+              <a:t> </a:t>
+            </a:r>
+            <a:r>
+              <a:rPr lang="de-CH" sz="1200" b="1" dirty="0" err="1">
+                <a:solidFill>
+                  <a:schemeClr val="tx1"/>
+                </a:solidFill>
+                <a:latin typeface="Arial" panose="020B0604020202020204" pitchFamily="34" charset="0"/>
+                <a:cs typeface="Arial" panose="020B0604020202020204" pitchFamily="34" charset="0"/>
+              </a:rPr>
+              <a:t>seats</a:t>
+            </a:r>
+            <a:r>
+              <a:rPr lang="de-CH" sz="1200" b="1" dirty="0">
+                <a:solidFill>
+                  <a:schemeClr val="tx1"/>
+                </a:solidFill>
+                <a:latin typeface="Arial" panose="020B0604020202020204" pitchFamily="34" charset="0"/>
+                <a:cs typeface="Arial" panose="020B0604020202020204" pitchFamily="34" charset="0"/>
+              </a:rPr>
+              <a:t>, date </a:t>
+            </a:r>
+            <a:r>
+              <a:rPr lang="de-CH" sz="1200" b="1" dirty="0" err="1">
+                <a:solidFill>
+                  <a:schemeClr val="tx1"/>
+                </a:solidFill>
+                <a:latin typeface="Arial" panose="020B0604020202020204" pitchFamily="34" charset="0"/>
+                <a:cs typeface="Arial" panose="020B0604020202020204" pitchFamily="34" charset="0"/>
+              </a:rPr>
+              <a:t>of</a:t>
+            </a:r>
+            <a:r>
+              <a:rPr lang="de-CH" sz="1200" b="1" dirty="0">
+                <a:solidFill>
+                  <a:schemeClr val="tx1"/>
+                </a:solidFill>
+                <a:latin typeface="Arial" panose="020B0604020202020204" pitchFamily="34" charset="0"/>
+                <a:cs typeface="Arial" panose="020B0604020202020204" pitchFamily="34" charset="0"/>
+              </a:rPr>
+              <a:t> </a:t>
+            </a:r>
+            <a:r>
+              <a:rPr lang="de-CH" sz="1200" b="1" dirty="0" err="1">
+                <a:solidFill>
+                  <a:schemeClr val="tx1"/>
+                </a:solidFill>
+                <a:latin typeface="Arial" panose="020B0604020202020204" pitchFamily="34" charset="0"/>
+                <a:cs typeface="Arial" panose="020B0604020202020204" pitchFamily="34" charset="0"/>
+              </a:rPr>
+              <a:t>concert</a:t>
+            </a:r>
+            <a:r>
+              <a:rPr lang="de-CH" sz="1200" b="1" dirty="0">
+                <a:solidFill>
+                  <a:schemeClr val="tx1"/>
+                </a:solidFill>
+                <a:latin typeface="Arial" panose="020B0604020202020204" pitchFamily="34" charset="0"/>
+                <a:cs typeface="Arial" panose="020B0604020202020204" pitchFamily="34" charset="0"/>
+              </a:rPr>
+              <a:t> </a:t>
+            </a:r>
+            <a:r>
+              <a:rPr lang="de-CH" sz="1200" b="1" dirty="0" err="1">
+                <a:solidFill>
+                  <a:schemeClr val="tx1"/>
+                </a:solidFill>
+                <a:latin typeface="Arial" panose="020B0604020202020204" pitchFamily="34" charset="0"/>
+                <a:cs typeface="Arial" panose="020B0604020202020204" pitchFamily="34" charset="0"/>
+              </a:rPr>
+              <a:t>for</a:t>
+            </a:r>
+            <a:r>
+              <a:rPr lang="de-CH" sz="1200" b="1" dirty="0">
+                <a:solidFill>
+                  <a:schemeClr val="tx1"/>
+                </a:solidFill>
+                <a:latin typeface="Arial" panose="020B0604020202020204" pitchFamily="34" charset="0"/>
+                <a:cs typeface="Arial" panose="020B0604020202020204" pitchFamily="34" charset="0"/>
+              </a:rPr>
+              <a:t> </a:t>
+            </a:r>
+            <a:r>
+              <a:rPr lang="de-CH" sz="1200" b="1" dirty="0" err="1">
+                <a:solidFill>
+                  <a:schemeClr val="tx1"/>
+                </a:solidFill>
+                <a:latin typeface="Arial" panose="020B0604020202020204" pitchFamily="34" charset="0"/>
+                <a:cs typeface="Arial" panose="020B0604020202020204" pitchFamily="34" charset="0"/>
+              </a:rPr>
+              <a:t>one</a:t>
+            </a:r>
+            <a:r>
+              <a:rPr lang="de-CH" sz="1200" b="1" dirty="0">
+                <a:solidFill>
+                  <a:schemeClr val="tx1"/>
+                </a:solidFill>
+                <a:latin typeface="Arial" panose="020B0604020202020204" pitchFamily="34" charset="0"/>
+                <a:cs typeface="Arial" panose="020B0604020202020204" pitchFamily="34" charset="0"/>
+              </a:rPr>
+              <a:t> (1) </a:t>
+            </a:r>
+            <a:r>
+              <a:rPr lang="de-CH" sz="1200" b="1" dirty="0" err="1">
+                <a:solidFill>
+                  <a:schemeClr val="tx1"/>
+                </a:solidFill>
+                <a:latin typeface="Arial" panose="020B0604020202020204" pitchFamily="34" charset="0"/>
+                <a:cs typeface="Arial" panose="020B0604020202020204" pitchFamily="34" charset="0"/>
+              </a:rPr>
+              <a:t>concert</a:t>
+            </a:r>
+            <a:r>
+              <a:rPr lang="de-CH" sz="1400" dirty="0">
+                <a:solidFill>
+                  <a:schemeClr val="tx1"/>
+                </a:solidFill>
+                <a:latin typeface="Arial" panose="020B0604020202020204" pitchFamily="34" charset="0"/>
+                <a:cs typeface="Arial" panose="020B0604020202020204" pitchFamily="34" charset="0"/>
+              </a:rPr>
+              <a:t>. </a:t>
+            </a:r>
+          </a:p>
+        </p:txBody>
+      </p:sp>
+      <p:sp>
+        <p:nvSpPr>
+          <p:cNvPr id="4" name="Rechteck 3">
+            <a:extLst>
+              <a:ext uri="{FF2B5EF4-FFF2-40B4-BE49-F238E27FC236}">
+                <a16:creationId xmlns:a16="http://schemas.microsoft.com/office/drawing/2014/main" id="{BB6AD6C6-7A48-4388-7FD1-57E9AFA2B124}"/>
+              </a:ext>
+            </a:extLst>
+          </p:cNvPr>
+          <p:cNvSpPr/>
+          <p:nvPr/>
+        </p:nvSpPr>
+        <p:spPr>
+          <a:xfrm>
+            <a:off x="4192320" y="1940484"/>
+            <a:ext cx="4681516" cy="3847253"/>
+          </a:xfrm>
+          <a:prstGeom prst="rect">
+            <a:avLst/>
+          </a:prstGeom>
+          <a:noFill/>
+          <a:ln>
+            <a:solidFill>
+              <a:schemeClr val="tx1"/>
+            </a:solidFill>
+          </a:ln>
+        </p:spPr>
+        <p:style>
+          <a:lnRef idx="2">
+            <a:schemeClr val="accent1">
+              <a:shade val="50000"/>
+            </a:schemeClr>
+          </a:lnRef>
+          <a:fillRef idx="1">
+            <a:schemeClr val="accent1"/>
+          </a:fillRef>
+          <a:effectRef idx="0">
+            <a:schemeClr val="accent1"/>
+          </a:effectRef>
+          <a:fontRef idx="minor">
+            <a:schemeClr val="lt1"/>
+          </a:fontRef>
+        </p:style>
+        <p:txBody>
+          <a:bodyPr rtlCol="0" anchor="ctr"/>
+          <a:lstStyle/>
+          <a:p>
+            <a:r>
+              <a:rPr lang="de-CH" sz="1200" b="1" dirty="0" err="1">
+                <a:solidFill>
+                  <a:schemeClr val="tx1"/>
+                </a:solidFill>
+                <a:latin typeface="Arial" panose="020B0604020202020204" pitchFamily="34" charset="0"/>
+                <a:cs typeface="Arial" panose="020B0604020202020204" pitchFamily="34" charset="0"/>
+              </a:rPr>
+              <a:t>setReservationAndSeatDataArray</a:t>
+            </a:r>
+            <a:r>
+              <a:rPr lang="de-CH" sz="1200" b="1" dirty="0">
+                <a:solidFill>
+                  <a:schemeClr val="tx1"/>
+                </a:solidFill>
+                <a:latin typeface="Arial" panose="020B0604020202020204" pitchFamily="34" charset="0"/>
+                <a:cs typeface="Arial" panose="020B0604020202020204" pitchFamily="34" charset="0"/>
+              </a:rPr>
+              <a:t>()</a:t>
+            </a:r>
+          </a:p>
+          <a:p>
+            <a:r>
+              <a:rPr lang="de-CH" sz="1200" b="1" i="1" dirty="0" err="1">
+                <a:solidFill>
+                  <a:schemeClr val="tx1"/>
+                </a:solidFill>
+                <a:latin typeface="Arial" panose="020B0604020202020204" pitchFamily="34" charset="0"/>
+                <a:cs typeface="Arial" panose="020B0604020202020204" pitchFamily="34" charset="0"/>
+              </a:rPr>
+              <a:t>Get</a:t>
+            </a:r>
+            <a:r>
+              <a:rPr lang="de-CH" sz="1200" b="1" i="1" dirty="0">
+                <a:solidFill>
+                  <a:schemeClr val="tx1"/>
+                </a:solidFill>
+                <a:latin typeface="Arial" panose="020B0604020202020204" pitchFamily="34" charset="0"/>
+                <a:cs typeface="Arial" panose="020B0604020202020204" pitchFamily="34" charset="0"/>
+              </a:rPr>
+              <a:t> and </a:t>
+            </a:r>
+            <a:r>
+              <a:rPr lang="de-CH" sz="1200" b="1" i="1" dirty="0" err="1">
+                <a:solidFill>
+                  <a:schemeClr val="tx1"/>
+                </a:solidFill>
+                <a:latin typeface="Arial" panose="020B0604020202020204" pitchFamily="34" charset="0"/>
+                <a:cs typeface="Arial" panose="020B0604020202020204" pitchFamily="34" charset="0"/>
+              </a:rPr>
+              <a:t>set</a:t>
+            </a:r>
+            <a:r>
+              <a:rPr lang="de-CH" sz="1200" b="1" i="1" dirty="0">
+                <a:solidFill>
+                  <a:schemeClr val="tx1"/>
+                </a:solidFill>
+                <a:latin typeface="Arial" panose="020B0604020202020204" pitchFamily="34" charset="0"/>
+                <a:cs typeface="Arial" panose="020B0604020202020204" pitchFamily="34" charset="0"/>
+              </a:rPr>
+              <a:t> all </a:t>
+            </a:r>
+            <a:r>
+              <a:rPr lang="de-CH" sz="1200" b="1" i="1" dirty="0" err="1">
+                <a:solidFill>
+                  <a:schemeClr val="tx1"/>
+                </a:solidFill>
+                <a:latin typeface="Arial" panose="020B0604020202020204" pitchFamily="34" charset="0"/>
+                <a:cs typeface="Arial" panose="020B0604020202020204" pitchFamily="34" charset="0"/>
+              </a:rPr>
+              <a:t>reservation</a:t>
+            </a:r>
+            <a:r>
+              <a:rPr lang="de-CH" sz="1200" b="1" i="1" dirty="0">
+                <a:solidFill>
+                  <a:schemeClr val="tx1"/>
+                </a:solidFill>
+                <a:latin typeface="Arial" panose="020B0604020202020204" pitchFamily="34" charset="0"/>
+                <a:cs typeface="Arial" panose="020B0604020202020204" pitchFamily="34" charset="0"/>
+              </a:rPr>
+              <a:t> </a:t>
+            </a:r>
+            <a:r>
+              <a:rPr lang="de-CH" sz="1200" b="1" i="1" dirty="0" err="1">
+                <a:solidFill>
+                  <a:schemeClr val="tx1"/>
+                </a:solidFill>
+                <a:latin typeface="Arial" panose="020B0604020202020204" pitchFamily="34" charset="0"/>
+                <a:cs typeface="Arial" panose="020B0604020202020204" pitchFamily="34" charset="0"/>
+              </a:rPr>
+              <a:t>data</a:t>
+            </a:r>
+            <a:r>
+              <a:rPr lang="de-CH" sz="1200" b="1" i="1" dirty="0">
+                <a:solidFill>
+                  <a:schemeClr val="tx1"/>
+                </a:solidFill>
+                <a:latin typeface="Arial" panose="020B0604020202020204" pitchFamily="34" charset="0"/>
+                <a:cs typeface="Arial" panose="020B0604020202020204" pitchFamily="34" charset="0"/>
+              </a:rPr>
+              <a:t> </a:t>
+            </a:r>
+            <a:r>
+              <a:rPr lang="de-CH" sz="1200" b="1" i="1" dirty="0" err="1">
+                <a:solidFill>
+                  <a:schemeClr val="tx1"/>
+                </a:solidFill>
+                <a:latin typeface="Arial" panose="020B0604020202020204" pitchFamily="34" charset="0"/>
+                <a:cs typeface="Arial" panose="020B0604020202020204" pitchFamily="34" charset="0"/>
+              </a:rPr>
+              <a:t>from</a:t>
+            </a:r>
+            <a:r>
+              <a:rPr lang="de-CH" sz="1200" b="1" i="1" dirty="0">
+                <a:solidFill>
+                  <a:schemeClr val="tx1"/>
+                </a:solidFill>
+                <a:latin typeface="Arial" panose="020B0604020202020204" pitchFamily="34" charset="0"/>
+                <a:cs typeface="Arial" panose="020B0604020202020204" pitchFamily="34" charset="0"/>
+              </a:rPr>
+              <a:t> </a:t>
+            </a:r>
+            <a:r>
+              <a:rPr lang="de-CH" sz="1200" b="1" i="1" dirty="0" err="1">
+                <a:solidFill>
+                  <a:schemeClr val="tx1"/>
+                </a:solidFill>
+                <a:latin typeface="Arial" panose="020B0604020202020204" pitchFamily="34" charset="0"/>
+                <a:cs typeface="Arial" panose="020B0604020202020204" pitchFamily="34" charset="0"/>
+              </a:rPr>
+              <a:t>the</a:t>
+            </a:r>
+            <a:r>
+              <a:rPr lang="de-CH" sz="1200" b="1" i="1" dirty="0">
+                <a:solidFill>
+                  <a:schemeClr val="tx1"/>
+                </a:solidFill>
+                <a:latin typeface="Arial" panose="020B0604020202020204" pitchFamily="34" charset="0"/>
+                <a:cs typeface="Arial" panose="020B0604020202020204" pitchFamily="34" charset="0"/>
+              </a:rPr>
+              <a:t> XML </a:t>
+            </a:r>
+            <a:r>
+              <a:rPr lang="de-CH" sz="1200" b="1" i="1" dirty="0" err="1">
+                <a:solidFill>
+                  <a:schemeClr val="tx1"/>
+                </a:solidFill>
+                <a:latin typeface="Arial" panose="020B0604020202020204" pitchFamily="34" charset="0"/>
+                <a:cs typeface="Arial" panose="020B0604020202020204" pitchFamily="34" charset="0"/>
+              </a:rPr>
+              <a:t>object</a:t>
+            </a:r>
+            <a:r>
+              <a:rPr lang="de-CH" sz="1200" b="1" i="1" dirty="0">
+                <a:solidFill>
+                  <a:schemeClr val="tx1"/>
+                </a:solidFill>
+                <a:latin typeface="Arial" panose="020B0604020202020204" pitchFamily="34" charset="0"/>
+                <a:cs typeface="Arial" panose="020B0604020202020204" pitchFamily="34" charset="0"/>
+              </a:rPr>
+              <a:t> </a:t>
+            </a:r>
+            <a:r>
+              <a:rPr lang="de-CH" sz="1200" b="1" i="1" dirty="0" err="1">
+                <a:solidFill>
+                  <a:schemeClr val="tx1"/>
+                </a:solidFill>
+                <a:latin typeface="Arial" panose="020B0604020202020204" pitchFamily="34" charset="0"/>
+                <a:cs typeface="Arial" panose="020B0604020202020204" pitchFamily="34" charset="0"/>
+              </a:rPr>
+              <a:t>g_reservation_concert_xml</a:t>
+            </a:r>
+            <a:endParaRPr lang="de-CH" sz="1200" b="1" i="1" dirty="0">
+              <a:solidFill>
+                <a:schemeClr val="tx1"/>
+              </a:solidFill>
+              <a:latin typeface="Arial" panose="020B0604020202020204" pitchFamily="34" charset="0"/>
+              <a:cs typeface="Arial" panose="020B0604020202020204" pitchFamily="34" charset="0"/>
+            </a:endParaRPr>
+          </a:p>
+          <a:p>
+            <a:endParaRPr lang="de-CH" sz="1200" b="1" dirty="0">
+              <a:solidFill>
+                <a:schemeClr val="tx1"/>
+              </a:solidFill>
+              <a:latin typeface="Arial" panose="020B0604020202020204" pitchFamily="34" charset="0"/>
+              <a:cs typeface="Arial" panose="020B0604020202020204" pitchFamily="34" charset="0"/>
+            </a:endParaRPr>
+          </a:p>
+          <a:p>
+            <a:r>
+              <a:rPr lang="de-CH" sz="1200" b="1" dirty="0" err="1">
+                <a:solidFill>
+                  <a:schemeClr val="tx1"/>
+                </a:solidFill>
+                <a:latin typeface="Arial" panose="020B0604020202020204" pitchFamily="34" charset="0"/>
+                <a:cs typeface="Arial" panose="020B0604020202020204" pitchFamily="34" charset="0"/>
+              </a:rPr>
+              <a:t>setArrays</a:t>
+            </a:r>
+            <a:r>
+              <a:rPr lang="de-CH" sz="1200" b="1" dirty="0">
+                <a:solidFill>
+                  <a:schemeClr val="tx1"/>
+                </a:solidFill>
+                <a:latin typeface="Arial" panose="020B0604020202020204" pitchFamily="34" charset="0"/>
+                <a:cs typeface="Arial" panose="020B0604020202020204" pitchFamily="34" charset="0"/>
+              </a:rPr>
+              <a:t>()</a:t>
+            </a:r>
+          </a:p>
+          <a:p>
+            <a:r>
+              <a:rPr lang="de-CH" sz="1200" b="1" i="1" dirty="0">
+                <a:solidFill>
+                  <a:schemeClr val="tx1"/>
+                </a:solidFill>
+                <a:latin typeface="Arial" panose="020B0604020202020204" pitchFamily="34" charset="0"/>
+                <a:cs typeface="Arial" panose="020B0604020202020204" pitchFamily="34" charset="0"/>
+              </a:rPr>
+              <a:t>Set all </a:t>
+            </a:r>
+            <a:r>
+              <a:rPr lang="de-CH" sz="1200" b="1" i="1" dirty="0" err="1">
+                <a:solidFill>
+                  <a:schemeClr val="tx1"/>
+                </a:solidFill>
+                <a:latin typeface="Arial" panose="020B0604020202020204" pitchFamily="34" charset="0"/>
+                <a:cs typeface="Arial" panose="020B0604020202020204" pitchFamily="34" charset="0"/>
+              </a:rPr>
+              <a:t>the</a:t>
+            </a:r>
+            <a:r>
+              <a:rPr lang="de-CH" sz="1200" b="1" i="1" dirty="0">
+                <a:solidFill>
+                  <a:schemeClr val="tx1"/>
+                </a:solidFill>
+                <a:latin typeface="Arial" panose="020B0604020202020204" pitchFamily="34" charset="0"/>
+                <a:cs typeface="Arial" panose="020B0604020202020204" pitchFamily="34" charset="0"/>
+              </a:rPr>
+              <a:t> alternative </a:t>
+            </a:r>
+            <a:r>
+              <a:rPr lang="de-CH" sz="1200" b="1" i="1" dirty="0" err="1">
+                <a:solidFill>
+                  <a:schemeClr val="tx1"/>
+                </a:solidFill>
+                <a:latin typeface="Arial" panose="020B0604020202020204" pitchFamily="34" charset="0"/>
+                <a:cs typeface="Arial" panose="020B0604020202020204" pitchFamily="34" charset="0"/>
+              </a:rPr>
+              <a:t>arrays</a:t>
+            </a:r>
+            <a:r>
+              <a:rPr lang="de-CH" sz="1200" b="1" i="1" dirty="0">
+                <a:solidFill>
+                  <a:schemeClr val="tx1"/>
+                </a:solidFill>
+                <a:latin typeface="Arial" panose="020B0604020202020204" pitchFamily="34" charset="0"/>
+                <a:cs typeface="Arial" panose="020B0604020202020204" pitchFamily="34" charset="0"/>
+              </a:rPr>
+              <a:t> </a:t>
+            </a:r>
+            <a:r>
+              <a:rPr lang="de-CH" sz="1200" b="1" i="1" dirty="0" err="1">
+                <a:solidFill>
+                  <a:schemeClr val="tx1"/>
+                </a:solidFill>
+                <a:latin typeface="Arial" panose="020B0604020202020204" pitchFamily="34" charset="0"/>
+                <a:cs typeface="Arial" panose="020B0604020202020204" pitchFamily="34" charset="0"/>
+              </a:rPr>
+              <a:t>that</a:t>
+            </a:r>
+            <a:r>
+              <a:rPr lang="de-CH" sz="1200" b="1" i="1" dirty="0">
+                <a:solidFill>
+                  <a:schemeClr val="tx1"/>
+                </a:solidFill>
+                <a:latin typeface="Arial" panose="020B0604020202020204" pitchFamily="34" charset="0"/>
+                <a:cs typeface="Arial" panose="020B0604020202020204" pitchFamily="34" charset="0"/>
+              </a:rPr>
+              <a:t> </a:t>
+            </a:r>
+            <a:r>
+              <a:rPr lang="de-CH" sz="1200" b="1" i="1" dirty="0" err="1">
+                <a:solidFill>
+                  <a:schemeClr val="tx1"/>
+                </a:solidFill>
+                <a:latin typeface="Arial" panose="020B0604020202020204" pitchFamily="34" charset="0"/>
+                <a:cs typeface="Arial" panose="020B0604020202020204" pitchFamily="34" charset="0"/>
+              </a:rPr>
+              <a:t>can</a:t>
+            </a:r>
+            <a:r>
+              <a:rPr lang="de-CH" sz="1200" b="1" i="1" dirty="0">
+                <a:solidFill>
+                  <a:schemeClr val="tx1"/>
+                </a:solidFill>
+                <a:latin typeface="Arial" panose="020B0604020202020204" pitchFamily="34" charset="0"/>
+                <a:cs typeface="Arial" panose="020B0604020202020204" pitchFamily="34" charset="0"/>
+              </a:rPr>
+              <a:t> </a:t>
+            </a:r>
+            <a:r>
+              <a:rPr lang="de-CH" sz="1200" b="1" i="1" dirty="0" err="1">
+                <a:solidFill>
+                  <a:schemeClr val="tx1"/>
+                </a:solidFill>
+                <a:latin typeface="Arial" panose="020B0604020202020204" pitchFamily="34" charset="0"/>
+                <a:cs typeface="Arial" panose="020B0604020202020204" pitchFamily="34" charset="0"/>
+              </a:rPr>
+              <a:t>be</a:t>
+            </a:r>
+            <a:r>
+              <a:rPr lang="de-CH" sz="1200" b="1" i="1" dirty="0">
+                <a:solidFill>
+                  <a:schemeClr val="tx1"/>
+                </a:solidFill>
+                <a:latin typeface="Arial" panose="020B0604020202020204" pitchFamily="34" charset="0"/>
+                <a:cs typeface="Arial" panose="020B0604020202020204" pitchFamily="34" charset="0"/>
+              </a:rPr>
+              <a:t> </a:t>
+            </a:r>
+            <a:r>
+              <a:rPr lang="de-CH" sz="1200" b="1" i="1" dirty="0" err="1">
+                <a:solidFill>
+                  <a:schemeClr val="tx1"/>
+                </a:solidFill>
+                <a:latin typeface="Arial" panose="020B0604020202020204" pitchFamily="34" charset="0"/>
+                <a:cs typeface="Arial" panose="020B0604020202020204" pitchFamily="34" charset="0"/>
+              </a:rPr>
+              <a:t>used</a:t>
+            </a:r>
+            <a:r>
+              <a:rPr lang="de-CH" sz="1200" b="1" i="1" dirty="0">
+                <a:solidFill>
+                  <a:schemeClr val="tx1"/>
+                </a:solidFill>
+                <a:latin typeface="Arial" panose="020B0604020202020204" pitchFamily="34" charset="0"/>
+                <a:cs typeface="Arial" panose="020B0604020202020204" pitchFamily="34" charset="0"/>
+              </a:rPr>
+              <a:t> </a:t>
+            </a:r>
+            <a:r>
+              <a:rPr lang="de-CH" sz="1200" b="1" i="1" dirty="0" err="1">
+                <a:solidFill>
+                  <a:schemeClr val="tx1"/>
+                </a:solidFill>
+                <a:latin typeface="Arial" panose="020B0604020202020204" pitchFamily="34" charset="0"/>
+                <a:cs typeface="Arial" panose="020B0604020202020204" pitchFamily="34" charset="0"/>
+              </a:rPr>
+              <a:t>as</a:t>
+            </a:r>
+            <a:r>
+              <a:rPr lang="de-CH" sz="1200" b="1" i="1" dirty="0">
+                <a:solidFill>
+                  <a:schemeClr val="tx1"/>
+                </a:solidFill>
+                <a:latin typeface="Arial" panose="020B0604020202020204" pitchFamily="34" charset="0"/>
+                <a:cs typeface="Arial" panose="020B0604020202020204" pitchFamily="34" charset="0"/>
+              </a:rPr>
+              <a:t> </a:t>
+            </a:r>
+            <a:r>
+              <a:rPr lang="de-CH" sz="1200" b="1" i="1" dirty="0" err="1">
+                <a:solidFill>
+                  <a:schemeClr val="tx1"/>
+                </a:solidFill>
+                <a:latin typeface="Arial" panose="020B0604020202020204" pitchFamily="34" charset="0"/>
+                <a:cs typeface="Arial" panose="020B0604020202020204" pitchFamily="34" charset="0"/>
+              </a:rPr>
+              <a:t>input</a:t>
+            </a:r>
+            <a:r>
+              <a:rPr lang="de-CH" sz="1200" b="1" i="1" dirty="0">
+                <a:solidFill>
+                  <a:schemeClr val="tx1"/>
+                </a:solidFill>
+                <a:latin typeface="Arial" panose="020B0604020202020204" pitchFamily="34" charset="0"/>
+                <a:cs typeface="Arial" panose="020B0604020202020204" pitchFamily="34" charset="0"/>
+              </a:rPr>
+              <a:t> </a:t>
+            </a:r>
+            <a:r>
+              <a:rPr lang="de-CH" sz="1200" b="1" i="1" dirty="0" err="1">
+                <a:solidFill>
+                  <a:schemeClr val="tx1"/>
+                </a:solidFill>
+                <a:latin typeface="Arial" panose="020B0604020202020204" pitchFamily="34" charset="0"/>
+                <a:cs typeface="Arial" panose="020B0604020202020204" pitchFamily="34" charset="0"/>
+              </a:rPr>
+              <a:t>data</a:t>
+            </a:r>
+            <a:r>
+              <a:rPr lang="de-CH" sz="1200" b="1" i="1" dirty="0">
+                <a:solidFill>
+                  <a:schemeClr val="tx1"/>
+                </a:solidFill>
+                <a:latin typeface="Arial" panose="020B0604020202020204" pitchFamily="34" charset="0"/>
+                <a:cs typeface="Arial" panose="020B0604020202020204" pitchFamily="34" charset="0"/>
+              </a:rPr>
+              <a:t> </a:t>
+            </a:r>
+            <a:r>
+              <a:rPr lang="de-CH" sz="1200" b="1" i="1" dirty="0" err="1">
+                <a:solidFill>
+                  <a:schemeClr val="tx1"/>
+                </a:solidFill>
+                <a:latin typeface="Arial" panose="020B0604020202020204" pitchFamily="34" charset="0"/>
+                <a:cs typeface="Arial" panose="020B0604020202020204" pitchFamily="34" charset="0"/>
+              </a:rPr>
+              <a:t>to</a:t>
+            </a:r>
+            <a:r>
+              <a:rPr lang="de-CH" sz="1200" b="1" i="1" dirty="0">
+                <a:solidFill>
+                  <a:schemeClr val="tx1"/>
+                </a:solidFill>
+                <a:latin typeface="Arial" panose="020B0604020202020204" pitchFamily="34" charset="0"/>
+                <a:cs typeface="Arial" panose="020B0604020202020204" pitchFamily="34" charset="0"/>
+              </a:rPr>
+              <a:t> an </a:t>
+            </a:r>
+            <a:r>
+              <a:rPr lang="de-CH" sz="1200" b="1" i="1" dirty="0" err="1">
+                <a:solidFill>
+                  <a:schemeClr val="tx1"/>
+                </a:solidFill>
+                <a:latin typeface="Arial" panose="020B0604020202020204" pitchFamily="34" charset="0"/>
+                <a:cs typeface="Arial" panose="020B0604020202020204" pitchFamily="34" charset="0"/>
+              </a:rPr>
+              <a:t>instance</a:t>
+            </a:r>
+            <a:r>
+              <a:rPr lang="de-CH" sz="1200" b="1" i="1" dirty="0">
+                <a:solidFill>
+                  <a:schemeClr val="tx1"/>
+                </a:solidFill>
+                <a:latin typeface="Arial" panose="020B0604020202020204" pitchFamily="34" charset="0"/>
+                <a:cs typeface="Arial" panose="020B0604020202020204" pitchFamily="34" charset="0"/>
+              </a:rPr>
+              <a:t> </a:t>
+            </a:r>
+            <a:r>
+              <a:rPr lang="de-CH" sz="1200" b="1" i="1" dirty="0" err="1">
+                <a:solidFill>
+                  <a:schemeClr val="tx1"/>
+                </a:solidFill>
+                <a:latin typeface="Arial" panose="020B0604020202020204" pitchFamily="34" charset="0"/>
+                <a:cs typeface="Arial" panose="020B0604020202020204" pitchFamily="34" charset="0"/>
+              </a:rPr>
+              <a:t>of</a:t>
+            </a:r>
+            <a:r>
+              <a:rPr lang="de-CH" sz="1200" b="1" i="1" dirty="0">
+                <a:solidFill>
+                  <a:schemeClr val="tx1"/>
+                </a:solidFill>
+                <a:latin typeface="Arial" panose="020B0604020202020204" pitchFamily="34" charset="0"/>
+                <a:cs typeface="Arial" panose="020B0604020202020204" pitchFamily="34" charset="0"/>
+              </a:rPr>
+              <a:t> </a:t>
+            </a:r>
+            <a:r>
+              <a:rPr lang="de-CH" sz="1200" b="1" i="1" dirty="0" err="1">
+                <a:solidFill>
+                  <a:schemeClr val="tx1"/>
+                </a:solidFill>
+                <a:latin typeface="Arial" panose="020B0604020202020204" pitchFamily="34" charset="0"/>
+                <a:cs typeface="Arial" panose="020B0604020202020204" pitchFamily="34" charset="0"/>
+              </a:rPr>
+              <a:t>the</a:t>
+            </a:r>
+            <a:r>
+              <a:rPr lang="de-CH" sz="1200" b="1" i="1" dirty="0">
+                <a:solidFill>
+                  <a:schemeClr val="tx1"/>
+                </a:solidFill>
+                <a:latin typeface="Arial" panose="020B0604020202020204" pitchFamily="34" charset="0"/>
+                <a:cs typeface="Arial" panose="020B0604020202020204" pitchFamily="34" charset="0"/>
+              </a:rPr>
+              <a:t> </a:t>
+            </a:r>
+            <a:r>
+              <a:rPr lang="de-CH" sz="1200" b="1" i="1" dirty="0" err="1">
+                <a:solidFill>
+                  <a:schemeClr val="tx1"/>
+                </a:solidFill>
+                <a:latin typeface="Arial" panose="020B0604020202020204" pitchFamily="34" charset="0"/>
+                <a:cs typeface="Arial" panose="020B0604020202020204" pitchFamily="34" charset="0"/>
+              </a:rPr>
+              <a:t>class</a:t>
+            </a:r>
+            <a:r>
+              <a:rPr lang="de-CH" sz="1200" b="1" i="1" dirty="0">
+                <a:solidFill>
+                  <a:schemeClr val="tx1"/>
+                </a:solidFill>
+                <a:latin typeface="Arial" panose="020B0604020202020204" pitchFamily="34" charset="0"/>
+                <a:cs typeface="Arial" panose="020B0604020202020204" pitchFamily="34" charset="0"/>
+              </a:rPr>
+              <a:t> </a:t>
+            </a:r>
+            <a:r>
+              <a:rPr lang="de-CH" sz="1200" b="1" i="1" dirty="0" err="1">
+                <a:solidFill>
+                  <a:schemeClr val="tx1"/>
+                </a:solidFill>
+                <a:latin typeface="Arial" panose="020B0604020202020204" pitchFamily="34" charset="0"/>
+                <a:cs typeface="Arial" panose="020B0604020202020204" pitchFamily="34" charset="0"/>
+              </a:rPr>
+              <a:t>HtmlTableCards</a:t>
+            </a:r>
+            <a:endParaRPr lang="de-CH" sz="1200" b="1" i="1" dirty="0">
+              <a:solidFill>
+                <a:schemeClr val="tx1"/>
+              </a:solidFill>
+              <a:latin typeface="Arial" panose="020B0604020202020204" pitchFamily="34" charset="0"/>
+              <a:cs typeface="Arial" panose="020B0604020202020204" pitchFamily="34" charset="0"/>
+            </a:endParaRPr>
+          </a:p>
+          <a:p>
+            <a:endParaRPr lang="de-CH" sz="1200" b="1" dirty="0">
+              <a:solidFill>
+                <a:schemeClr val="tx1"/>
+              </a:solidFill>
+              <a:latin typeface="Arial" panose="020B0604020202020204" pitchFamily="34" charset="0"/>
+              <a:cs typeface="Arial" panose="020B0604020202020204" pitchFamily="34" charset="0"/>
+            </a:endParaRPr>
+          </a:p>
+          <a:p>
+            <a:r>
+              <a:rPr lang="de-CH" sz="1200" b="1" dirty="0" err="1">
+                <a:solidFill>
+                  <a:schemeClr val="tx1"/>
+                </a:solidFill>
+                <a:latin typeface="Arial" panose="020B0604020202020204" pitchFamily="34" charset="0"/>
+                <a:cs typeface="Arial" panose="020B0604020202020204" pitchFamily="34" charset="0"/>
+              </a:rPr>
+              <a:t>createObjects</a:t>
+            </a:r>
+            <a:r>
+              <a:rPr lang="de-CH" sz="1200" b="1" dirty="0">
+                <a:solidFill>
+                  <a:schemeClr val="tx1"/>
+                </a:solidFill>
+                <a:latin typeface="Arial" panose="020B0604020202020204" pitchFamily="34" charset="0"/>
+                <a:cs typeface="Arial" panose="020B0604020202020204" pitchFamily="34" charset="0"/>
+              </a:rPr>
+              <a:t>()</a:t>
+            </a:r>
+          </a:p>
+          <a:p>
+            <a:r>
+              <a:rPr lang="en-US" sz="1200" b="1" i="1" dirty="0">
+                <a:solidFill>
+                  <a:schemeClr val="tx1"/>
+                </a:solidFill>
+                <a:latin typeface="Arial" panose="020B0604020202020204" pitchFamily="34" charset="0"/>
+                <a:cs typeface="Arial" panose="020B0604020202020204" pitchFamily="34" charset="0"/>
+              </a:rPr>
+              <a:t>Creates the objects for the styling (</a:t>
+            </a:r>
+            <a:r>
+              <a:rPr lang="en-US" sz="1200" b="1" i="1" dirty="0" err="1">
+                <a:solidFill>
+                  <a:schemeClr val="tx1"/>
+                </a:solidFill>
+                <a:latin typeface="Arial" panose="020B0604020202020204" pitchFamily="34" charset="0"/>
+                <a:cs typeface="Arial" panose="020B0604020202020204" pitchFamily="34" charset="0"/>
+              </a:rPr>
+              <a:t>StyleCards</a:t>
+            </a:r>
+            <a:r>
+              <a:rPr lang="en-US" sz="1200" b="1" i="1" dirty="0">
+                <a:solidFill>
+                  <a:schemeClr val="tx1"/>
+                </a:solidFill>
+                <a:latin typeface="Arial" panose="020B0604020202020204" pitchFamily="34" charset="0"/>
+                <a:cs typeface="Arial" panose="020B0604020202020204" pitchFamily="34" charset="0"/>
+              </a:rPr>
+              <a:t>) and the HTML tables for the name cards </a:t>
+            </a:r>
+            <a:r>
+              <a:rPr lang="de-CH" sz="1200" b="1" i="1" dirty="0">
+                <a:solidFill>
+                  <a:schemeClr val="tx1"/>
+                </a:solidFill>
+                <a:latin typeface="Arial" panose="020B0604020202020204" pitchFamily="34" charset="0"/>
+                <a:cs typeface="Arial" panose="020B0604020202020204" pitchFamily="34" charset="0"/>
+              </a:rPr>
+              <a:t>(</a:t>
+            </a:r>
+            <a:r>
+              <a:rPr lang="de-CH" sz="1200" b="1" i="1" dirty="0" err="1">
+                <a:solidFill>
+                  <a:schemeClr val="tx1"/>
+                </a:solidFill>
+                <a:latin typeface="Arial" panose="020B0604020202020204" pitchFamily="34" charset="0"/>
+                <a:cs typeface="Arial" panose="020B0604020202020204" pitchFamily="34" charset="0"/>
+              </a:rPr>
+              <a:t>HtmlTableCards</a:t>
+            </a:r>
+            <a:r>
+              <a:rPr lang="de-CH" sz="1200" b="1" i="1" dirty="0">
+                <a:solidFill>
+                  <a:schemeClr val="tx1"/>
+                </a:solidFill>
+                <a:latin typeface="Arial" panose="020B0604020202020204" pitchFamily="34" charset="0"/>
+                <a:cs typeface="Arial" panose="020B0604020202020204" pitchFamily="34" charset="0"/>
+              </a:rPr>
+              <a:t>)</a:t>
+            </a:r>
+          </a:p>
+          <a:p>
+            <a:endParaRPr lang="de-CH" sz="1200" b="1" dirty="0">
+              <a:solidFill>
+                <a:schemeClr val="tx1"/>
+              </a:solidFill>
+              <a:latin typeface="Arial" panose="020B0604020202020204" pitchFamily="34" charset="0"/>
+              <a:cs typeface="Arial" panose="020B0604020202020204" pitchFamily="34" charset="0"/>
+            </a:endParaRPr>
+          </a:p>
+          <a:p>
+            <a:r>
+              <a:rPr lang="de-CH" sz="1200" b="1" dirty="0" err="1">
+                <a:solidFill>
+                  <a:schemeClr val="tx1"/>
+                </a:solidFill>
+                <a:latin typeface="Arial" panose="020B0604020202020204" pitchFamily="34" charset="0"/>
+                <a:cs typeface="Arial" panose="020B0604020202020204" pitchFamily="34" charset="0"/>
+              </a:rPr>
+              <a:t>getHtmlString</a:t>
+            </a:r>
+            <a:r>
+              <a:rPr lang="de-CH" sz="1200" b="1" dirty="0">
+                <a:solidFill>
+                  <a:schemeClr val="tx1"/>
+                </a:solidFill>
+                <a:latin typeface="Arial" panose="020B0604020202020204" pitchFamily="34" charset="0"/>
+                <a:cs typeface="Arial" panose="020B0604020202020204" pitchFamily="34" charset="0"/>
+              </a:rPr>
+              <a:t>()</a:t>
+            </a:r>
+          </a:p>
+          <a:p>
+            <a:r>
+              <a:rPr lang="en-US" sz="1200" b="1" i="1" dirty="0">
+                <a:solidFill>
+                  <a:schemeClr val="tx1"/>
+                </a:solidFill>
+                <a:latin typeface="Arial" panose="020B0604020202020204" pitchFamily="34" charset="0"/>
+                <a:cs typeface="Arial" panose="020B0604020202020204" pitchFamily="34" charset="0"/>
+              </a:rPr>
+              <a:t>Returns the HTML string for the name cards that will be the content of a Blob object for the opening of a new tab with the </a:t>
+            </a:r>
+            <a:r>
+              <a:rPr lang="en-US" sz="1200" b="1" i="1" dirty="0" err="1">
+                <a:solidFill>
+                  <a:schemeClr val="tx1"/>
+                </a:solidFill>
+                <a:latin typeface="Arial" panose="020B0604020202020204" pitchFamily="34" charset="0"/>
+                <a:cs typeface="Arial" panose="020B0604020202020204" pitchFamily="34" charset="0"/>
+              </a:rPr>
+              <a:t>nameor</a:t>
+            </a:r>
+            <a:r>
+              <a:rPr lang="en-US" sz="1200" b="1" i="1" dirty="0">
+                <a:solidFill>
+                  <a:schemeClr val="tx1"/>
+                </a:solidFill>
+                <a:latin typeface="Arial" panose="020B0604020202020204" pitchFamily="34" charset="0"/>
+                <a:cs typeface="Arial" panose="020B0604020202020204" pitchFamily="34" charset="0"/>
+              </a:rPr>
+              <a:t> ticket cards</a:t>
+            </a:r>
+          </a:p>
+          <a:p>
+            <a:endParaRPr lang="en-US" sz="1200" b="1" dirty="0">
+              <a:solidFill>
+                <a:schemeClr val="tx1"/>
+              </a:solidFill>
+              <a:latin typeface="Arial" panose="020B0604020202020204" pitchFamily="34" charset="0"/>
+              <a:cs typeface="Arial" panose="020B0604020202020204" pitchFamily="34" charset="0"/>
+            </a:endParaRPr>
+          </a:p>
+          <a:p>
+            <a:r>
+              <a:rPr lang="en-US" sz="1200" b="1" dirty="0" err="1">
+                <a:solidFill>
+                  <a:schemeClr val="tx1"/>
+                </a:solidFill>
+                <a:latin typeface="Arial" panose="020B0604020202020204" pitchFamily="34" charset="0"/>
+                <a:cs typeface="Arial" panose="020B0604020202020204" pitchFamily="34" charset="0"/>
+              </a:rPr>
+              <a:t>openTab</a:t>
+            </a:r>
+            <a:r>
+              <a:rPr lang="en-US" sz="1200" b="1" dirty="0">
+                <a:solidFill>
+                  <a:schemeClr val="tx1"/>
+                </a:solidFill>
+                <a:latin typeface="Arial" panose="020B0604020202020204" pitchFamily="34" charset="0"/>
+                <a:cs typeface="Arial" panose="020B0604020202020204" pitchFamily="34" charset="0"/>
+              </a:rPr>
+              <a:t>()</a:t>
+            </a:r>
+          </a:p>
+          <a:p>
+            <a:r>
+              <a:rPr lang="en-US" sz="1200" b="1" i="1" dirty="0">
+                <a:solidFill>
+                  <a:schemeClr val="tx1"/>
+                </a:solidFill>
+                <a:latin typeface="Arial" panose="020B0604020202020204" pitchFamily="34" charset="0"/>
+                <a:cs typeface="Arial" panose="020B0604020202020204" pitchFamily="34" charset="0"/>
+              </a:rPr>
+              <a:t>Opens a new tab with the name or ticket cards. The content of the new tab is a Blob object </a:t>
+            </a:r>
+            <a:endParaRPr lang="de-CH" sz="1200" b="1" i="1" dirty="0">
+              <a:solidFill>
+                <a:schemeClr val="tx1"/>
+              </a:solidFill>
+              <a:latin typeface="Arial" panose="020B0604020202020204" pitchFamily="34" charset="0"/>
+              <a:cs typeface="Arial" panose="020B0604020202020204" pitchFamily="34" charset="0"/>
+            </a:endParaRPr>
+          </a:p>
+        </p:txBody>
+      </p:sp>
+      <p:sp>
+        <p:nvSpPr>
+          <p:cNvPr id="5" name="Rechteck 4">
+            <a:extLst>
+              <a:ext uri="{FF2B5EF4-FFF2-40B4-BE49-F238E27FC236}">
+                <a16:creationId xmlns:a16="http://schemas.microsoft.com/office/drawing/2014/main" id="{A780FA26-7A13-428B-67E4-C2566C3C616D}"/>
+              </a:ext>
+            </a:extLst>
+          </p:cNvPr>
+          <p:cNvSpPr/>
+          <p:nvPr/>
+        </p:nvSpPr>
+        <p:spPr>
+          <a:xfrm>
+            <a:off x="394855" y="670245"/>
+            <a:ext cx="3667990" cy="470139"/>
+          </a:xfrm>
+          <a:prstGeom prst="rect">
+            <a:avLst/>
+          </a:prstGeom>
+          <a:solidFill>
+            <a:schemeClr val="bg1">
+              <a:lumMod val="85000"/>
+            </a:schemeClr>
+          </a:solidFill>
+          <a:ln>
+            <a:solidFill>
+              <a:schemeClr val="tx1"/>
+            </a:solidFill>
+          </a:ln>
+        </p:spPr>
+        <p:style>
+          <a:lnRef idx="2">
+            <a:schemeClr val="accent1">
+              <a:shade val="50000"/>
+            </a:schemeClr>
+          </a:lnRef>
+          <a:fillRef idx="1">
+            <a:schemeClr val="accent1"/>
+          </a:fillRef>
+          <a:effectRef idx="0">
+            <a:schemeClr val="accent1"/>
+          </a:effectRef>
+          <a:fontRef idx="minor">
+            <a:schemeClr val="lt1"/>
+          </a:fontRef>
+        </p:style>
+        <p:txBody>
+          <a:bodyPr rtlCol="0" anchor="ctr"/>
+          <a:lstStyle/>
+          <a:p>
+            <a:pPr algn="ctr"/>
+            <a:r>
+              <a:rPr lang="de-CH" sz="1600" b="1" dirty="0">
+                <a:solidFill>
+                  <a:schemeClr val="tx1"/>
+                </a:solidFill>
+                <a:latin typeface="Arial" panose="020B0604020202020204" pitchFamily="34" charset="0"/>
+                <a:cs typeface="Arial" panose="020B0604020202020204" pitchFamily="34" charset="0"/>
+              </a:rPr>
+              <a:t>Class </a:t>
+            </a:r>
+            <a:r>
+              <a:rPr lang="de-CH" sz="1600" b="1" dirty="0" err="1">
+                <a:solidFill>
+                  <a:schemeClr val="tx1"/>
+                </a:solidFill>
+                <a:latin typeface="Arial" panose="020B0604020202020204" pitchFamily="34" charset="0"/>
+                <a:cs typeface="Arial" panose="020B0604020202020204" pitchFamily="34" charset="0"/>
+              </a:rPr>
+              <a:t>ReservationEventXml</a:t>
+            </a:r>
+            <a:r>
+              <a:rPr lang="de-CH" sz="1600" b="1" dirty="0">
+                <a:solidFill>
+                  <a:schemeClr val="tx1"/>
+                </a:solidFill>
+                <a:latin typeface="Arial" panose="020B0604020202020204" pitchFamily="34" charset="0"/>
+                <a:cs typeface="Arial" panose="020B0604020202020204" pitchFamily="34" charset="0"/>
+              </a:rPr>
+              <a:t>    </a:t>
+            </a:r>
+          </a:p>
+        </p:txBody>
+      </p:sp>
+      <p:sp>
+        <p:nvSpPr>
+          <p:cNvPr id="6" name="Rechteck 5">
+            <a:extLst>
+              <a:ext uri="{FF2B5EF4-FFF2-40B4-BE49-F238E27FC236}">
+                <a16:creationId xmlns:a16="http://schemas.microsoft.com/office/drawing/2014/main" id="{52058E95-D3BB-9E5D-AA10-46773AE40159}"/>
+              </a:ext>
+            </a:extLst>
+          </p:cNvPr>
+          <p:cNvSpPr/>
+          <p:nvPr/>
+        </p:nvSpPr>
+        <p:spPr>
+          <a:xfrm>
+            <a:off x="394855" y="1146736"/>
+            <a:ext cx="3667990" cy="470139"/>
+          </a:xfrm>
+          <a:prstGeom prst="rect">
+            <a:avLst/>
+          </a:prstGeom>
+          <a:noFill/>
+          <a:ln>
+            <a:solidFill>
+              <a:schemeClr val="tx1"/>
+            </a:solidFill>
+          </a:ln>
+        </p:spPr>
+        <p:style>
+          <a:lnRef idx="2">
+            <a:schemeClr val="accent1">
+              <a:shade val="50000"/>
+            </a:schemeClr>
+          </a:lnRef>
+          <a:fillRef idx="1">
+            <a:schemeClr val="accent1"/>
+          </a:fillRef>
+          <a:effectRef idx="0">
+            <a:schemeClr val="accent1"/>
+          </a:effectRef>
+          <a:fontRef idx="minor">
+            <a:schemeClr val="lt1"/>
+          </a:fontRef>
+        </p:style>
+        <p:txBody>
+          <a:bodyPr rtlCol="0" anchor="ctr"/>
+          <a:lstStyle/>
+          <a:p>
+            <a:r>
+              <a:rPr lang="de-CH" sz="1400" b="1" dirty="0">
+                <a:solidFill>
+                  <a:schemeClr val="tx1"/>
+                </a:solidFill>
+                <a:latin typeface="Arial" panose="020B0604020202020204" pitchFamily="34" charset="0"/>
+                <a:cs typeface="Arial" panose="020B0604020202020204" pitchFamily="34" charset="0"/>
+              </a:rPr>
+              <a:t>Reservation </a:t>
+            </a:r>
+            <a:r>
+              <a:rPr lang="de-CH" sz="1400" b="1" dirty="0" err="1">
+                <a:solidFill>
+                  <a:schemeClr val="tx1"/>
+                </a:solidFill>
+                <a:latin typeface="Arial" panose="020B0604020202020204" pitchFamily="34" charset="0"/>
+                <a:cs typeface="Arial" panose="020B0604020202020204" pitchFamily="34" charset="0"/>
+              </a:rPr>
+              <a:t>data</a:t>
+            </a:r>
+            <a:r>
+              <a:rPr lang="de-CH" sz="1400" b="1" dirty="0">
+                <a:solidFill>
+                  <a:schemeClr val="tx1"/>
+                </a:solidFill>
+                <a:latin typeface="Arial" panose="020B0604020202020204" pitchFamily="34" charset="0"/>
+                <a:cs typeface="Arial" panose="020B0604020202020204" pitchFamily="34" charset="0"/>
+              </a:rPr>
+              <a:t> </a:t>
+            </a:r>
+            <a:r>
+              <a:rPr lang="de-CH" sz="1400" b="1" dirty="0" err="1">
+                <a:solidFill>
+                  <a:schemeClr val="tx1"/>
+                </a:solidFill>
+                <a:latin typeface="Arial" panose="020B0604020202020204" pitchFamily="34" charset="0"/>
+                <a:cs typeface="Arial" panose="020B0604020202020204" pitchFamily="34" charset="0"/>
+              </a:rPr>
+              <a:t>for</a:t>
+            </a:r>
+            <a:r>
+              <a:rPr lang="de-CH" sz="1400" b="1" dirty="0">
+                <a:solidFill>
+                  <a:schemeClr val="tx1"/>
+                </a:solidFill>
+                <a:latin typeface="Arial" panose="020B0604020202020204" pitchFamily="34" charset="0"/>
+                <a:cs typeface="Arial" panose="020B0604020202020204" pitchFamily="34" charset="0"/>
+              </a:rPr>
+              <a:t> all </a:t>
+            </a:r>
+            <a:r>
+              <a:rPr lang="de-CH" sz="1400" b="1" dirty="0" err="1">
+                <a:solidFill>
+                  <a:schemeClr val="tx1"/>
+                </a:solidFill>
+                <a:latin typeface="Arial" panose="020B0604020202020204" pitchFamily="34" charset="0"/>
+                <a:cs typeface="Arial" panose="020B0604020202020204" pitchFamily="34" charset="0"/>
+              </a:rPr>
+              <a:t>season</a:t>
+            </a:r>
+            <a:r>
+              <a:rPr lang="de-CH" sz="1400" b="1" dirty="0">
+                <a:solidFill>
+                  <a:schemeClr val="tx1"/>
+                </a:solidFill>
+                <a:latin typeface="Arial" panose="020B0604020202020204" pitchFamily="34" charset="0"/>
+                <a:cs typeface="Arial" panose="020B0604020202020204" pitchFamily="34" charset="0"/>
+              </a:rPr>
+              <a:t> </a:t>
+            </a:r>
+            <a:r>
+              <a:rPr lang="de-CH" sz="1400" b="1" dirty="0" err="1">
+                <a:solidFill>
+                  <a:schemeClr val="tx1"/>
+                </a:solidFill>
+                <a:latin typeface="Arial" panose="020B0604020202020204" pitchFamily="34" charset="0"/>
+                <a:cs typeface="Arial" panose="020B0604020202020204" pitchFamily="34" charset="0"/>
+              </a:rPr>
+              <a:t>concerts</a:t>
+            </a:r>
+            <a:r>
+              <a:rPr lang="de-CH" sz="1400" b="1" dirty="0">
+                <a:solidFill>
+                  <a:schemeClr val="tx1"/>
+                </a:solidFill>
+                <a:latin typeface="Arial" panose="020B0604020202020204" pitchFamily="34" charset="0"/>
+                <a:cs typeface="Arial" panose="020B0604020202020204" pitchFamily="34" charset="0"/>
+              </a:rPr>
+              <a:t>  </a:t>
+            </a:r>
+          </a:p>
+        </p:txBody>
+      </p:sp>
+      <p:sp>
+        <p:nvSpPr>
+          <p:cNvPr id="7" name="Rechteck 6">
+            <a:extLst>
+              <a:ext uri="{FF2B5EF4-FFF2-40B4-BE49-F238E27FC236}">
+                <a16:creationId xmlns:a16="http://schemas.microsoft.com/office/drawing/2014/main" id="{7886EA2D-A739-1B73-0084-FE84328C47A3}"/>
+              </a:ext>
+            </a:extLst>
+          </p:cNvPr>
+          <p:cNvSpPr/>
+          <p:nvPr/>
+        </p:nvSpPr>
+        <p:spPr>
+          <a:xfrm>
+            <a:off x="394855" y="3674348"/>
+            <a:ext cx="3667990" cy="470139"/>
+          </a:xfrm>
+          <a:prstGeom prst="rect">
+            <a:avLst/>
+          </a:prstGeom>
+          <a:solidFill>
+            <a:schemeClr val="bg1">
+              <a:lumMod val="85000"/>
+            </a:schemeClr>
+          </a:solidFill>
+          <a:ln>
+            <a:solidFill>
+              <a:schemeClr val="tx1"/>
+            </a:solidFill>
+          </a:ln>
+        </p:spPr>
+        <p:style>
+          <a:lnRef idx="2">
+            <a:schemeClr val="accent1">
+              <a:shade val="50000"/>
+            </a:schemeClr>
+          </a:lnRef>
+          <a:fillRef idx="1">
+            <a:schemeClr val="accent1"/>
+          </a:fillRef>
+          <a:effectRef idx="0">
+            <a:schemeClr val="accent1"/>
+          </a:effectRef>
+          <a:fontRef idx="minor">
+            <a:schemeClr val="lt1"/>
+          </a:fontRef>
+        </p:style>
+        <p:txBody>
+          <a:bodyPr rtlCol="0" anchor="ctr"/>
+          <a:lstStyle/>
+          <a:p>
+            <a:pPr algn="ctr"/>
+            <a:r>
+              <a:rPr lang="de-CH" sz="1600" b="1" dirty="0">
+                <a:solidFill>
+                  <a:schemeClr val="tx1"/>
+                </a:solidFill>
+                <a:latin typeface="Arial" panose="020B0604020202020204" pitchFamily="34" charset="0"/>
+                <a:cs typeface="Arial" panose="020B0604020202020204" pitchFamily="34" charset="0"/>
+              </a:rPr>
+              <a:t>Class </a:t>
+            </a:r>
+            <a:r>
+              <a:rPr lang="de-CH" sz="1600" b="1" dirty="0" err="1">
+                <a:solidFill>
+                  <a:schemeClr val="tx1"/>
+                </a:solidFill>
+                <a:latin typeface="Arial" panose="020B0604020202020204" pitchFamily="34" charset="0"/>
+                <a:cs typeface="Arial" panose="020B0604020202020204" pitchFamily="34" charset="0"/>
+              </a:rPr>
+              <a:t>HtmlTableCards</a:t>
+            </a:r>
+            <a:r>
+              <a:rPr lang="de-CH" sz="1600" b="1" dirty="0">
+                <a:solidFill>
+                  <a:schemeClr val="tx1"/>
+                </a:solidFill>
+                <a:latin typeface="Arial" panose="020B0604020202020204" pitchFamily="34" charset="0"/>
+                <a:cs typeface="Arial" panose="020B0604020202020204" pitchFamily="34" charset="0"/>
+              </a:rPr>
+              <a:t>    </a:t>
+            </a:r>
+          </a:p>
+        </p:txBody>
+      </p:sp>
+      <p:sp>
+        <p:nvSpPr>
+          <p:cNvPr id="8" name="Rechteck 7">
+            <a:extLst>
+              <a:ext uri="{FF2B5EF4-FFF2-40B4-BE49-F238E27FC236}">
+                <a16:creationId xmlns:a16="http://schemas.microsoft.com/office/drawing/2014/main" id="{07581BD7-8785-A31A-DC31-F8AA5F300552}"/>
+              </a:ext>
+            </a:extLst>
+          </p:cNvPr>
+          <p:cNvSpPr/>
+          <p:nvPr/>
+        </p:nvSpPr>
+        <p:spPr>
+          <a:xfrm>
+            <a:off x="394855" y="4150839"/>
+            <a:ext cx="3667990" cy="619719"/>
+          </a:xfrm>
+          <a:prstGeom prst="rect">
+            <a:avLst/>
+          </a:prstGeom>
+          <a:noFill/>
+          <a:ln>
+            <a:solidFill>
+              <a:schemeClr val="tx1"/>
+            </a:solidFill>
+          </a:ln>
+        </p:spPr>
+        <p:style>
+          <a:lnRef idx="2">
+            <a:schemeClr val="accent1">
+              <a:shade val="50000"/>
+            </a:schemeClr>
+          </a:lnRef>
+          <a:fillRef idx="1">
+            <a:schemeClr val="accent1"/>
+          </a:fillRef>
+          <a:effectRef idx="0">
+            <a:schemeClr val="accent1"/>
+          </a:effectRef>
+          <a:fontRef idx="minor">
+            <a:schemeClr val="lt1"/>
+          </a:fontRef>
+        </p:style>
+        <p:txBody>
+          <a:bodyPr rtlCol="0" anchor="ctr"/>
+          <a:lstStyle/>
+          <a:p>
+            <a:r>
+              <a:rPr lang="de-CH" sz="1400" b="1" dirty="0">
+                <a:solidFill>
+                  <a:schemeClr val="tx1"/>
+                </a:solidFill>
+                <a:latin typeface="Arial" panose="020B0604020202020204" pitchFamily="34" charset="0"/>
+                <a:cs typeface="Arial" panose="020B0604020202020204" pitchFamily="34" charset="0"/>
+              </a:rPr>
+              <a:t>Dimensions </a:t>
+            </a:r>
+            <a:r>
+              <a:rPr lang="de-CH" sz="1400" b="1" dirty="0" err="1">
+                <a:solidFill>
+                  <a:schemeClr val="tx1"/>
+                </a:solidFill>
+                <a:latin typeface="Arial" panose="020B0604020202020204" pitchFamily="34" charset="0"/>
+                <a:cs typeface="Arial" panose="020B0604020202020204" pitchFamily="34" charset="0"/>
+              </a:rPr>
+              <a:t>of</a:t>
+            </a:r>
+            <a:r>
+              <a:rPr lang="de-CH" sz="1400" b="1" dirty="0">
+                <a:solidFill>
+                  <a:schemeClr val="tx1"/>
+                </a:solidFill>
+                <a:latin typeface="Arial" panose="020B0604020202020204" pitchFamily="34" charset="0"/>
+                <a:cs typeface="Arial" panose="020B0604020202020204" pitchFamily="34" charset="0"/>
+              </a:rPr>
+              <a:t> </a:t>
+            </a:r>
+            <a:r>
+              <a:rPr lang="de-CH" sz="1400" b="1" dirty="0" err="1">
+                <a:solidFill>
+                  <a:schemeClr val="tx1"/>
+                </a:solidFill>
+                <a:latin typeface="Arial" panose="020B0604020202020204" pitchFamily="34" charset="0"/>
+                <a:cs typeface="Arial" panose="020B0604020202020204" pitchFamily="34" charset="0"/>
+              </a:rPr>
+              <a:t>the</a:t>
+            </a:r>
+            <a:r>
+              <a:rPr lang="de-CH" sz="1400" b="1" dirty="0">
+                <a:solidFill>
+                  <a:schemeClr val="tx1"/>
+                </a:solidFill>
+                <a:latin typeface="Arial" panose="020B0604020202020204" pitchFamily="34" charset="0"/>
+                <a:cs typeface="Arial" panose="020B0604020202020204" pitchFamily="34" charset="0"/>
+              </a:rPr>
+              <a:t> </a:t>
+            </a:r>
+            <a:r>
+              <a:rPr lang="de-CH" sz="1400" b="1" dirty="0" err="1">
+                <a:solidFill>
+                  <a:schemeClr val="tx1"/>
+                </a:solidFill>
+                <a:latin typeface="Arial" panose="020B0604020202020204" pitchFamily="34" charset="0"/>
+                <a:cs typeface="Arial" panose="020B0604020202020204" pitchFamily="34" charset="0"/>
+              </a:rPr>
+              <a:t>name</a:t>
+            </a:r>
+            <a:r>
+              <a:rPr lang="de-CH" sz="1400" b="1" dirty="0">
+                <a:solidFill>
+                  <a:schemeClr val="tx1"/>
+                </a:solidFill>
+                <a:latin typeface="Arial" panose="020B0604020202020204" pitchFamily="34" charset="0"/>
+                <a:cs typeface="Arial" panose="020B0604020202020204" pitchFamily="34" charset="0"/>
+              </a:rPr>
+              <a:t>/ticket </a:t>
+            </a:r>
+            <a:r>
+              <a:rPr lang="de-CH" sz="1400" b="1" dirty="0" err="1">
+                <a:solidFill>
+                  <a:schemeClr val="tx1"/>
+                </a:solidFill>
+                <a:latin typeface="Arial" panose="020B0604020202020204" pitchFamily="34" charset="0"/>
+                <a:cs typeface="Arial" panose="020B0604020202020204" pitchFamily="34" charset="0"/>
+              </a:rPr>
+              <a:t>card</a:t>
+            </a:r>
+            <a:r>
+              <a:rPr lang="de-CH" sz="1400" b="1" dirty="0">
+                <a:solidFill>
+                  <a:schemeClr val="tx1"/>
+                </a:solidFill>
+                <a:latin typeface="Arial" panose="020B0604020202020204" pitchFamily="34" charset="0"/>
+                <a:cs typeface="Arial" panose="020B0604020202020204" pitchFamily="34" charset="0"/>
+              </a:rPr>
+              <a:t>, </a:t>
+            </a:r>
+            <a:r>
+              <a:rPr lang="de-CH" sz="1400" b="1" dirty="0" err="1">
+                <a:solidFill>
+                  <a:schemeClr val="tx1"/>
+                </a:solidFill>
+                <a:latin typeface="Arial" panose="020B0604020202020204" pitchFamily="34" charset="0"/>
+                <a:cs typeface="Arial" panose="020B0604020202020204" pitchFamily="34" charset="0"/>
+              </a:rPr>
+              <a:t>number</a:t>
+            </a:r>
+            <a:r>
+              <a:rPr lang="de-CH" sz="1400" b="1" dirty="0">
+                <a:solidFill>
+                  <a:schemeClr val="tx1"/>
+                </a:solidFill>
+                <a:latin typeface="Arial" panose="020B0604020202020204" pitchFamily="34" charset="0"/>
+                <a:cs typeface="Arial" panose="020B0604020202020204" pitchFamily="34" charset="0"/>
+              </a:rPr>
+              <a:t> </a:t>
+            </a:r>
+            <a:r>
+              <a:rPr lang="de-CH" sz="1400" b="1" dirty="0" err="1">
+                <a:solidFill>
+                  <a:schemeClr val="tx1"/>
+                </a:solidFill>
+                <a:latin typeface="Arial" panose="020B0604020202020204" pitchFamily="34" charset="0"/>
+                <a:cs typeface="Arial" panose="020B0604020202020204" pitchFamily="34" charset="0"/>
+              </a:rPr>
+              <a:t>of</a:t>
+            </a:r>
+            <a:r>
+              <a:rPr lang="de-CH" sz="1400" b="1" dirty="0">
+                <a:solidFill>
+                  <a:schemeClr val="tx1"/>
+                </a:solidFill>
+                <a:latin typeface="Arial" panose="020B0604020202020204" pitchFamily="34" charset="0"/>
+                <a:cs typeface="Arial" panose="020B0604020202020204" pitchFamily="34" charset="0"/>
+              </a:rPr>
+              <a:t> </a:t>
+            </a:r>
+            <a:r>
+              <a:rPr lang="de-CH" sz="1400" b="1" dirty="0" err="1">
+                <a:solidFill>
+                  <a:schemeClr val="tx1"/>
+                </a:solidFill>
+                <a:latin typeface="Arial" panose="020B0604020202020204" pitchFamily="34" charset="0"/>
+                <a:cs typeface="Arial" panose="020B0604020202020204" pitchFamily="34" charset="0"/>
+              </a:rPr>
+              <a:t>cards</a:t>
+            </a:r>
+            <a:r>
+              <a:rPr lang="de-CH" sz="1400" b="1" dirty="0">
+                <a:solidFill>
+                  <a:schemeClr val="tx1"/>
+                </a:solidFill>
+                <a:latin typeface="Arial" panose="020B0604020202020204" pitchFamily="34" charset="0"/>
+                <a:cs typeface="Arial" panose="020B0604020202020204" pitchFamily="34" charset="0"/>
+              </a:rPr>
+              <a:t>, </a:t>
+            </a:r>
+            <a:r>
+              <a:rPr lang="de-CH" sz="1400" b="1" dirty="0" err="1">
+                <a:solidFill>
+                  <a:schemeClr val="tx1"/>
+                </a:solidFill>
+                <a:latin typeface="Arial" panose="020B0604020202020204" pitchFamily="34" charset="0"/>
+                <a:cs typeface="Arial" panose="020B0604020202020204" pitchFamily="34" charset="0"/>
+              </a:rPr>
+              <a:t>number</a:t>
+            </a:r>
+            <a:r>
+              <a:rPr lang="de-CH" sz="1400" b="1" dirty="0">
+                <a:solidFill>
+                  <a:schemeClr val="tx1"/>
+                </a:solidFill>
+                <a:latin typeface="Arial" panose="020B0604020202020204" pitchFamily="34" charset="0"/>
+                <a:cs typeface="Arial" panose="020B0604020202020204" pitchFamily="34" charset="0"/>
+              </a:rPr>
+              <a:t> </a:t>
+            </a:r>
+            <a:r>
+              <a:rPr lang="de-CH" sz="1400" b="1" dirty="0" err="1">
+                <a:solidFill>
+                  <a:schemeClr val="tx1"/>
+                </a:solidFill>
+                <a:latin typeface="Arial" panose="020B0604020202020204" pitchFamily="34" charset="0"/>
+                <a:cs typeface="Arial" panose="020B0604020202020204" pitchFamily="34" charset="0"/>
+              </a:rPr>
+              <a:t>of</a:t>
+            </a:r>
+            <a:r>
+              <a:rPr lang="de-CH" sz="1400" b="1" dirty="0">
+                <a:solidFill>
+                  <a:schemeClr val="tx1"/>
+                </a:solidFill>
+                <a:latin typeface="Arial" panose="020B0604020202020204" pitchFamily="34" charset="0"/>
+                <a:cs typeface="Arial" panose="020B0604020202020204" pitchFamily="34" charset="0"/>
+              </a:rPr>
+              <a:t> </a:t>
+            </a:r>
+            <a:r>
+              <a:rPr lang="de-CH" sz="1400" b="1" dirty="0" err="1">
+                <a:solidFill>
+                  <a:schemeClr val="tx1"/>
+                </a:solidFill>
+                <a:latin typeface="Arial" panose="020B0604020202020204" pitchFamily="34" charset="0"/>
+                <a:cs typeface="Arial" panose="020B0604020202020204" pitchFamily="34" charset="0"/>
+              </a:rPr>
+              <a:t>pages</a:t>
+            </a:r>
+            <a:endParaRPr lang="de-CH" sz="1400" b="1" dirty="0">
+              <a:solidFill>
+                <a:schemeClr val="tx1"/>
+              </a:solidFill>
+              <a:latin typeface="Arial" panose="020B0604020202020204" pitchFamily="34" charset="0"/>
+              <a:cs typeface="Arial" panose="020B0604020202020204" pitchFamily="34" charset="0"/>
+            </a:endParaRPr>
+          </a:p>
+        </p:txBody>
+      </p:sp>
+      <p:sp>
+        <p:nvSpPr>
+          <p:cNvPr id="9" name="Rechteck 8">
+            <a:extLst>
+              <a:ext uri="{FF2B5EF4-FFF2-40B4-BE49-F238E27FC236}">
+                <a16:creationId xmlns:a16="http://schemas.microsoft.com/office/drawing/2014/main" id="{424EAFF2-D7CC-F2D1-99FF-398706E1035B}"/>
+              </a:ext>
+            </a:extLst>
+          </p:cNvPr>
+          <p:cNvSpPr/>
+          <p:nvPr/>
+        </p:nvSpPr>
+        <p:spPr>
+          <a:xfrm>
+            <a:off x="394855" y="4774293"/>
+            <a:ext cx="3667990" cy="961495"/>
+          </a:xfrm>
+          <a:prstGeom prst="rect">
+            <a:avLst/>
+          </a:prstGeom>
+          <a:noFill/>
+          <a:ln>
+            <a:solidFill>
+              <a:schemeClr val="tx1"/>
+            </a:solidFill>
+          </a:ln>
+        </p:spPr>
+        <p:style>
+          <a:lnRef idx="2">
+            <a:schemeClr val="accent1">
+              <a:shade val="50000"/>
+            </a:schemeClr>
+          </a:lnRef>
+          <a:fillRef idx="1">
+            <a:schemeClr val="accent1"/>
+          </a:fillRef>
+          <a:effectRef idx="0">
+            <a:schemeClr val="accent1"/>
+          </a:effectRef>
+          <a:fontRef idx="minor">
+            <a:schemeClr val="lt1"/>
+          </a:fontRef>
+        </p:style>
+        <p:txBody>
+          <a:bodyPr rtlCol="0" anchor="ctr"/>
+          <a:lstStyle/>
+          <a:p>
+            <a:r>
+              <a:rPr lang="de-CH" sz="1400" b="1" dirty="0" err="1">
+                <a:solidFill>
+                  <a:schemeClr val="tx1"/>
+                </a:solidFill>
+                <a:latin typeface="Arial" panose="020B0604020202020204" pitchFamily="34" charset="0"/>
+                <a:cs typeface="Arial" panose="020B0604020202020204" pitchFamily="34" charset="0"/>
+              </a:rPr>
+              <a:t>getHtmlString</a:t>
+            </a:r>
+            <a:r>
+              <a:rPr lang="de-CH" sz="1400" b="1" dirty="0">
+                <a:solidFill>
+                  <a:schemeClr val="tx1"/>
+                </a:solidFill>
+                <a:latin typeface="Arial" panose="020B0604020202020204" pitchFamily="34" charset="0"/>
+                <a:cs typeface="Arial" panose="020B0604020202020204" pitchFamily="34" charset="0"/>
+              </a:rPr>
+              <a:t>()</a:t>
+            </a:r>
+          </a:p>
+          <a:p>
+            <a:r>
+              <a:rPr lang="en-US" sz="1400" b="1" i="1" dirty="0">
+                <a:solidFill>
+                  <a:schemeClr val="tx1"/>
+                </a:solidFill>
+                <a:latin typeface="Arial" panose="020B0604020202020204" pitchFamily="34" charset="0"/>
+                <a:cs typeface="Arial" panose="020B0604020202020204" pitchFamily="34" charset="0"/>
+              </a:rPr>
+              <a:t>Returns the HTML string for the name cards tables (one table per page)</a:t>
+            </a:r>
+            <a:endParaRPr lang="de-CH" sz="1400" b="1" i="1" dirty="0">
+              <a:solidFill>
+                <a:schemeClr val="tx1"/>
+              </a:solidFill>
+              <a:latin typeface="Arial" panose="020B0604020202020204" pitchFamily="34" charset="0"/>
+              <a:cs typeface="Arial" panose="020B0604020202020204" pitchFamily="34" charset="0"/>
+            </a:endParaRPr>
+          </a:p>
+        </p:txBody>
+      </p:sp>
+      <p:sp>
+        <p:nvSpPr>
+          <p:cNvPr id="10" name="Rechteck 9">
+            <a:extLst>
+              <a:ext uri="{FF2B5EF4-FFF2-40B4-BE49-F238E27FC236}">
+                <a16:creationId xmlns:a16="http://schemas.microsoft.com/office/drawing/2014/main" id="{5066CBCE-7CA1-6A2E-E31D-3F5832007599}"/>
+              </a:ext>
+            </a:extLst>
+          </p:cNvPr>
+          <p:cNvSpPr/>
+          <p:nvPr/>
+        </p:nvSpPr>
+        <p:spPr>
+          <a:xfrm>
+            <a:off x="394855" y="1706972"/>
+            <a:ext cx="3667990" cy="470139"/>
+          </a:xfrm>
+          <a:prstGeom prst="rect">
+            <a:avLst/>
+          </a:prstGeom>
+          <a:solidFill>
+            <a:schemeClr val="bg1">
+              <a:lumMod val="85000"/>
+            </a:schemeClr>
+          </a:solidFill>
+          <a:ln>
+            <a:solidFill>
+              <a:schemeClr val="tx1"/>
+            </a:solidFill>
+          </a:ln>
+        </p:spPr>
+        <p:style>
+          <a:lnRef idx="2">
+            <a:schemeClr val="accent1">
+              <a:shade val="50000"/>
+            </a:schemeClr>
+          </a:lnRef>
+          <a:fillRef idx="1">
+            <a:schemeClr val="accent1"/>
+          </a:fillRef>
+          <a:effectRef idx="0">
+            <a:schemeClr val="accent1"/>
+          </a:effectRef>
+          <a:fontRef idx="minor">
+            <a:schemeClr val="lt1"/>
+          </a:fontRef>
+        </p:style>
+        <p:txBody>
+          <a:bodyPr rtlCol="0" anchor="ctr"/>
+          <a:lstStyle/>
+          <a:p>
+            <a:pPr algn="ctr"/>
+            <a:r>
+              <a:rPr lang="de-CH" sz="1600" b="1" dirty="0">
+                <a:solidFill>
+                  <a:schemeClr val="tx1"/>
+                </a:solidFill>
+                <a:latin typeface="Arial" panose="020B0604020202020204" pitchFamily="34" charset="0"/>
+                <a:cs typeface="Arial" panose="020B0604020202020204" pitchFamily="34" charset="0"/>
+              </a:rPr>
+              <a:t>Class </a:t>
+            </a:r>
+            <a:r>
+              <a:rPr lang="de-CH" sz="1600" b="1" dirty="0" err="1">
+                <a:solidFill>
+                  <a:schemeClr val="tx1"/>
+                </a:solidFill>
+                <a:latin typeface="Arial" panose="020B0604020202020204" pitchFamily="34" charset="0"/>
+                <a:cs typeface="Arial" panose="020B0604020202020204" pitchFamily="34" charset="0"/>
+              </a:rPr>
+              <a:t>StyleCards</a:t>
+            </a:r>
+            <a:r>
+              <a:rPr lang="de-CH" sz="1600" b="1" dirty="0">
+                <a:solidFill>
+                  <a:schemeClr val="tx1"/>
+                </a:solidFill>
+                <a:latin typeface="Arial" panose="020B0604020202020204" pitchFamily="34" charset="0"/>
+                <a:cs typeface="Arial" panose="020B0604020202020204" pitchFamily="34" charset="0"/>
+              </a:rPr>
+              <a:t>  </a:t>
+            </a:r>
+          </a:p>
+        </p:txBody>
+      </p:sp>
+      <p:sp>
+        <p:nvSpPr>
+          <p:cNvPr id="11" name="Rechteck 10">
+            <a:extLst>
+              <a:ext uri="{FF2B5EF4-FFF2-40B4-BE49-F238E27FC236}">
+                <a16:creationId xmlns:a16="http://schemas.microsoft.com/office/drawing/2014/main" id="{09AC92C7-90D6-5135-317E-61A6698130EC}"/>
+              </a:ext>
+            </a:extLst>
+          </p:cNvPr>
+          <p:cNvSpPr/>
+          <p:nvPr/>
+        </p:nvSpPr>
+        <p:spPr>
+          <a:xfrm>
+            <a:off x="394855" y="2183463"/>
+            <a:ext cx="3667990" cy="470139"/>
+          </a:xfrm>
+          <a:prstGeom prst="rect">
+            <a:avLst/>
+          </a:prstGeom>
+          <a:noFill/>
+          <a:ln>
+            <a:solidFill>
+              <a:schemeClr val="tx1"/>
+            </a:solidFill>
+          </a:ln>
+        </p:spPr>
+        <p:style>
+          <a:lnRef idx="2">
+            <a:schemeClr val="accent1">
+              <a:shade val="50000"/>
+            </a:schemeClr>
+          </a:lnRef>
+          <a:fillRef idx="1">
+            <a:schemeClr val="accent1"/>
+          </a:fillRef>
+          <a:effectRef idx="0">
+            <a:schemeClr val="accent1"/>
+          </a:effectRef>
+          <a:fontRef idx="minor">
+            <a:schemeClr val="lt1"/>
+          </a:fontRef>
+        </p:style>
+        <p:txBody>
+          <a:bodyPr rtlCol="0" anchor="ctr"/>
+          <a:lstStyle/>
+          <a:p>
+            <a:r>
+              <a:rPr lang="de-CH" sz="1400" b="1" dirty="0">
+                <a:solidFill>
+                  <a:schemeClr val="tx1"/>
+                </a:solidFill>
+                <a:latin typeface="Arial" panose="020B0604020202020204" pitchFamily="34" charset="0"/>
+                <a:cs typeface="Arial" panose="020B0604020202020204" pitchFamily="34" charset="0"/>
+              </a:rPr>
+              <a:t>Style </a:t>
+            </a:r>
+            <a:r>
+              <a:rPr lang="de-CH" sz="1400" b="1" dirty="0" err="1">
+                <a:solidFill>
+                  <a:schemeClr val="tx1"/>
+                </a:solidFill>
+                <a:latin typeface="Arial" panose="020B0604020202020204" pitchFamily="34" charset="0"/>
+                <a:cs typeface="Arial" panose="020B0604020202020204" pitchFamily="34" charset="0"/>
+              </a:rPr>
+              <a:t>data</a:t>
+            </a:r>
+            <a:r>
+              <a:rPr lang="de-CH" sz="1400" b="1" dirty="0">
+                <a:solidFill>
+                  <a:schemeClr val="tx1"/>
+                </a:solidFill>
+                <a:latin typeface="Arial" panose="020B0604020202020204" pitchFamily="34" charset="0"/>
+                <a:cs typeface="Arial" panose="020B0604020202020204" pitchFamily="34" charset="0"/>
+              </a:rPr>
+              <a:t> </a:t>
+            </a:r>
+            <a:r>
+              <a:rPr lang="de-CH" sz="1400" b="1" dirty="0" err="1">
+                <a:solidFill>
+                  <a:schemeClr val="tx1"/>
+                </a:solidFill>
+                <a:latin typeface="Arial" panose="020B0604020202020204" pitchFamily="34" charset="0"/>
+                <a:cs typeface="Arial" panose="020B0604020202020204" pitchFamily="34" charset="0"/>
+              </a:rPr>
+              <a:t>for</a:t>
+            </a:r>
+            <a:r>
+              <a:rPr lang="de-CH" sz="1400" b="1" dirty="0">
+                <a:solidFill>
+                  <a:schemeClr val="tx1"/>
+                </a:solidFill>
+                <a:latin typeface="Arial" panose="020B0604020202020204" pitchFamily="34" charset="0"/>
+                <a:cs typeface="Arial" panose="020B0604020202020204" pitchFamily="34" charset="0"/>
+              </a:rPr>
+              <a:t> </a:t>
+            </a:r>
+            <a:r>
+              <a:rPr lang="de-CH" sz="1400" b="1" dirty="0" err="1">
+                <a:solidFill>
+                  <a:schemeClr val="tx1"/>
+                </a:solidFill>
+                <a:latin typeface="Arial" panose="020B0604020202020204" pitchFamily="34" charset="0"/>
+                <a:cs typeface="Arial" panose="020B0604020202020204" pitchFamily="34" charset="0"/>
+              </a:rPr>
+              <a:t>the</a:t>
+            </a:r>
+            <a:r>
+              <a:rPr lang="de-CH" sz="1400" b="1" dirty="0">
+                <a:solidFill>
+                  <a:schemeClr val="tx1"/>
+                </a:solidFill>
+                <a:latin typeface="Arial" panose="020B0604020202020204" pitchFamily="34" charset="0"/>
+                <a:cs typeface="Arial" panose="020B0604020202020204" pitchFamily="34" charset="0"/>
+              </a:rPr>
+              <a:t> </a:t>
+            </a:r>
+            <a:r>
+              <a:rPr lang="de-CH" sz="1400" b="1" dirty="0" err="1">
+                <a:solidFill>
+                  <a:schemeClr val="tx1"/>
+                </a:solidFill>
+                <a:latin typeface="Arial" panose="020B0604020202020204" pitchFamily="34" charset="0"/>
+                <a:cs typeface="Arial" panose="020B0604020202020204" pitchFamily="34" charset="0"/>
+              </a:rPr>
+              <a:t>name</a:t>
+            </a:r>
+            <a:r>
+              <a:rPr lang="de-CH" sz="1400" b="1" dirty="0">
+                <a:solidFill>
+                  <a:schemeClr val="tx1"/>
+                </a:solidFill>
+                <a:latin typeface="Arial" panose="020B0604020202020204" pitchFamily="34" charset="0"/>
+                <a:cs typeface="Arial" panose="020B0604020202020204" pitchFamily="34" charset="0"/>
+              </a:rPr>
+              <a:t>/ticket </a:t>
+            </a:r>
+            <a:r>
+              <a:rPr lang="de-CH" sz="1400" b="1" dirty="0" err="1">
+                <a:solidFill>
+                  <a:schemeClr val="tx1"/>
+                </a:solidFill>
+                <a:latin typeface="Arial" panose="020B0604020202020204" pitchFamily="34" charset="0"/>
+                <a:cs typeface="Arial" panose="020B0604020202020204" pitchFamily="34" charset="0"/>
+              </a:rPr>
+              <a:t>cards</a:t>
+            </a:r>
+            <a:endParaRPr lang="de-CH" sz="1400" b="1" dirty="0">
+              <a:solidFill>
+                <a:schemeClr val="tx1"/>
+              </a:solidFill>
+              <a:latin typeface="Arial" panose="020B0604020202020204" pitchFamily="34" charset="0"/>
+              <a:cs typeface="Arial" panose="020B0604020202020204" pitchFamily="34" charset="0"/>
+            </a:endParaRPr>
+          </a:p>
+        </p:txBody>
+      </p:sp>
+      <p:sp>
+        <p:nvSpPr>
+          <p:cNvPr id="12" name="Rechteck 11">
+            <a:extLst>
+              <a:ext uri="{FF2B5EF4-FFF2-40B4-BE49-F238E27FC236}">
+                <a16:creationId xmlns:a16="http://schemas.microsoft.com/office/drawing/2014/main" id="{580BF2ED-06BA-6F51-AA49-D99BF0E12856}"/>
+              </a:ext>
+            </a:extLst>
+          </p:cNvPr>
+          <p:cNvSpPr/>
+          <p:nvPr/>
+        </p:nvSpPr>
+        <p:spPr>
+          <a:xfrm>
+            <a:off x="394855" y="2648012"/>
+            <a:ext cx="3667990" cy="961495"/>
+          </a:xfrm>
+          <a:prstGeom prst="rect">
+            <a:avLst/>
+          </a:prstGeom>
+          <a:noFill/>
+          <a:ln>
+            <a:solidFill>
+              <a:schemeClr val="tx1"/>
+            </a:solidFill>
+          </a:ln>
+        </p:spPr>
+        <p:style>
+          <a:lnRef idx="2">
+            <a:schemeClr val="accent1">
+              <a:shade val="50000"/>
+            </a:schemeClr>
+          </a:lnRef>
+          <a:fillRef idx="1">
+            <a:schemeClr val="accent1"/>
+          </a:fillRef>
+          <a:effectRef idx="0">
+            <a:schemeClr val="accent1"/>
+          </a:effectRef>
+          <a:fontRef idx="minor">
+            <a:schemeClr val="lt1"/>
+          </a:fontRef>
+        </p:style>
+        <p:txBody>
+          <a:bodyPr rtlCol="0" anchor="ctr"/>
+          <a:lstStyle/>
+          <a:p>
+            <a:r>
+              <a:rPr lang="de-CH" sz="1400" b="1" dirty="0" err="1">
+                <a:solidFill>
+                  <a:schemeClr val="tx1"/>
+                </a:solidFill>
+                <a:latin typeface="Arial" panose="020B0604020202020204" pitchFamily="34" charset="0"/>
+                <a:cs typeface="Arial" panose="020B0604020202020204" pitchFamily="34" charset="0"/>
+              </a:rPr>
+              <a:t>styleHtmlString</a:t>
+            </a:r>
+            <a:r>
+              <a:rPr lang="de-CH" sz="1400" b="1" dirty="0">
+                <a:solidFill>
+                  <a:schemeClr val="tx1"/>
+                </a:solidFill>
+                <a:latin typeface="Arial" panose="020B0604020202020204" pitchFamily="34" charset="0"/>
+                <a:cs typeface="Arial" panose="020B0604020202020204" pitchFamily="34" charset="0"/>
+              </a:rPr>
+              <a:t>()</a:t>
+            </a:r>
+          </a:p>
+          <a:p>
+            <a:r>
+              <a:rPr lang="en-US" sz="1400" b="1" i="1" dirty="0">
+                <a:solidFill>
+                  <a:schemeClr val="tx1"/>
+                </a:solidFill>
+                <a:latin typeface="Arial" panose="020B0604020202020204" pitchFamily="34" charset="0"/>
+                <a:cs typeface="Arial" panose="020B0604020202020204" pitchFamily="34" charset="0"/>
+              </a:rPr>
+              <a:t>Returns the HTML &lt;header&gt; string defining the style of the cards </a:t>
+            </a:r>
+            <a:endParaRPr lang="de-CH" sz="1400" b="1" i="1" dirty="0">
+              <a:solidFill>
+                <a:schemeClr val="tx1"/>
+              </a:solidFill>
+              <a:latin typeface="Arial" panose="020B0604020202020204" pitchFamily="34" charset="0"/>
+              <a:cs typeface="Arial" panose="020B0604020202020204" pitchFamily="34" charset="0"/>
+            </a:endParaRPr>
+          </a:p>
+        </p:txBody>
+      </p:sp>
     </p:spTree>
     <p:extLst>
       <p:ext uri="{BB962C8B-B14F-4D97-AF65-F5344CB8AC3E}">
-        <p14:creationId xmlns:p14="http://schemas.microsoft.com/office/powerpoint/2010/main" val="3525587389"/>
+        <p14:creationId xmlns:p14="http://schemas.microsoft.com/office/powerpoint/2010/main" val="2839534564"/>
       </p:ext>
     </p:extLst>
   </p:cSld>
@@ -5360,6 +7019,2373 @@
 </file>
 
 <file path=ppt/slides/slide3.xml><?xml version="1.0" encoding="utf-8"?>
+<p:sld xmlns:a="http://schemas.openxmlformats.org/drawingml/2006/main" xmlns:r="http://schemas.openxmlformats.org/officeDocument/2006/relationships" xmlns:p="http://schemas.openxmlformats.org/presentationml/2006/main">
+  <p:cSld>
+    <p:spTree>
+      <p:nvGrpSpPr>
+        <p:cNvPr id="1" name=""/>
+        <p:cNvGrpSpPr/>
+        <p:nvPr/>
+      </p:nvGrpSpPr>
+      <p:grpSpPr>
+        <a:xfrm>
+          <a:off x="0" y="0"/>
+          <a:ext cx="0" cy="0"/>
+          <a:chOff x="0" y="0"/>
+          <a:chExt cx="0" cy="0"/>
+        </a:xfrm>
+      </p:grpSpPr>
+      <p:sp>
+        <p:nvSpPr>
+          <p:cNvPr id="2" name="Textfeld 1">
+            <a:extLst>
+              <a:ext uri="{FF2B5EF4-FFF2-40B4-BE49-F238E27FC236}">
+                <a16:creationId xmlns:a16="http://schemas.microsoft.com/office/drawing/2014/main" id="{94B31F23-BA0A-6A89-0DE8-72155A1AEE36}"/>
+              </a:ext>
+            </a:extLst>
+          </p:cNvPr>
+          <p:cNvSpPr txBox="1"/>
+          <p:nvPr/>
+        </p:nvSpPr>
+        <p:spPr>
+          <a:xfrm>
+            <a:off x="0" y="108741"/>
+            <a:ext cx="12192000" cy="369332"/>
+          </a:xfrm>
+          <a:prstGeom prst="rect">
+            <a:avLst/>
+          </a:prstGeom>
+          <a:noFill/>
+        </p:spPr>
+        <p:txBody>
+          <a:bodyPr wrap="square">
+            <a:spAutoFit/>
+          </a:bodyPr>
+          <a:lstStyle/>
+          <a:p>
+            <a:pPr algn="ctr"/>
+            <a:r>
+              <a:rPr lang="de-CH" b="1" dirty="0">
+                <a:latin typeface="Arial" panose="020B0604020202020204" pitchFamily="34" charset="0"/>
+                <a:cs typeface="Arial" panose="020B0604020202020204" pitchFamily="34" charset="0"/>
+              </a:rPr>
+              <a:t>Reservation </a:t>
+            </a:r>
+            <a:r>
+              <a:rPr lang="de-CH" b="1" dirty="0" err="1">
+                <a:latin typeface="Arial" panose="020B0604020202020204" pitchFamily="34" charset="0"/>
+                <a:cs typeface="Arial" panose="020B0604020202020204" pitchFamily="34" charset="0"/>
+              </a:rPr>
+              <a:t>cards</a:t>
+            </a:r>
+            <a:r>
+              <a:rPr lang="de-CH" b="1" dirty="0">
+                <a:latin typeface="Arial" panose="020B0604020202020204" pitchFamily="34" charset="0"/>
+                <a:cs typeface="Arial" panose="020B0604020202020204" pitchFamily="34" charset="0"/>
+              </a:rPr>
+              <a:t> </a:t>
+            </a:r>
+            <a:r>
+              <a:rPr lang="de-CH" b="1" dirty="0" err="1">
+                <a:latin typeface="Arial" panose="020B0604020202020204" pitchFamily="34" charset="0"/>
+                <a:cs typeface="Arial" panose="020B0604020202020204" pitchFamily="34" charset="0"/>
+              </a:rPr>
+              <a:t>Application</a:t>
+            </a:r>
+            <a:r>
+              <a:rPr lang="de-CH" b="1" dirty="0">
+                <a:latin typeface="Arial" panose="020B0604020202020204" pitchFamily="34" charset="0"/>
+                <a:cs typeface="Arial" panose="020B0604020202020204" pitchFamily="34" charset="0"/>
+              </a:rPr>
+              <a:t> Reservation Admin</a:t>
+            </a:r>
+          </a:p>
+        </p:txBody>
+      </p:sp>
+      <p:pic>
+        <p:nvPicPr>
+          <p:cNvPr id="4" name="Grafik 3">
+            <a:extLst>
+              <a:ext uri="{FF2B5EF4-FFF2-40B4-BE49-F238E27FC236}">
+                <a16:creationId xmlns:a16="http://schemas.microsoft.com/office/drawing/2014/main" id="{C7534687-C8C7-0D06-2D5B-CF7DB9CD19F3}"/>
+              </a:ext>
+            </a:extLst>
+          </p:cNvPr>
+          <p:cNvPicPr>
+            <a:picLocks noChangeAspect="1"/>
+          </p:cNvPicPr>
+          <p:nvPr/>
+        </p:nvPicPr>
+        <p:blipFill>
+          <a:blip r:embed="rId2"/>
+          <a:stretch>
+            <a:fillRect/>
+          </a:stretch>
+        </p:blipFill>
+        <p:spPr>
+          <a:xfrm>
+            <a:off x="879088" y="1128384"/>
+            <a:ext cx="2276190" cy="904762"/>
+          </a:xfrm>
+          <a:prstGeom prst="rect">
+            <a:avLst/>
+          </a:prstGeom>
+        </p:spPr>
+      </p:pic>
+      <p:sp>
+        <p:nvSpPr>
+          <p:cNvPr id="5" name="Rechteck 4">
+            <a:extLst>
+              <a:ext uri="{FF2B5EF4-FFF2-40B4-BE49-F238E27FC236}">
+                <a16:creationId xmlns:a16="http://schemas.microsoft.com/office/drawing/2014/main" id="{C4881A30-E4F3-25B6-AEAD-7B4EE3169AE8}"/>
+              </a:ext>
+            </a:extLst>
+          </p:cNvPr>
+          <p:cNvSpPr/>
+          <p:nvPr/>
+        </p:nvSpPr>
+        <p:spPr>
+          <a:xfrm>
+            <a:off x="3786940" y="1436290"/>
+            <a:ext cx="2799757" cy="1992709"/>
+          </a:xfrm>
+          <a:prstGeom prst="rect">
+            <a:avLst/>
+          </a:prstGeom>
+          <a:noFill/>
+          <a:ln>
+            <a:solidFill>
+              <a:schemeClr val="tx1"/>
+            </a:solidFill>
+          </a:ln>
+        </p:spPr>
+        <p:style>
+          <a:lnRef idx="2">
+            <a:schemeClr val="accent1">
+              <a:shade val="50000"/>
+            </a:schemeClr>
+          </a:lnRef>
+          <a:fillRef idx="1">
+            <a:schemeClr val="accent1"/>
+          </a:fillRef>
+          <a:effectRef idx="0">
+            <a:schemeClr val="accent1"/>
+          </a:effectRef>
+          <a:fontRef idx="minor">
+            <a:schemeClr val="lt1"/>
+          </a:fontRef>
+        </p:style>
+        <p:txBody>
+          <a:bodyPr rtlCol="0" anchor="ctr"/>
+          <a:lstStyle/>
+          <a:p>
+            <a:pPr algn="ctr"/>
+            <a:r>
+              <a:rPr lang="de-CH" sz="1400" b="1" dirty="0" err="1">
+                <a:solidFill>
+                  <a:schemeClr val="tx1"/>
+                </a:solidFill>
+                <a:latin typeface="Arial" panose="020B0604020202020204" pitchFamily="34" charset="0"/>
+                <a:cs typeface="Arial" panose="020B0604020202020204" pitchFamily="34" charset="0"/>
+              </a:rPr>
+              <a:t>openPageReservationPrint</a:t>
+            </a:r>
+            <a:endParaRPr lang="de-CH" sz="1400" b="1" dirty="0">
+              <a:solidFill>
+                <a:schemeClr val="tx1"/>
+              </a:solidFill>
+              <a:latin typeface="Arial" panose="020B0604020202020204" pitchFamily="34" charset="0"/>
+              <a:cs typeface="Arial" panose="020B0604020202020204" pitchFamily="34" charset="0"/>
+            </a:endParaRPr>
+          </a:p>
+          <a:p>
+            <a:endParaRPr lang="de-CH" sz="1000" b="1" dirty="0">
+              <a:solidFill>
+                <a:schemeClr val="tx1"/>
+              </a:solidFill>
+              <a:latin typeface="Arial" panose="020B0604020202020204" pitchFamily="34" charset="0"/>
+              <a:cs typeface="Arial" panose="020B0604020202020204" pitchFamily="34" charset="0"/>
+            </a:endParaRPr>
+          </a:p>
+          <a:p>
+            <a:endParaRPr lang="de-CH" sz="1000" b="1" dirty="0">
+              <a:solidFill>
+                <a:schemeClr val="tx1"/>
+              </a:solidFill>
+              <a:latin typeface="Arial" panose="020B0604020202020204" pitchFamily="34" charset="0"/>
+              <a:cs typeface="Arial" panose="020B0604020202020204" pitchFamily="34" charset="0"/>
+            </a:endParaRPr>
+          </a:p>
+          <a:p>
+            <a:r>
+              <a:rPr lang="de-CH" sz="1000" b="1" dirty="0" err="1">
+                <a:solidFill>
+                  <a:schemeClr val="tx1"/>
+                </a:solidFill>
+                <a:latin typeface="Arial" panose="020B0604020202020204" pitchFamily="34" charset="0"/>
+                <a:cs typeface="Arial" panose="020B0604020202020204" pitchFamily="34" charset="0"/>
+              </a:rPr>
+              <a:t>Get</a:t>
+            </a:r>
+            <a:r>
+              <a:rPr lang="de-CH" sz="1000" b="1" dirty="0">
+                <a:solidFill>
+                  <a:schemeClr val="tx1"/>
+                </a:solidFill>
+                <a:latin typeface="Arial" panose="020B0604020202020204" pitchFamily="34" charset="0"/>
+                <a:cs typeface="Arial" panose="020B0604020202020204" pitchFamily="34" charset="0"/>
+              </a:rPr>
+              <a:t> HTML </a:t>
+            </a:r>
+            <a:r>
+              <a:rPr lang="de-CH" sz="1000" b="1" dirty="0" err="1">
+                <a:solidFill>
+                  <a:schemeClr val="tx1"/>
+                </a:solidFill>
+                <a:latin typeface="Arial" panose="020B0604020202020204" pitchFamily="34" charset="0"/>
+                <a:cs typeface="Arial" panose="020B0604020202020204" pitchFamily="34" charset="0"/>
+              </a:rPr>
+              <a:t>string</a:t>
+            </a:r>
+            <a:r>
+              <a:rPr lang="de-CH" sz="1000" b="1" dirty="0">
+                <a:solidFill>
+                  <a:schemeClr val="tx1"/>
+                </a:solidFill>
+                <a:latin typeface="Arial" panose="020B0604020202020204" pitchFamily="34" charset="0"/>
+                <a:cs typeface="Arial" panose="020B0604020202020204" pitchFamily="34" charset="0"/>
+              </a:rPr>
+              <a:t> </a:t>
+            </a:r>
+            <a:r>
+              <a:rPr lang="de-CH" sz="1000" b="1" dirty="0" err="1">
+                <a:solidFill>
+                  <a:schemeClr val="tx1"/>
+                </a:solidFill>
+                <a:latin typeface="Arial" panose="020B0604020202020204" pitchFamily="34" charset="0"/>
+                <a:cs typeface="Arial" panose="020B0604020202020204" pitchFamily="34" charset="0"/>
+              </a:rPr>
+              <a:t>for</a:t>
+            </a:r>
+            <a:r>
+              <a:rPr lang="de-CH" sz="1000" b="1" dirty="0">
+                <a:solidFill>
+                  <a:schemeClr val="tx1"/>
+                </a:solidFill>
+                <a:latin typeface="Arial" panose="020B0604020202020204" pitchFamily="34" charset="0"/>
+                <a:cs typeface="Arial" panose="020B0604020202020204" pitchFamily="34" charset="0"/>
+              </a:rPr>
+              <a:t> </a:t>
+            </a:r>
+            <a:r>
+              <a:rPr lang="de-CH" sz="1000" b="1" dirty="0" err="1">
+                <a:solidFill>
+                  <a:schemeClr val="tx1"/>
+                </a:solidFill>
+                <a:latin typeface="Arial" panose="020B0604020202020204" pitchFamily="34" charset="0"/>
+                <a:cs typeface="Arial" panose="020B0604020202020204" pitchFamily="34" charset="0"/>
+              </a:rPr>
+              <a:t>seat</a:t>
+            </a:r>
+            <a:r>
+              <a:rPr lang="de-CH" sz="1000" b="1" dirty="0">
+                <a:solidFill>
+                  <a:schemeClr val="tx1"/>
+                </a:solidFill>
+                <a:latin typeface="Arial" panose="020B0604020202020204" pitchFamily="34" charset="0"/>
+                <a:cs typeface="Arial" panose="020B0604020202020204" pitchFamily="34" charset="0"/>
+              </a:rPr>
+              <a:t> plan </a:t>
+            </a:r>
+            <a:r>
+              <a:rPr lang="de-CH" sz="1000" b="1" dirty="0" err="1">
+                <a:solidFill>
+                  <a:schemeClr val="tx1"/>
+                </a:solidFill>
+                <a:latin typeface="Arial" panose="020B0604020202020204" pitchFamily="34" charset="0"/>
+                <a:cs typeface="Arial" panose="020B0604020202020204" pitchFamily="34" charset="0"/>
+              </a:rPr>
+              <a:t>with</a:t>
+            </a:r>
+            <a:r>
+              <a:rPr lang="de-CH" sz="1000" b="1" dirty="0">
+                <a:solidFill>
+                  <a:schemeClr val="tx1"/>
+                </a:solidFill>
+                <a:latin typeface="Arial" panose="020B0604020202020204" pitchFamily="34" charset="0"/>
+                <a:cs typeface="Arial" panose="020B0604020202020204" pitchFamily="34" charset="0"/>
+              </a:rPr>
+              <a:t> </a:t>
+            </a:r>
+            <a:r>
+              <a:rPr lang="de-CH" sz="1000" b="1" dirty="0" err="1">
+                <a:solidFill>
+                  <a:schemeClr val="tx1"/>
+                </a:solidFill>
+                <a:latin typeface="Arial" panose="020B0604020202020204" pitchFamily="34" charset="0"/>
+                <a:cs typeface="Arial" panose="020B0604020202020204" pitchFamily="34" charset="0"/>
+              </a:rPr>
+              <a:t>names</a:t>
+            </a:r>
+            <a:endParaRPr lang="de-CH" sz="1000" b="1" dirty="0">
+              <a:solidFill>
+                <a:schemeClr val="tx1"/>
+              </a:solidFill>
+              <a:latin typeface="Arial" panose="020B0604020202020204" pitchFamily="34" charset="0"/>
+              <a:cs typeface="Arial" panose="020B0604020202020204" pitchFamily="34" charset="0"/>
+            </a:endParaRPr>
+          </a:p>
+          <a:p>
+            <a:endParaRPr lang="de-CH" sz="1000" b="1" dirty="0">
+              <a:solidFill>
+                <a:schemeClr val="tx1"/>
+              </a:solidFill>
+              <a:latin typeface="Arial" panose="020B0604020202020204" pitchFamily="34" charset="0"/>
+              <a:cs typeface="Arial" panose="020B0604020202020204" pitchFamily="34" charset="0"/>
+            </a:endParaRPr>
+          </a:p>
+          <a:p>
+            <a:endParaRPr lang="de-CH" sz="1000" b="1" dirty="0">
+              <a:solidFill>
+                <a:schemeClr val="tx1"/>
+              </a:solidFill>
+              <a:latin typeface="Arial" panose="020B0604020202020204" pitchFamily="34" charset="0"/>
+              <a:cs typeface="Arial" panose="020B0604020202020204" pitchFamily="34" charset="0"/>
+            </a:endParaRPr>
+          </a:p>
+          <a:p>
+            <a:r>
+              <a:rPr lang="de-CH" sz="1000" b="1" dirty="0" err="1">
+                <a:solidFill>
+                  <a:schemeClr val="tx1"/>
+                </a:solidFill>
+                <a:latin typeface="Arial" panose="020B0604020202020204" pitchFamily="34" charset="0"/>
+                <a:cs typeface="Arial" panose="020B0604020202020204" pitchFamily="34" charset="0"/>
+              </a:rPr>
+              <a:t>Get</a:t>
+            </a:r>
+            <a:r>
+              <a:rPr lang="de-CH" sz="1000" b="1" dirty="0">
+                <a:solidFill>
+                  <a:schemeClr val="tx1"/>
+                </a:solidFill>
+                <a:latin typeface="Arial" panose="020B0604020202020204" pitchFamily="34" charset="0"/>
+                <a:cs typeface="Arial" panose="020B0604020202020204" pitchFamily="34" charset="0"/>
+              </a:rPr>
+              <a:t> HTML </a:t>
+            </a:r>
+            <a:r>
+              <a:rPr lang="de-CH" sz="1000" b="1" dirty="0" err="1">
+                <a:solidFill>
+                  <a:schemeClr val="tx1"/>
+                </a:solidFill>
+                <a:latin typeface="Arial" panose="020B0604020202020204" pitchFamily="34" charset="0"/>
+                <a:cs typeface="Arial" panose="020B0604020202020204" pitchFamily="34" charset="0"/>
+              </a:rPr>
+              <a:t>strings</a:t>
+            </a:r>
+            <a:r>
+              <a:rPr lang="de-CH" sz="1000" b="1" dirty="0">
+                <a:solidFill>
+                  <a:schemeClr val="tx1"/>
+                </a:solidFill>
+                <a:latin typeface="Arial" panose="020B0604020202020204" pitchFamily="34" charset="0"/>
+                <a:cs typeface="Arial" panose="020B0604020202020204" pitchFamily="34" charset="0"/>
+              </a:rPr>
+              <a:t> (Table) </a:t>
+            </a:r>
+            <a:r>
+              <a:rPr lang="de-CH" sz="1000" b="1" dirty="0" err="1">
+                <a:solidFill>
+                  <a:schemeClr val="tx1"/>
+                </a:solidFill>
+                <a:latin typeface="Arial" panose="020B0604020202020204" pitchFamily="34" charset="0"/>
+                <a:cs typeface="Arial" panose="020B0604020202020204" pitchFamily="34" charset="0"/>
+              </a:rPr>
+              <a:t>for</a:t>
+            </a:r>
+            <a:r>
+              <a:rPr lang="de-CH" sz="1000" b="1" dirty="0">
+                <a:solidFill>
+                  <a:schemeClr val="tx1"/>
+                </a:solidFill>
+                <a:latin typeface="Arial" panose="020B0604020202020204" pitchFamily="34" charset="0"/>
+                <a:cs typeface="Arial" panose="020B0604020202020204" pitchFamily="34" charset="0"/>
+              </a:rPr>
+              <a:t> </a:t>
+            </a:r>
+            <a:r>
+              <a:rPr lang="de-CH" sz="1000" b="1" dirty="0" err="1">
+                <a:solidFill>
+                  <a:schemeClr val="tx1"/>
+                </a:solidFill>
+                <a:latin typeface="Arial" panose="020B0604020202020204" pitchFamily="34" charset="0"/>
+                <a:cs typeface="Arial" panose="020B0604020202020204" pitchFamily="34" charset="0"/>
+              </a:rPr>
+              <a:t>the</a:t>
+            </a:r>
+            <a:r>
+              <a:rPr lang="de-CH" sz="1000" b="1" dirty="0">
+                <a:solidFill>
+                  <a:schemeClr val="tx1"/>
+                </a:solidFill>
+                <a:latin typeface="Arial" panose="020B0604020202020204" pitchFamily="34" charset="0"/>
+                <a:cs typeface="Arial" panose="020B0604020202020204" pitchFamily="34" charset="0"/>
+              </a:rPr>
+              <a:t> </a:t>
+            </a:r>
+            <a:r>
+              <a:rPr lang="de-CH" sz="1000" b="1" dirty="0" err="1">
+                <a:solidFill>
+                  <a:schemeClr val="tx1"/>
+                </a:solidFill>
+                <a:latin typeface="Arial" panose="020B0604020202020204" pitchFamily="34" charset="0"/>
+                <a:cs typeface="Arial" panose="020B0604020202020204" pitchFamily="34" charset="0"/>
+              </a:rPr>
+              <a:t>cards</a:t>
+            </a:r>
+            <a:endParaRPr lang="de-CH" sz="1000" b="1" dirty="0">
+              <a:solidFill>
+                <a:schemeClr val="tx1"/>
+              </a:solidFill>
+              <a:latin typeface="Arial" panose="020B0604020202020204" pitchFamily="34" charset="0"/>
+              <a:cs typeface="Arial" panose="020B0604020202020204" pitchFamily="34" charset="0"/>
+            </a:endParaRPr>
+          </a:p>
+          <a:p>
+            <a:endParaRPr lang="de-CH" sz="1000" b="1" dirty="0">
+              <a:solidFill>
+                <a:schemeClr val="tx1"/>
+              </a:solidFill>
+              <a:latin typeface="Arial" panose="020B0604020202020204" pitchFamily="34" charset="0"/>
+              <a:cs typeface="Arial" panose="020B0604020202020204" pitchFamily="34" charset="0"/>
+            </a:endParaRPr>
+          </a:p>
+          <a:p>
+            <a:r>
+              <a:rPr lang="de-CH" sz="1000" b="1" dirty="0" err="1">
+                <a:solidFill>
+                  <a:schemeClr val="tx1"/>
+                </a:solidFill>
+                <a:latin typeface="Arial" panose="020B0604020202020204" pitchFamily="34" charset="0"/>
+                <a:cs typeface="Arial" panose="020B0604020202020204" pitchFamily="34" charset="0"/>
+              </a:rPr>
+              <a:t>Window.open</a:t>
+            </a:r>
+            <a:r>
+              <a:rPr lang="de-CH" sz="1000" b="1" dirty="0">
+                <a:solidFill>
+                  <a:schemeClr val="tx1"/>
+                </a:solidFill>
+                <a:latin typeface="Arial" panose="020B0604020202020204" pitchFamily="34" charset="0"/>
+                <a:cs typeface="Arial" panose="020B0604020202020204" pitchFamily="34" charset="0"/>
+              </a:rPr>
+              <a:t>(ReservationPrint.htm)</a:t>
+            </a:r>
+          </a:p>
+          <a:p>
+            <a:endParaRPr lang="de-CH" sz="1000" b="1" dirty="0">
+              <a:solidFill>
+                <a:schemeClr val="tx1"/>
+              </a:solidFill>
+              <a:latin typeface="Arial" panose="020B0604020202020204" pitchFamily="34" charset="0"/>
+              <a:cs typeface="Arial" panose="020B0604020202020204" pitchFamily="34" charset="0"/>
+            </a:endParaRPr>
+          </a:p>
+          <a:p>
+            <a:r>
+              <a:rPr lang="de-CH" sz="1000" b="1" dirty="0">
+                <a:solidFill>
+                  <a:schemeClr val="tx1"/>
+                </a:solidFill>
+                <a:latin typeface="Arial" panose="020B0604020202020204" pitchFamily="34" charset="0"/>
+                <a:cs typeface="Arial" panose="020B0604020202020204" pitchFamily="34" charset="0"/>
+              </a:rPr>
+              <a:t>Pass </a:t>
+            </a:r>
+            <a:r>
+              <a:rPr lang="de-CH" sz="1000" b="1" dirty="0" err="1">
+                <a:solidFill>
+                  <a:schemeClr val="tx1"/>
+                </a:solidFill>
+                <a:latin typeface="Arial" panose="020B0604020202020204" pitchFamily="34" charset="0"/>
+                <a:cs typeface="Arial" panose="020B0604020202020204" pitchFamily="34" charset="0"/>
+              </a:rPr>
+              <a:t>data</a:t>
+            </a:r>
+            <a:r>
+              <a:rPr lang="de-CH" sz="1000" b="1" dirty="0">
+                <a:solidFill>
+                  <a:schemeClr val="tx1"/>
+                </a:solidFill>
+                <a:latin typeface="Arial" panose="020B0604020202020204" pitchFamily="34" charset="0"/>
+                <a:cs typeface="Arial" panose="020B0604020202020204" pitchFamily="34" charset="0"/>
+              </a:rPr>
+              <a:t> </a:t>
+            </a:r>
+            <a:r>
+              <a:rPr lang="de-CH" sz="1000" b="1" dirty="0" err="1">
+                <a:solidFill>
+                  <a:schemeClr val="tx1"/>
+                </a:solidFill>
+                <a:latin typeface="Arial" panose="020B0604020202020204" pitchFamily="34" charset="0"/>
+                <a:cs typeface="Arial" panose="020B0604020202020204" pitchFamily="34" charset="0"/>
+              </a:rPr>
+              <a:t>to</a:t>
+            </a:r>
+            <a:r>
+              <a:rPr lang="de-CH" sz="1000" b="1" dirty="0">
+                <a:solidFill>
+                  <a:schemeClr val="tx1"/>
+                </a:solidFill>
+                <a:latin typeface="Arial" panose="020B0604020202020204" pitchFamily="34" charset="0"/>
+                <a:cs typeface="Arial" panose="020B0604020202020204" pitchFamily="34" charset="0"/>
+              </a:rPr>
+              <a:t> </a:t>
+            </a:r>
+            <a:r>
+              <a:rPr lang="de-CH" sz="1000" b="1" dirty="0" err="1">
+                <a:solidFill>
+                  <a:schemeClr val="tx1"/>
+                </a:solidFill>
+                <a:latin typeface="Arial" panose="020B0604020202020204" pitchFamily="34" charset="0"/>
+                <a:cs typeface="Arial" panose="020B0604020202020204" pitchFamily="34" charset="0"/>
+              </a:rPr>
+              <a:t>the</a:t>
+            </a:r>
+            <a:r>
+              <a:rPr lang="de-CH" sz="1000" b="1" dirty="0">
+                <a:solidFill>
+                  <a:schemeClr val="tx1"/>
+                </a:solidFill>
+                <a:latin typeface="Arial" panose="020B0604020202020204" pitchFamily="34" charset="0"/>
+                <a:cs typeface="Arial" panose="020B0604020202020204" pitchFamily="34" charset="0"/>
+              </a:rPr>
+              <a:t> </a:t>
+            </a:r>
+            <a:r>
+              <a:rPr lang="de-CH" sz="1000" b="1" dirty="0" err="1">
+                <a:solidFill>
+                  <a:schemeClr val="tx1"/>
+                </a:solidFill>
+                <a:latin typeface="Arial" panose="020B0604020202020204" pitchFamily="34" charset="0"/>
+                <a:cs typeface="Arial" panose="020B0604020202020204" pitchFamily="34" charset="0"/>
+              </a:rPr>
+              <a:t>opened</a:t>
+            </a:r>
+            <a:r>
+              <a:rPr lang="de-CH" sz="1000" b="1" dirty="0">
+                <a:solidFill>
+                  <a:schemeClr val="tx1"/>
+                </a:solidFill>
+                <a:latin typeface="Arial" panose="020B0604020202020204" pitchFamily="34" charset="0"/>
+                <a:cs typeface="Arial" panose="020B0604020202020204" pitchFamily="34" charset="0"/>
+              </a:rPr>
+              <a:t> </a:t>
+            </a:r>
+            <a:r>
+              <a:rPr lang="de-CH" sz="1000" b="1" dirty="0" err="1">
+                <a:solidFill>
+                  <a:schemeClr val="tx1"/>
+                </a:solidFill>
+                <a:latin typeface="Arial" panose="020B0604020202020204" pitchFamily="34" charset="0"/>
+                <a:cs typeface="Arial" panose="020B0604020202020204" pitchFamily="34" charset="0"/>
+              </a:rPr>
+              <a:t>object</a:t>
+            </a:r>
+            <a:r>
+              <a:rPr lang="de-CH" sz="1000" b="1" dirty="0">
+                <a:solidFill>
+                  <a:schemeClr val="tx1"/>
+                </a:solidFill>
+                <a:latin typeface="Arial" panose="020B0604020202020204" pitchFamily="34" charset="0"/>
+                <a:cs typeface="Arial" panose="020B0604020202020204" pitchFamily="34" charset="0"/>
+              </a:rPr>
+              <a:t> and </a:t>
+            </a:r>
+          </a:p>
+          <a:p>
+            <a:r>
+              <a:rPr lang="de-CH" sz="1000" b="1" dirty="0" err="1">
+                <a:solidFill>
+                  <a:schemeClr val="tx1"/>
+                </a:solidFill>
+                <a:latin typeface="Arial" panose="020B0604020202020204" pitchFamily="34" charset="0"/>
+                <a:cs typeface="Arial" panose="020B0604020202020204" pitchFamily="34" charset="0"/>
+              </a:rPr>
+              <a:t>To</a:t>
+            </a:r>
+            <a:r>
+              <a:rPr lang="de-CH" sz="1000" b="1" dirty="0">
+                <a:solidFill>
+                  <a:schemeClr val="tx1"/>
+                </a:solidFill>
+                <a:latin typeface="Arial" panose="020B0604020202020204" pitchFamily="34" charset="0"/>
+                <a:cs typeface="Arial" panose="020B0604020202020204" pitchFamily="34" charset="0"/>
+              </a:rPr>
+              <a:t> </a:t>
+            </a:r>
+            <a:r>
+              <a:rPr lang="de-CH" sz="1000" b="1" dirty="0" err="1">
+                <a:solidFill>
+                  <a:schemeClr val="tx1"/>
+                </a:solidFill>
+                <a:latin typeface="Arial" panose="020B0604020202020204" pitchFamily="34" charset="0"/>
+                <a:cs typeface="Arial" panose="020B0604020202020204" pitchFamily="34" charset="0"/>
+              </a:rPr>
+              <a:t>local</a:t>
+            </a:r>
+            <a:r>
+              <a:rPr lang="de-CH" sz="1000" b="1" dirty="0">
+                <a:solidFill>
+                  <a:schemeClr val="tx1"/>
+                </a:solidFill>
+                <a:latin typeface="Arial" panose="020B0604020202020204" pitchFamily="34" charset="0"/>
+                <a:cs typeface="Arial" panose="020B0604020202020204" pitchFamily="34" charset="0"/>
+              </a:rPr>
+              <a:t> </a:t>
+            </a:r>
+            <a:r>
+              <a:rPr lang="de-CH" sz="1000" b="1" dirty="0" err="1">
+                <a:solidFill>
+                  <a:schemeClr val="tx1"/>
+                </a:solidFill>
+                <a:latin typeface="Arial" panose="020B0604020202020204" pitchFamily="34" charset="0"/>
+                <a:cs typeface="Arial" panose="020B0604020202020204" pitchFamily="34" charset="0"/>
+              </a:rPr>
+              <a:t>storage</a:t>
+            </a:r>
+            <a:endParaRPr lang="de-CH" sz="1000" b="1" dirty="0">
+              <a:solidFill>
+                <a:schemeClr val="tx1"/>
+              </a:solidFill>
+              <a:latin typeface="Arial" panose="020B0604020202020204" pitchFamily="34" charset="0"/>
+              <a:cs typeface="Arial" panose="020B0604020202020204" pitchFamily="34" charset="0"/>
+            </a:endParaRPr>
+          </a:p>
+        </p:txBody>
+      </p:sp>
+      <p:sp>
+        <p:nvSpPr>
+          <p:cNvPr id="6" name="Rechteck 5">
+            <a:extLst>
+              <a:ext uri="{FF2B5EF4-FFF2-40B4-BE49-F238E27FC236}">
+                <a16:creationId xmlns:a16="http://schemas.microsoft.com/office/drawing/2014/main" id="{EB651EB5-C44A-7F89-CEDA-CF6CDE156510}"/>
+              </a:ext>
+            </a:extLst>
+          </p:cNvPr>
+          <p:cNvSpPr/>
+          <p:nvPr/>
+        </p:nvSpPr>
+        <p:spPr>
+          <a:xfrm>
+            <a:off x="7211626" y="884208"/>
+            <a:ext cx="2974904" cy="470139"/>
+          </a:xfrm>
+          <a:prstGeom prst="rect">
+            <a:avLst/>
+          </a:prstGeom>
+          <a:noFill/>
+          <a:ln>
+            <a:solidFill>
+              <a:schemeClr val="tx1"/>
+            </a:solidFill>
+          </a:ln>
+        </p:spPr>
+        <p:style>
+          <a:lnRef idx="2">
+            <a:schemeClr val="accent1">
+              <a:shade val="50000"/>
+            </a:schemeClr>
+          </a:lnRef>
+          <a:fillRef idx="1">
+            <a:schemeClr val="accent1"/>
+          </a:fillRef>
+          <a:effectRef idx="0">
+            <a:schemeClr val="accent1"/>
+          </a:effectRef>
+          <a:fontRef idx="minor">
+            <a:schemeClr val="lt1"/>
+          </a:fontRef>
+        </p:style>
+        <p:txBody>
+          <a:bodyPr rtlCol="0" anchor="ctr"/>
+          <a:lstStyle/>
+          <a:p>
+            <a:pPr algn="ctr"/>
+            <a:r>
+              <a:rPr lang="de-CH" sz="1600" b="1" dirty="0">
+                <a:solidFill>
+                  <a:schemeClr val="tx1"/>
+                </a:solidFill>
+                <a:latin typeface="Arial" panose="020B0604020202020204" pitchFamily="34" charset="0"/>
+                <a:cs typeface="Arial" panose="020B0604020202020204" pitchFamily="34" charset="0"/>
+              </a:rPr>
+              <a:t>ReservationPrint.htm</a:t>
+            </a:r>
+          </a:p>
+        </p:txBody>
+      </p:sp>
+      <p:sp>
+        <p:nvSpPr>
+          <p:cNvPr id="7" name="Rechteck 6">
+            <a:extLst>
+              <a:ext uri="{FF2B5EF4-FFF2-40B4-BE49-F238E27FC236}">
+                <a16:creationId xmlns:a16="http://schemas.microsoft.com/office/drawing/2014/main" id="{D301F0B5-9AB6-6505-1D92-BFA105F73C7B}"/>
+              </a:ext>
+            </a:extLst>
+          </p:cNvPr>
+          <p:cNvSpPr/>
+          <p:nvPr/>
+        </p:nvSpPr>
+        <p:spPr>
+          <a:xfrm>
+            <a:off x="7220253" y="1353841"/>
+            <a:ext cx="2974904" cy="583640"/>
+          </a:xfrm>
+          <a:prstGeom prst="rect">
+            <a:avLst/>
+          </a:prstGeom>
+          <a:noFill/>
+          <a:ln>
+            <a:solidFill>
+              <a:schemeClr val="tx1"/>
+            </a:solidFill>
+          </a:ln>
+        </p:spPr>
+        <p:style>
+          <a:lnRef idx="2">
+            <a:schemeClr val="accent1">
+              <a:shade val="50000"/>
+            </a:schemeClr>
+          </a:lnRef>
+          <a:fillRef idx="1">
+            <a:schemeClr val="accent1"/>
+          </a:fillRef>
+          <a:effectRef idx="0">
+            <a:schemeClr val="accent1"/>
+          </a:effectRef>
+          <a:fontRef idx="minor">
+            <a:schemeClr val="lt1"/>
+          </a:fontRef>
+        </p:style>
+        <p:txBody>
+          <a:bodyPr rtlCol="0" anchor="ctr"/>
+          <a:lstStyle/>
+          <a:p>
+            <a:r>
+              <a:rPr lang="de-CH" sz="1000" b="1" dirty="0">
+                <a:solidFill>
+                  <a:schemeClr val="tx1"/>
+                </a:solidFill>
+                <a:latin typeface="Arial" panose="020B0604020202020204" pitchFamily="34" charset="0"/>
+                <a:cs typeface="Arial" panose="020B0604020202020204" pitchFamily="34" charset="0"/>
+              </a:rPr>
+              <a:t>&lt;</a:t>
+            </a:r>
+            <a:r>
+              <a:rPr lang="de-CH" sz="1000" b="1" dirty="0" err="1">
+                <a:solidFill>
+                  <a:schemeClr val="tx1"/>
+                </a:solidFill>
+                <a:latin typeface="Arial" panose="020B0604020202020204" pitchFamily="34" charset="0"/>
+                <a:cs typeface="Arial" panose="020B0604020202020204" pitchFamily="34" charset="0"/>
+              </a:rPr>
+              <a:t>header</a:t>
+            </a:r>
+            <a:r>
+              <a:rPr lang="de-CH" sz="1000" b="1" dirty="0">
+                <a:solidFill>
+                  <a:schemeClr val="tx1"/>
+                </a:solidFill>
+                <a:latin typeface="Arial" panose="020B0604020202020204" pitchFamily="34" charset="0"/>
+                <a:cs typeface="Arial" panose="020B0604020202020204" pitchFamily="34" charset="0"/>
+              </a:rPr>
+              <a:t>&gt;</a:t>
+            </a:r>
+          </a:p>
+          <a:p>
+            <a:pPr algn="ctr"/>
+            <a:r>
+              <a:rPr lang="de-CH" sz="1000" b="1" dirty="0">
+                <a:solidFill>
+                  <a:schemeClr val="tx1"/>
+                </a:solidFill>
+                <a:latin typeface="Arial" panose="020B0604020202020204" pitchFamily="34" charset="0"/>
+                <a:cs typeface="Arial" panose="020B0604020202020204" pitchFamily="34" charset="0"/>
+              </a:rPr>
+              <a:t>Styles </a:t>
+            </a:r>
+            <a:r>
+              <a:rPr lang="de-CH" sz="1000" b="1" dirty="0" err="1">
+                <a:solidFill>
+                  <a:schemeClr val="tx1"/>
+                </a:solidFill>
+                <a:latin typeface="Arial" panose="020B0604020202020204" pitchFamily="34" charset="0"/>
+                <a:cs typeface="Arial" panose="020B0604020202020204" pitchFamily="34" charset="0"/>
+              </a:rPr>
+              <a:t>for</a:t>
+            </a:r>
+            <a:r>
+              <a:rPr lang="de-CH" sz="1000" b="1" dirty="0">
+                <a:solidFill>
+                  <a:schemeClr val="tx1"/>
+                </a:solidFill>
+                <a:latin typeface="Arial" panose="020B0604020202020204" pitchFamily="34" charset="0"/>
+                <a:cs typeface="Arial" panose="020B0604020202020204" pitchFamily="34" charset="0"/>
+              </a:rPr>
+              <a:t> </a:t>
+            </a:r>
+            <a:r>
+              <a:rPr lang="de-CH" sz="1000" b="1" dirty="0" err="1">
+                <a:solidFill>
+                  <a:schemeClr val="tx1"/>
+                </a:solidFill>
+                <a:latin typeface="Arial" panose="020B0604020202020204" pitchFamily="34" charset="0"/>
+                <a:cs typeface="Arial" panose="020B0604020202020204" pitchFamily="34" charset="0"/>
+              </a:rPr>
+              <a:t>print</a:t>
+            </a:r>
+            <a:r>
+              <a:rPr lang="de-CH" sz="1000" b="1" dirty="0">
+                <a:solidFill>
+                  <a:schemeClr val="tx1"/>
+                </a:solidFill>
+                <a:latin typeface="Arial" panose="020B0604020202020204" pitchFamily="34" charset="0"/>
+                <a:cs typeface="Arial" panose="020B0604020202020204" pitchFamily="34" charset="0"/>
+              </a:rPr>
+              <a:t>: Page </a:t>
+            </a:r>
+            <a:r>
+              <a:rPr lang="de-CH" sz="1000" b="1" dirty="0" err="1">
+                <a:solidFill>
+                  <a:schemeClr val="tx1"/>
+                </a:solidFill>
+                <a:latin typeface="Arial" panose="020B0604020202020204" pitchFamily="34" charset="0"/>
+                <a:cs typeface="Arial" panose="020B0604020202020204" pitchFamily="34" charset="0"/>
+              </a:rPr>
+              <a:t>breaks</a:t>
+            </a:r>
+            <a:r>
+              <a:rPr lang="de-CH" sz="1000" b="1" dirty="0">
+                <a:solidFill>
+                  <a:schemeClr val="tx1"/>
+                </a:solidFill>
+                <a:latin typeface="Arial" panose="020B0604020202020204" pitchFamily="34" charset="0"/>
+                <a:cs typeface="Arial" panose="020B0604020202020204" pitchFamily="34" charset="0"/>
+              </a:rPr>
+              <a:t>, etc.</a:t>
+            </a:r>
+          </a:p>
+          <a:p>
+            <a:pPr algn="ctr"/>
+            <a:r>
+              <a:rPr lang="de-CH" sz="1000" b="1" dirty="0" err="1">
+                <a:solidFill>
+                  <a:schemeClr val="tx1"/>
+                </a:solidFill>
+                <a:latin typeface="Arial" panose="020B0604020202020204" pitchFamily="34" charset="0"/>
+                <a:cs typeface="Arial" panose="020B0604020202020204" pitchFamily="34" charset="0"/>
+              </a:rPr>
+              <a:t>Incude</a:t>
+            </a:r>
+            <a:r>
+              <a:rPr lang="de-CH" sz="1000" b="1" dirty="0">
+                <a:solidFill>
+                  <a:schemeClr val="tx1"/>
+                </a:solidFill>
+                <a:latin typeface="Arial" panose="020B0604020202020204" pitchFamily="34" charset="0"/>
+                <a:cs typeface="Arial" panose="020B0604020202020204" pitchFamily="34" charset="0"/>
+              </a:rPr>
+              <a:t> Reservation.js ReservationFiles.js</a:t>
+            </a:r>
+          </a:p>
+        </p:txBody>
+      </p:sp>
+      <p:sp>
+        <p:nvSpPr>
+          <p:cNvPr id="8" name="Rechteck 7">
+            <a:extLst>
+              <a:ext uri="{FF2B5EF4-FFF2-40B4-BE49-F238E27FC236}">
+                <a16:creationId xmlns:a16="http://schemas.microsoft.com/office/drawing/2014/main" id="{BE9CA6F3-5312-C481-D651-3FA3CDE88C91}"/>
+              </a:ext>
+            </a:extLst>
+          </p:cNvPr>
+          <p:cNvSpPr/>
+          <p:nvPr/>
+        </p:nvSpPr>
+        <p:spPr>
+          <a:xfrm>
+            <a:off x="7211626" y="1937481"/>
+            <a:ext cx="2974904" cy="1155248"/>
+          </a:xfrm>
+          <a:prstGeom prst="rect">
+            <a:avLst/>
+          </a:prstGeom>
+          <a:noFill/>
+          <a:ln>
+            <a:solidFill>
+              <a:schemeClr val="tx1"/>
+            </a:solidFill>
+          </a:ln>
+        </p:spPr>
+        <p:style>
+          <a:lnRef idx="2">
+            <a:schemeClr val="accent1">
+              <a:shade val="50000"/>
+            </a:schemeClr>
+          </a:lnRef>
+          <a:fillRef idx="1">
+            <a:schemeClr val="accent1"/>
+          </a:fillRef>
+          <a:effectRef idx="0">
+            <a:schemeClr val="accent1"/>
+          </a:effectRef>
+          <a:fontRef idx="minor">
+            <a:schemeClr val="lt1"/>
+          </a:fontRef>
+        </p:style>
+        <p:txBody>
+          <a:bodyPr rtlCol="0" anchor="ctr"/>
+          <a:lstStyle/>
+          <a:p>
+            <a:r>
+              <a:rPr lang="de-CH" sz="1000" b="1" dirty="0">
+                <a:solidFill>
+                  <a:schemeClr val="tx1"/>
+                </a:solidFill>
+                <a:latin typeface="Arial" panose="020B0604020202020204" pitchFamily="34" charset="0"/>
+                <a:cs typeface="Arial" panose="020B0604020202020204" pitchFamily="34" charset="0"/>
+              </a:rPr>
+              <a:t>&lt;</a:t>
+            </a:r>
+            <a:r>
+              <a:rPr lang="de-CH" sz="1000" b="1" dirty="0" err="1">
+                <a:solidFill>
+                  <a:schemeClr val="tx1"/>
+                </a:solidFill>
+                <a:latin typeface="Arial" panose="020B0604020202020204" pitchFamily="34" charset="0"/>
+                <a:cs typeface="Arial" panose="020B0604020202020204" pitchFamily="34" charset="0"/>
+              </a:rPr>
+              <a:t>body</a:t>
+            </a:r>
+            <a:r>
+              <a:rPr lang="de-CH" sz="1000" b="1" dirty="0">
+                <a:solidFill>
+                  <a:schemeClr val="tx1"/>
+                </a:solidFill>
+                <a:latin typeface="Arial" panose="020B0604020202020204" pitchFamily="34" charset="0"/>
+                <a:cs typeface="Arial" panose="020B0604020202020204" pitchFamily="34" charset="0"/>
+              </a:rPr>
+              <a:t>&gt;</a:t>
+            </a:r>
+          </a:p>
+          <a:p>
+            <a:endParaRPr lang="de-CH" sz="1000" b="1" dirty="0">
+              <a:solidFill>
+                <a:schemeClr val="tx1"/>
+              </a:solidFill>
+              <a:latin typeface="Arial" panose="020B0604020202020204" pitchFamily="34" charset="0"/>
+              <a:cs typeface="Arial" panose="020B0604020202020204" pitchFamily="34" charset="0"/>
+            </a:endParaRPr>
+          </a:p>
+          <a:p>
+            <a:r>
+              <a:rPr lang="fr-FR" sz="1000" b="1" dirty="0">
+                <a:solidFill>
+                  <a:schemeClr val="tx1"/>
+                </a:solidFill>
+                <a:latin typeface="Arial" panose="020B0604020202020204" pitchFamily="34" charset="0"/>
+                <a:cs typeface="Arial" panose="020B0604020202020204" pitchFamily="34" charset="0"/>
+              </a:rPr>
+              <a:t>    &lt;script </a:t>
+            </a:r>
+            <a:r>
+              <a:rPr lang="fr-FR" sz="1000" b="1" dirty="0" err="1">
+                <a:solidFill>
+                  <a:schemeClr val="tx1"/>
+                </a:solidFill>
+                <a:latin typeface="Arial" panose="020B0604020202020204" pitchFamily="34" charset="0"/>
+                <a:cs typeface="Arial" panose="020B0604020202020204" pitchFamily="34" charset="0"/>
+              </a:rPr>
+              <a:t>language</a:t>
+            </a:r>
+            <a:r>
+              <a:rPr lang="fr-FR" sz="1000" b="1" dirty="0">
+                <a:solidFill>
+                  <a:schemeClr val="tx1"/>
+                </a:solidFill>
+                <a:latin typeface="Arial" panose="020B0604020202020204" pitchFamily="34" charset="0"/>
+                <a:cs typeface="Arial" panose="020B0604020202020204" pitchFamily="34" charset="0"/>
+              </a:rPr>
+              <a:t>="JavaScript"&gt;</a:t>
+            </a:r>
+          </a:p>
+          <a:p>
+            <a:r>
+              <a:rPr lang="fr-FR" sz="1000" b="1" dirty="0">
+                <a:solidFill>
+                  <a:schemeClr val="tx1"/>
+                </a:solidFill>
+                <a:latin typeface="Arial" panose="020B0604020202020204" pitchFamily="34" charset="0"/>
+                <a:cs typeface="Arial" panose="020B0604020202020204" pitchFamily="34" charset="0"/>
+              </a:rPr>
+              <a:t>        </a:t>
+            </a:r>
+            <a:r>
+              <a:rPr lang="fr-FR" sz="1000" b="1" dirty="0" err="1">
+                <a:solidFill>
+                  <a:schemeClr val="tx1"/>
+                </a:solidFill>
+                <a:latin typeface="Arial" panose="020B0604020202020204" pitchFamily="34" charset="0"/>
+                <a:cs typeface="Arial" panose="020B0604020202020204" pitchFamily="34" charset="0"/>
+              </a:rPr>
+              <a:t>Document.write</a:t>
+            </a:r>
+            <a:r>
+              <a:rPr lang="fr-FR" sz="1000" b="1" dirty="0">
+                <a:solidFill>
+                  <a:schemeClr val="tx1"/>
+                </a:solidFill>
+                <a:latin typeface="Arial" panose="020B0604020202020204" pitchFamily="34" charset="0"/>
+                <a:cs typeface="Arial" panose="020B0604020202020204" pitchFamily="34" charset="0"/>
+              </a:rPr>
+              <a:t>(</a:t>
+            </a:r>
+            <a:r>
+              <a:rPr lang="fr-FR" sz="1000" b="1" dirty="0" err="1">
+                <a:solidFill>
+                  <a:schemeClr val="tx1"/>
+                </a:solidFill>
+                <a:latin typeface="Arial" panose="020B0604020202020204" pitchFamily="34" charset="0"/>
+                <a:cs typeface="Arial" panose="020B0604020202020204" pitchFamily="34" charset="0"/>
+              </a:rPr>
+              <a:t>mainReservationCards</a:t>
+            </a:r>
+            <a:r>
+              <a:rPr lang="fr-FR" sz="1000" b="1" dirty="0">
+                <a:solidFill>
+                  <a:schemeClr val="tx1"/>
+                </a:solidFill>
+                <a:latin typeface="Arial" panose="020B0604020202020204" pitchFamily="34" charset="0"/>
+                <a:cs typeface="Arial" panose="020B0604020202020204" pitchFamily="34" charset="0"/>
+              </a:rPr>
+              <a:t>())</a:t>
+            </a:r>
+          </a:p>
+          <a:p>
+            <a:r>
+              <a:rPr lang="fr-FR" sz="1000" b="1" dirty="0">
+                <a:solidFill>
+                  <a:schemeClr val="tx1"/>
+                </a:solidFill>
+                <a:latin typeface="Arial" panose="020B0604020202020204" pitchFamily="34" charset="0"/>
+                <a:cs typeface="Arial" panose="020B0604020202020204" pitchFamily="34" charset="0"/>
+              </a:rPr>
+              <a:t>     &lt;/script&gt;</a:t>
+            </a:r>
+          </a:p>
+          <a:p>
+            <a:endParaRPr lang="fr-FR" sz="1000" b="1" dirty="0">
+              <a:solidFill>
+                <a:schemeClr val="tx1"/>
+              </a:solidFill>
+              <a:latin typeface="Arial" panose="020B0604020202020204" pitchFamily="34" charset="0"/>
+              <a:cs typeface="Arial" panose="020B0604020202020204" pitchFamily="34" charset="0"/>
+            </a:endParaRPr>
+          </a:p>
+          <a:p>
+            <a:r>
+              <a:rPr lang="de-CH" sz="1000" b="1" dirty="0">
+                <a:solidFill>
+                  <a:schemeClr val="tx1"/>
+                </a:solidFill>
+                <a:latin typeface="Arial" panose="020B0604020202020204" pitchFamily="34" charset="0"/>
+                <a:cs typeface="Arial" panose="020B0604020202020204" pitchFamily="34" charset="0"/>
+              </a:rPr>
+              <a:t>&lt;/</a:t>
+            </a:r>
+            <a:r>
+              <a:rPr lang="de-CH" sz="1000" b="1" dirty="0" err="1">
+                <a:solidFill>
+                  <a:schemeClr val="tx1"/>
+                </a:solidFill>
+                <a:latin typeface="Arial" panose="020B0604020202020204" pitchFamily="34" charset="0"/>
+                <a:cs typeface="Arial" panose="020B0604020202020204" pitchFamily="34" charset="0"/>
+              </a:rPr>
+              <a:t>body</a:t>
+            </a:r>
+            <a:r>
+              <a:rPr lang="de-CH" sz="1000" b="1" dirty="0">
+                <a:solidFill>
+                  <a:schemeClr val="tx1"/>
+                </a:solidFill>
+                <a:latin typeface="Arial" panose="020B0604020202020204" pitchFamily="34" charset="0"/>
+                <a:cs typeface="Arial" panose="020B0604020202020204" pitchFamily="34" charset="0"/>
+              </a:rPr>
+              <a:t>&gt;</a:t>
+            </a:r>
+          </a:p>
+        </p:txBody>
+      </p:sp>
+      <p:sp>
+        <p:nvSpPr>
+          <p:cNvPr id="9" name="Rechteck 8">
+            <a:extLst>
+              <a:ext uri="{FF2B5EF4-FFF2-40B4-BE49-F238E27FC236}">
+                <a16:creationId xmlns:a16="http://schemas.microsoft.com/office/drawing/2014/main" id="{8C70B0F7-971B-978B-0DAB-64A1143C4FE1}"/>
+              </a:ext>
+            </a:extLst>
+          </p:cNvPr>
+          <p:cNvSpPr/>
+          <p:nvPr/>
+        </p:nvSpPr>
+        <p:spPr>
+          <a:xfrm>
+            <a:off x="879088" y="2731532"/>
+            <a:ext cx="2434959" cy="2604261"/>
+          </a:xfrm>
+          <a:prstGeom prst="rect">
+            <a:avLst/>
+          </a:prstGeom>
+          <a:noFill/>
+          <a:ln>
+            <a:solidFill>
+              <a:schemeClr val="tx1"/>
+            </a:solidFill>
+          </a:ln>
+        </p:spPr>
+        <p:style>
+          <a:lnRef idx="2">
+            <a:schemeClr val="accent1">
+              <a:shade val="50000"/>
+            </a:schemeClr>
+          </a:lnRef>
+          <a:fillRef idx="1">
+            <a:schemeClr val="accent1"/>
+          </a:fillRef>
+          <a:effectRef idx="0">
+            <a:schemeClr val="accent1"/>
+          </a:effectRef>
+          <a:fontRef idx="minor">
+            <a:schemeClr val="lt1"/>
+          </a:fontRef>
+        </p:style>
+        <p:txBody>
+          <a:bodyPr rtlCol="0" anchor="ctr"/>
+          <a:lstStyle/>
+          <a:p>
+            <a:pPr algn="ctr"/>
+            <a:r>
+              <a:rPr lang="de-CH" sz="1000" b="1" dirty="0" err="1">
+                <a:solidFill>
+                  <a:schemeClr val="tx1"/>
+                </a:solidFill>
+                <a:latin typeface="Arial" panose="020B0604020202020204" pitchFamily="34" charset="0"/>
+                <a:cs typeface="Arial" panose="020B0604020202020204" pitchFamily="34" charset="0"/>
+              </a:rPr>
+              <a:t>getAllReservationCardsHtml</a:t>
+            </a:r>
+            <a:endParaRPr lang="de-CH" sz="1000" b="1" dirty="0">
+              <a:solidFill>
+                <a:schemeClr val="tx1"/>
+              </a:solidFill>
+              <a:latin typeface="Arial" panose="020B0604020202020204" pitchFamily="34" charset="0"/>
+              <a:cs typeface="Arial" panose="020B0604020202020204" pitchFamily="34" charset="0"/>
+            </a:endParaRPr>
+          </a:p>
+          <a:p>
+            <a:pPr algn="ctr"/>
+            <a:endParaRPr lang="de-CH" sz="1000" b="1" dirty="0">
+              <a:solidFill>
+                <a:schemeClr val="tx1"/>
+              </a:solidFill>
+              <a:latin typeface="Arial" panose="020B0604020202020204" pitchFamily="34" charset="0"/>
+              <a:cs typeface="Arial" panose="020B0604020202020204" pitchFamily="34" charset="0"/>
+            </a:endParaRPr>
+          </a:p>
+          <a:p>
+            <a:r>
+              <a:rPr lang="de-CH" sz="1000" b="1" dirty="0" err="1">
+                <a:solidFill>
+                  <a:schemeClr val="tx1"/>
+                </a:solidFill>
+                <a:latin typeface="Arial" panose="020B0604020202020204" pitchFamily="34" charset="0"/>
+                <a:cs typeface="Arial" panose="020B0604020202020204" pitchFamily="34" charset="0"/>
+              </a:rPr>
+              <a:t>getArrayReservationCards</a:t>
+            </a:r>
+            <a:r>
+              <a:rPr lang="de-CH" sz="1000" b="1" dirty="0">
+                <a:solidFill>
+                  <a:schemeClr val="tx1"/>
+                </a:solidFill>
+                <a:latin typeface="Arial" panose="020B0604020202020204" pitchFamily="34" charset="0"/>
+                <a:cs typeface="Arial" panose="020B0604020202020204" pitchFamily="34" charset="0"/>
+              </a:rPr>
+              <a:t>("</a:t>
+            </a:r>
+            <a:r>
+              <a:rPr lang="de-CH" sz="1000" b="1" dirty="0" err="1">
+                <a:solidFill>
+                  <a:schemeClr val="tx1"/>
+                </a:solidFill>
+                <a:latin typeface="Arial" panose="020B0604020202020204" pitchFamily="34" charset="0"/>
+                <a:cs typeface="Arial" panose="020B0604020202020204" pitchFamily="34" charset="0"/>
+              </a:rPr>
+              <a:t>names</a:t>
+            </a:r>
+            <a:r>
+              <a:rPr lang="de-CH" sz="1000" b="1" dirty="0">
+                <a:solidFill>
+                  <a:schemeClr val="tx1"/>
+                </a:solidFill>
+                <a:latin typeface="Arial" panose="020B0604020202020204" pitchFamily="34" charset="0"/>
+                <a:cs typeface="Arial" panose="020B0604020202020204" pitchFamily="34" charset="0"/>
+              </a:rPr>
+              <a:t>")</a:t>
+            </a:r>
+          </a:p>
+          <a:p>
+            <a:r>
+              <a:rPr lang="de-CH" sz="1000" b="1" dirty="0" err="1">
+                <a:solidFill>
+                  <a:schemeClr val="tx1"/>
+                </a:solidFill>
+                <a:latin typeface="Arial" panose="020B0604020202020204" pitchFamily="34" charset="0"/>
+                <a:cs typeface="Arial" panose="020B0604020202020204" pitchFamily="34" charset="0"/>
+              </a:rPr>
+              <a:t>getArrayReservationCards</a:t>
+            </a:r>
+            <a:r>
+              <a:rPr lang="de-CH" sz="1000" b="1" dirty="0">
+                <a:solidFill>
+                  <a:schemeClr val="tx1"/>
+                </a:solidFill>
+                <a:latin typeface="Arial" panose="020B0604020202020204" pitchFamily="34" charset="0"/>
+                <a:cs typeface="Arial" panose="020B0604020202020204" pitchFamily="34" charset="0"/>
+              </a:rPr>
+              <a:t>("</a:t>
+            </a:r>
+            <a:r>
+              <a:rPr lang="de-CH" sz="1000" b="1" dirty="0" err="1">
+                <a:solidFill>
+                  <a:schemeClr val="tx1"/>
+                </a:solidFill>
+                <a:latin typeface="Arial" panose="020B0604020202020204" pitchFamily="34" charset="0"/>
+                <a:cs typeface="Arial" panose="020B0604020202020204" pitchFamily="34" charset="0"/>
+              </a:rPr>
+              <a:t>seats</a:t>
+            </a:r>
+            <a:r>
+              <a:rPr lang="de-CH" sz="1000" b="1" dirty="0">
+                <a:solidFill>
+                  <a:schemeClr val="tx1"/>
+                </a:solidFill>
+                <a:latin typeface="Arial" panose="020B0604020202020204" pitchFamily="34" charset="0"/>
+                <a:cs typeface="Arial" panose="020B0604020202020204" pitchFamily="34" charset="0"/>
+              </a:rPr>
+              <a:t>")</a:t>
+            </a:r>
+          </a:p>
+          <a:p>
+            <a:r>
+              <a:rPr lang="de-CH" sz="1000" b="1" dirty="0" err="1">
+                <a:solidFill>
+                  <a:schemeClr val="tx1"/>
+                </a:solidFill>
+                <a:latin typeface="Arial" panose="020B0604020202020204" pitchFamily="34" charset="0"/>
+                <a:cs typeface="Arial" panose="020B0604020202020204" pitchFamily="34" charset="0"/>
+              </a:rPr>
+              <a:t>addStartTable</a:t>
+            </a:r>
+            <a:endParaRPr lang="de-CH" sz="1000" b="1" dirty="0">
+              <a:solidFill>
+                <a:schemeClr val="tx1"/>
+              </a:solidFill>
+              <a:latin typeface="Arial" panose="020B0604020202020204" pitchFamily="34" charset="0"/>
+              <a:cs typeface="Arial" panose="020B0604020202020204" pitchFamily="34" charset="0"/>
+            </a:endParaRPr>
+          </a:p>
+          <a:p>
+            <a:r>
+              <a:rPr lang="de-CH" sz="1000" b="1" dirty="0" err="1">
+                <a:solidFill>
+                  <a:schemeClr val="tx1"/>
+                </a:solidFill>
+                <a:latin typeface="Arial" panose="020B0604020202020204" pitchFamily="34" charset="0"/>
+                <a:cs typeface="Arial" panose="020B0604020202020204" pitchFamily="34" charset="0"/>
+              </a:rPr>
+              <a:t>addEmptyRow</a:t>
+            </a:r>
+            <a:endParaRPr lang="de-CH" sz="1000" b="1" dirty="0">
+              <a:solidFill>
+                <a:schemeClr val="tx1"/>
+              </a:solidFill>
+              <a:latin typeface="Arial" panose="020B0604020202020204" pitchFamily="34" charset="0"/>
+              <a:cs typeface="Arial" panose="020B0604020202020204" pitchFamily="34" charset="0"/>
+            </a:endParaRPr>
+          </a:p>
+          <a:p>
+            <a:r>
+              <a:rPr lang="de-CH" sz="1000" b="1" dirty="0" err="1">
+                <a:solidFill>
+                  <a:schemeClr val="tx1"/>
+                </a:solidFill>
+                <a:latin typeface="Arial" panose="020B0604020202020204" pitchFamily="34" charset="0"/>
+                <a:cs typeface="Arial" panose="020B0604020202020204" pitchFamily="34" charset="0"/>
+              </a:rPr>
+              <a:t>addRow</a:t>
+            </a:r>
+            <a:endParaRPr lang="de-CH" sz="1000" b="1" dirty="0">
+              <a:solidFill>
+                <a:schemeClr val="tx1"/>
+              </a:solidFill>
+              <a:latin typeface="Arial" panose="020B0604020202020204" pitchFamily="34" charset="0"/>
+              <a:cs typeface="Arial" panose="020B0604020202020204" pitchFamily="34" charset="0"/>
+            </a:endParaRPr>
+          </a:p>
+          <a:p>
+            <a:r>
+              <a:rPr lang="de-CH" sz="1000" b="1" dirty="0">
+                <a:solidFill>
+                  <a:schemeClr val="tx1"/>
+                </a:solidFill>
+                <a:latin typeface="Arial" panose="020B0604020202020204" pitchFamily="34" charset="0"/>
+                <a:cs typeface="Arial" panose="020B0604020202020204" pitchFamily="34" charset="0"/>
+              </a:rPr>
+              <a:t>  </a:t>
+            </a:r>
+            <a:r>
+              <a:rPr lang="de-CH" sz="1000" b="1" dirty="0" err="1">
+                <a:solidFill>
+                  <a:schemeClr val="tx1"/>
+                </a:solidFill>
+                <a:latin typeface="Arial" panose="020B0604020202020204" pitchFamily="34" charset="0"/>
+                <a:cs typeface="Arial" panose="020B0604020202020204" pitchFamily="34" charset="0"/>
+              </a:rPr>
+              <a:t>addStartRow</a:t>
+            </a:r>
+            <a:endParaRPr lang="de-CH" sz="1000" b="1" dirty="0">
+              <a:solidFill>
+                <a:schemeClr val="tx1"/>
+              </a:solidFill>
+              <a:latin typeface="Arial" panose="020B0604020202020204" pitchFamily="34" charset="0"/>
+              <a:cs typeface="Arial" panose="020B0604020202020204" pitchFamily="34" charset="0"/>
+            </a:endParaRPr>
+          </a:p>
+          <a:p>
+            <a:r>
+              <a:rPr lang="de-CH" sz="1000" b="1" dirty="0">
+                <a:solidFill>
+                  <a:schemeClr val="tx1"/>
+                </a:solidFill>
+                <a:latin typeface="Arial" panose="020B0604020202020204" pitchFamily="34" charset="0"/>
+                <a:cs typeface="Arial" panose="020B0604020202020204" pitchFamily="34" charset="0"/>
+              </a:rPr>
+              <a:t>  </a:t>
+            </a:r>
+            <a:r>
+              <a:rPr lang="de-CH" sz="1000" b="1" dirty="0" err="1">
+                <a:solidFill>
+                  <a:schemeClr val="tx1"/>
+                </a:solidFill>
+                <a:latin typeface="Arial" panose="020B0604020202020204" pitchFamily="34" charset="0"/>
+                <a:cs typeface="Arial" panose="020B0604020202020204" pitchFamily="34" charset="0"/>
+              </a:rPr>
+              <a:t>addColumn</a:t>
+            </a:r>
+            <a:r>
+              <a:rPr lang="de-CH" sz="1000" b="1" dirty="0">
+                <a:solidFill>
+                  <a:schemeClr val="tx1"/>
+                </a:solidFill>
+                <a:latin typeface="Arial" panose="020B0604020202020204" pitchFamily="34" charset="0"/>
+                <a:cs typeface="Arial" panose="020B0604020202020204" pitchFamily="34" charset="0"/>
+              </a:rPr>
+              <a:t> </a:t>
+            </a:r>
+          </a:p>
+          <a:p>
+            <a:r>
+              <a:rPr lang="de-CH" sz="1000" b="1" dirty="0">
+                <a:solidFill>
+                  <a:schemeClr val="tx1"/>
+                </a:solidFill>
+                <a:latin typeface="Arial" panose="020B0604020202020204" pitchFamily="34" charset="0"/>
+                <a:cs typeface="Arial" panose="020B0604020202020204" pitchFamily="34" charset="0"/>
+              </a:rPr>
+              <a:t>     </a:t>
+            </a:r>
+            <a:r>
+              <a:rPr lang="de-CH" sz="1000" b="1" dirty="0" err="1">
+                <a:solidFill>
+                  <a:schemeClr val="tx1"/>
+                </a:solidFill>
+                <a:latin typeface="Arial" panose="020B0604020202020204" pitchFamily="34" charset="0"/>
+                <a:cs typeface="Arial" panose="020B0604020202020204" pitchFamily="34" charset="0"/>
+              </a:rPr>
+              <a:t>addStartColumn</a:t>
+            </a:r>
+            <a:endParaRPr lang="de-CH" sz="1000" b="1" dirty="0">
+              <a:solidFill>
+                <a:schemeClr val="tx1"/>
+              </a:solidFill>
+              <a:latin typeface="Arial" panose="020B0604020202020204" pitchFamily="34" charset="0"/>
+              <a:cs typeface="Arial" panose="020B0604020202020204" pitchFamily="34" charset="0"/>
+            </a:endParaRPr>
+          </a:p>
+          <a:p>
+            <a:r>
+              <a:rPr lang="de-CH" sz="1000" b="1" dirty="0">
+                <a:solidFill>
+                  <a:schemeClr val="tx1"/>
+                </a:solidFill>
+                <a:latin typeface="Arial" panose="020B0604020202020204" pitchFamily="34" charset="0"/>
+                <a:cs typeface="Arial" panose="020B0604020202020204" pitchFamily="34" charset="0"/>
+              </a:rPr>
+              <a:t>     </a:t>
+            </a:r>
+            <a:r>
+              <a:rPr lang="de-CH" sz="1000" b="1" dirty="0" err="1">
+                <a:solidFill>
+                  <a:schemeClr val="tx1"/>
+                </a:solidFill>
+                <a:latin typeface="Arial" panose="020B0604020202020204" pitchFamily="34" charset="0"/>
+                <a:cs typeface="Arial" panose="020B0604020202020204" pitchFamily="34" charset="0"/>
+              </a:rPr>
+              <a:t>addJazzLiveAarau</a:t>
+            </a:r>
+            <a:endParaRPr lang="de-CH" sz="1000" b="1" dirty="0">
+              <a:solidFill>
+                <a:schemeClr val="tx1"/>
+              </a:solidFill>
+              <a:latin typeface="Arial" panose="020B0604020202020204" pitchFamily="34" charset="0"/>
+              <a:cs typeface="Arial" panose="020B0604020202020204" pitchFamily="34" charset="0"/>
+            </a:endParaRPr>
+          </a:p>
+          <a:p>
+            <a:r>
+              <a:rPr lang="de-CH" sz="1000" b="1" dirty="0">
+                <a:solidFill>
+                  <a:schemeClr val="tx1"/>
+                </a:solidFill>
+                <a:latin typeface="Arial" panose="020B0604020202020204" pitchFamily="34" charset="0"/>
+                <a:cs typeface="Arial" panose="020B0604020202020204" pitchFamily="34" charset="0"/>
+              </a:rPr>
+              <a:t>     </a:t>
+            </a:r>
+            <a:r>
+              <a:rPr lang="de-CH" sz="1000" b="1" dirty="0" err="1">
+                <a:solidFill>
+                  <a:schemeClr val="tx1"/>
+                </a:solidFill>
+                <a:latin typeface="Arial" panose="020B0604020202020204" pitchFamily="34" charset="0"/>
+                <a:cs typeface="Arial" panose="020B0604020202020204" pitchFamily="34" charset="0"/>
+              </a:rPr>
+              <a:t>addName</a:t>
+            </a:r>
+            <a:endParaRPr lang="de-CH" sz="1000" b="1" dirty="0">
+              <a:solidFill>
+                <a:schemeClr val="tx1"/>
+              </a:solidFill>
+              <a:latin typeface="Arial" panose="020B0604020202020204" pitchFamily="34" charset="0"/>
+              <a:cs typeface="Arial" panose="020B0604020202020204" pitchFamily="34" charset="0"/>
+            </a:endParaRPr>
+          </a:p>
+          <a:p>
+            <a:r>
+              <a:rPr lang="de-CH" sz="1000" b="1" dirty="0">
+                <a:solidFill>
+                  <a:schemeClr val="tx1"/>
+                </a:solidFill>
+                <a:latin typeface="Arial" panose="020B0604020202020204" pitchFamily="34" charset="0"/>
+                <a:cs typeface="Arial" panose="020B0604020202020204" pitchFamily="34" charset="0"/>
+              </a:rPr>
+              <a:t>     </a:t>
+            </a:r>
+            <a:r>
+              <a:rPr lang="de-CH" sz="1000" b="1" dirty="0" err="1">
+                <a:solidFill>
+                  <a:schemeClr val="tx1"/>
+                </a:solidFill>
+                <a:latin typeface="Arial" panose="020B0604020202020204" pitchFamily="34" charset="0"/>
+                <a:cs typeface="Arial" panose="020B0604020202020204" pitchFamily="34" charset="0"/>
+              </a:rPr>
+              <a:t>addDateTableSeat</a:t>
+            </a:r>
+            <a:endParaRPr lang="de-CH" sz="1000" b="1" dirty="0">
+              <a:solidFill>
+                <a:schemeClr val="tx1"/>
+              </a:solidFill>
+              <a:latin typeface="Arial" panose="020B0604020202020204" pitchFamily="34" charset="0"/>
+              <a:cs typeface="Arial" panose="020B0604020202020204" pitchFamily="34" charset="0"/>
+            </a:endParaRPr>
+          </a:p>
+          <a:p>
+            <a:r>
+              <a:rPr lang="de-CH" sz="1000" b="1" dirty="0">
+                <a:solidFill>
+                  <a:schemeClr val="tx1"/>
+                </a:solidFill>
+                <a:latin typeface="Arial" panose="020B0604020202020204" pitchFamily="34" charset="0"/>
+                <a:cs typeface="Arial" panose="020B0604020202020204" pitchFamily="34" charset="0"/>
+              </a:rPr>
+              <a:t>  </a:t>
+            </a:r>
+            <a:r>
+              <a:rPr lang="de-CH" sz="1000" b="1" dirty="0" err="1">
+                <a:solidFill>
+                  <a:schemeClr val="tx1"/>
+                </a:solidFill>
+                <a:latin typeface="Arial" panose="020B0604020202020204" pitchFamily="34" charset="0"/>
+                <a:cs typeface="Arial" panose="020B0604020202020204" pitchFamily="34" charset="0"/>
+              </a:rPr>
+              <a:t>addColumn</a:t>
+            </a:r>
+            <a:endParaRPr lang="de-CH" sz="1000" b="1" dirty="0">
+              <a:solidFill>
+                <a:schemeClr val="tx1"/>
+              </a:solidFill>
+              <a:latin typeface="Arial" panose="020B0604020202020204" pitchFamily="34" charset="0"/>
+              <a:cs typeface="Arial" panose="020B0604020202020204" pitchFamily="34" charset="0"/>
+            </a:endParaRPr>
+          </a:p>
+          <a:p>
+            <a:r>
+              <a:rPr lang="de-CH" sz="1000" b="1" dirty="0">
+                <a:solidFill>
+                  <a:schemeClr val="tx1"/>
+                </a:solidFill>
+                <a:latin typeface="Arial" panose="020B0604020202020204" pitchFamily="34" charset="0"/>
+                <a:cs typeface="Arial" panose="020B0604020202020204" pitchFamily="34" charset="0"/>
+              </a:rPr>
+              <a:t>  </a:t>
+            </a:r>
+            <a:r>
+              <a:rPr lang="de-CH" sz="1000" b="1" dirty="0" err="1">
+                <a:solidFill>
+                  <a:schemeClr val="tx1"/>
+                </a:solidFill>
+                <a:latin typeface="Arial" panose="020B0604020202020204" pitchFamily="34" charset="0"/>
+                <a:cs typeface="Arial" panose="020B0604020202020204" pitchFamily="34" charset="0"/>
+              </a:rPr>
+              <a:t>addColumn</a:t>
+            </a:r>
+            <a:endParaRPr lang="de-CH" sz="1000" b="1" dirty="0">
+              <a:solidFill>
+                <a:schemeClr val="tx1"/>
+              </a:solidFill>
+              <a:latin typeface="Arial" panose="020B0604020202020204" pitchFamily="34" charset="0"/>
+              <a:cs typeface="Arial" panose="020B0604020202020204" pitchFamily="34" charset="0"/>
+            </a:endParaRPr>
+          </a:p>
+          <a:p>
+            <a:r>
+              <a:rPr lang="de-CH" sz="1000" b="1" dirty="0" err="1">
+                <a:solidFill>
+                  <a:schemeClr val="tx1"/>
+                </a:solidFill>
+                <a:latin typeface="Arial" panose="020B0604020202020204" pitchFamily="34" charset="0"/>
+                <a:cs typeface="Arial" panose="020B0604020202020204" pitchFamily="34" charset="0"/>
+              </a:rPr>
+              <a:t>addEndTable</a:t>
+            </a:r>
+            <a:endParaRPr lang="de-CH" sz="1000" b="1" dirty="0">
+              <a:solidFill>
+                <a:schemeClr val="tx1"/>
+              </a:solidFill>
+              <a:latin typeface="Arial" panose="020B0604020202020204" pitchFamily="34" charset="0"/>
+              <a:cs typeface="Arial" panose="020B0604020202020204" pitchFamily="34" charset="0"/>
+            </a:endParaRPr>
+          </a:p>
+        </p:txBody>
+      </p:sp>
+      <p:sp>
+        <p:nvSpPr>
+          <p:cNvPr id="10" name="Rechteck 9">
+            <a:extLst>
+              <a:ext uri="{FF2B5EF4-FFF2-40B4-BE49-F238E27FC236}">
+                <a16:creationId xmlns:a16="http://schemas.microsoft.com/office/drawing/2014/main" id="{63A8D429-2416-E038-0E91-94C1F1FA1AB7}"/>
+              </a:ext>
+            </a:extLst>
+          </p:cNvPr>
+          <p:cNvSpPr/>
+          <p:nvPr/>
+        </p:nvSpPr>
+        <p:spPr>
+          <a:xfrm>
+            <a:off x="879088" y="2131265"/>
+            <a:ext cx="2434959" cy="369333"/>
+          </a:xfrm>
+          <a:prstGeom prst="rect">
+            <a:avLst/>
+          </a:prstGeom>
+          <a:noFill/>
+          <a:ln>
+            <a:solidFill>
+              <a:schemeClr val="tx1"/>
+            </a:solidFill>
+          </a:ln>
+        </p:spPr>
+        <p:style>
+          <a:lnRef idx="2">
+            <a:schemeClr val="accent1">
+              <a:shade val="50000"/>
+            </a:schemeClr>
+          </a:lnRef>
+          <a:fillRef idx="1">
+            <a:schemeClr val="accent1"/>
+          </a:fillRef>
+          <a:effectRef idx="0">
+            <a:schemeClr val="accent1"/>
+          </a:effectRef>
+          <a:fontRef idx="minor">
+            <a:schemeClr val="lt1"/>
+          </a:fontRef>
+        </p:style>
+        <p:txBody>
+          <a:bodyPr rtlCol="0" anchor="ctr"/>
+          <a:lstStyle/>
+          <a:p>
+            <a:pPr algn="ctr"/>
+            <a:r>
+              <a:rPr lang="de-CH" sz="1000" b="1" dirty="0" err="1">
+                <a:solidFill>
+                  <a:schemeClr val="tx1"/>
+                </a:solidFill>
+                <a:latin typeface="Arial" panose="020B0604020202020204" pitchFamily="34" charset="0"/>
+                <a:cs typeface="Arial" panose="020B0604020202020204" pitchFamily="34" charset="0"/>
+              </a:rPr>
+              <a:t>DisplayNames.getPrintHtmlString</a:t>
+            </a:r>
+            <a:r>
+              <a:rPr lang="de-CH" sz="1000" b="1" dirty="0">
+                <a:solidFill>
+                  <a:schemeClr val="tx1"/>
+                </a:solidFill>
+                <a:latin typeface="Arial" panose="020B0604020202020204" pitchFamily="34" charset="0"/>
+                <a:cs typeface="Arial" panose="020B0604020202020204" pitchFamily="34" charset="0"/>
+              </a:rPr>
+              <a:t>()</a:t>
+            </a:r>
+          </a:p>
+        </p:txBody>
+      </p:sp>
+      <p:sp>
+        <p:nvSpPr>
+          <p:cNvPr id="11" name="Rechteck 10">
+            <a:extLst>
+              <a:ext uri="{FF2B5EF4-FFF2-40B4-BE49-F238E27FC236}">
+                <a16:creationId xmlns:a16="http://schemas.microsoft.com/office/drawing/2014/main" id="{84BFAD17-B8BD-AC49-C0ED-C38386E6EA5C}"/>
+              </a:ext>
+            </a:extLst>
+          </p:cNvPr>
+          <p:cNvSpPr/>
+          <p:nvPr/>
+        </p:nvSpPr>
+        <p:spPr>
+          <a:xfrm>
+            <a:off x="7220253" y="3413903"/>
+            <a:ext cx="2974904" cy="1004978"/>
+          </a:xfrm>
+          <a:prstGeom prst="rect">
+            <a:avLst/>
+          </a:prstGeom>
+          <a:noFill/>
+          <a:ln>
+            <a:solidFill>
+              <a:schemeClr val="tx1"/>
+            </a:solidFill>
+          </a:ln>
+        </p:spPr>
+        <p:style>
+          <a:lnRef idx="2">
+            <a:schemeClr val="accent1">
+              <a:shade val="50000"/>
+            </a:schemeClr>
+          </a:lnRef>
+          <a:fillRef idx="1">
+            <a:schemeClr val="accent1"/>
+          </a:fillRef>
+          <a:effectRef idx="0">
+            <a:schemeClr val="accent1"/>
+          </a:effectRef>
+          <a:fontRef idx="minor">
+            <a:schemeClr val="lt1"/>
+          </a:fontRef>
+        </p:style>
+        <p:txBody>
+          <a:bodyPr rtlCol="0" anchor="ctr"/>
+          <a:lstStyle/>
+          <a:p>
+            <a:pPr algn="ctr"/>
+            <a:r>
+              <a:rPr lang="de-CH" sz="1400" b="1" dirty="0" err="1">
+                <a:solidFill>
+                  <a:schemeClr val="tx1"/>
+                </a:solidFill>
+                <a:latin typeface="Arial" panose="020B0604020202020204" pitchFamily="34" charset="0"/>
+                <a:cs typeface="Arial" panose="020B0604020202020204" pitchFamily="34" charset="0"/>
+              </a:rPr>
+              <a:t>mainReservationCards</a:t>
+            </a:r>
+            <a:endParaRPr lang="de-CH" sz="1400" b="1" dirty="0">
+              <a:solidFill>
+                <a:schemeClr val="tx1"/>
+              </a:solidFill>
+              <a:latin typeface="Arial" panose="020B0604020202020204" pitchFamily="34" charset="0"/>
+              <a:cs typeface="Arial" panose="020B0604020202020204" pitchFamily="34" charset="0"/>
+            </a:endParaRPr>
+          </a:p>
+          <a:p>
+            <a:endParaRPr lang="de-CH" sz="1000" b="1" dirty="0">
+              <a:solidFill>
+                <a:schemeClr val="tx1"/>
+              </a:solidFill>
+              <a:latin typeface="Arial" panose="020B0604020202020204" pitchFamily="34" charset="0"/>
+              <a:cs typeface="Arial" panose="020B0604020202020204" pitchFamily="34" charset="0"/>
+            </a:endParaRPr>
+          </a:p>
+          <a:p>
+            <a:r>
+              <a:rPr lang="de-CH" sz="1000" b="1" dirty="0" err="1">
+                <a:solidFill>
+                  <a:schemeClr val="tx1"/>
+                </a:solidFill>
+                <a:latin typeface="Arial" panose="020B0604020202020204" pitchFamily="34" charset="0"/>
+                <a:cs typeface="Arial" panose="020B0604020202020204" pitchFamily="34" charset="0"/>
+              </a:rPr>
+              <a:t>Get</a:t>
+            </a:r>
+            <a:r>
+              <a:rPr lang="de-CH" sz="1000" b="1" dirty="0">
+                <a:solidFill>
+                  <a:schemeClr val="tx1"/>
+                </a:solidFill>
+                <a:latin typeface="Arial" panose="020B0604020202020204" pitchFamily="34" charset="0"/>
+                <a:cs typeface="Arial" panose="020B0604020202020204" pitchFamily="34" charset="0"/>
+              </a:rPr>
+              <a:t> </a:t>
+            </a:r>
+            <a:r>
+              <a:rPr lang="de-CH" sz="1000" b="1" dirty="0" err="1">
+                <a:solidFill>
+                  <a:schemeClr val="tx1"/>
+                </a:solidFill>
+                <a:latin typeface="Arial" panose="020B0604020202020204" pitchFamily="34" charset="0"/>
+                <a:cs typeface="Arial" panose="020B0604020202020204" pitchFamily="34" charset="0"/>
+              </a:rPr>
+              <a:t>passed</a:t>
+            </a:r>
+            <a:r>
+              <a:rPr lang="de-CH" sz="1000" b="1" dirty="0">
+                <a:solidFill>
+                  <a:schemeClr val="tx1"/>
+                </a:solidFill>
+                <a:latin typeface="Arial" panose="020B0604020202020204" pitchFamily="34" charset="0"/>
+                <a:cs typeface="Arial" panose="020B0604020202020204" pitchFamily="34" charset="0"/>
+              </a:rPr>
+              <a:t> </a:t>
+            </a:r>
+            <a:r>
+              <a:rPr lang="de-CH" sz="1000" b="1" dirty="0" err="1">
+                <a:solidFill>
+                  <a:schemeClr val="tx1"/>
+                </a:solidFill>
+                <a:latin typeface="Arial" panose="020B0604020202020204" pitchFamily="34" charset="0"/>
+                <a:cs typeface="Arial" panose="020B0604020202020204" pitchFamily="34" charset="0"/>
+              </a:rPr>
+              <a:t>data</a:t>
+            </a:r>
+            <a:r>
+              <a:rPr lang="de-CH" sz="1000" b="1" dirty="0">
+                <a:solidFill>
+                  <a:schemeClr val="tx1"/>
+                </a:solidFill>
+                <a:latin typeface="Arial" panose="020B0604020202020204" pitchFamily="34" charset="0"/>
+                <a:cs typeface="Arial" panose="020B0604020202020204" pitchFamily="34" charset="0"/>
+              </a:rPr>
+              <a:t> </a:t>
+            </a:r>
+            <a:r>
+              <a:rPr lang="de-CH" sz="1000" b="1" dirty="0" err="1">
+                <a:solidFill>
+                  <a:schemeClr val="tx1"/>
+                </a:solidFill>
+                <a:latin typeface="Arial" panose="020B0604020202020204" pitchFamily="34" charset="0"/>
+                <a:cs typeface="Arial" panose="020B0604020202020204" pitchFamily="34" charset="0"/>
+              </a:rPr>
+              <a:t>fom</a:t>
+            </a:r>
+            <a:r>
+              <a:rPr lang="de-CH" sz="1000" b="1" dirty="0">
+                <a:solidFill>
+                  <a:schemeClr val="tx1"/>
+                </a:solidFill>
+                <a:latin typeface="Arial" panose="020B0604020202020204" pitchFamily="34" charset="0"/>
+                <a:cs typeface="Arial" panose="020B0604020202020204" pitchFamily="34" charset="0"/>
+              </a:rPr>
+              <a:t> </a:t>
+            </a:r>
+            <a:r>
+              <a:rPr lang="de-CH" sz="1000" b="1" dirty="0" err="1">
+                <a:solidFill>
+                  <a:schemeClr val="tx1"/>
+                </a:solidFill>
+                <a:latin typeface="Arial" panose="020B0604020202020204" pitchFamily="34" charset="0"/>
+                <a:cs typeface="Arial" panose="020B0604020202020204" pitchFamily="34" charset="0"/>
+              </a:rPr>
+              <a:t>the</a:t>
+            </a:r>
+            <a:r>
+              <a:rPr lang="de-CH" sz="1000" b="1" dirty="0">
+                <a:solidFill>
+                  <a:schemeClr val="tx1"/>
+                </a:solidFill>
+                <a:latin typeface="Arial" panose="020B0604020202020204" pitchFamily="34" charset="0"/>
+                <a:cs typeface="Arial" panose="020B0604020202020204" pitchFamily="34" charset="0"/>
+              </a:rPr>
+              <a:t> </a:t>
+            </a:r>
+            <a:r>
+              <a:rPr lang="de-CH" sz="1000" b="1" dirty="0" err="1">
+                <a:solidFill>
+                  <a:schemeClr val="tx1"/>
+                </a:solidFill>
+                <a:latin typeface="Arial" panose="020B0604020202020204" pitchFamily="34" charset="0"/>
+                <a:cs typeface="Arial" panose="020B0604020202020204" pitchFamily="34" charset="0"/>
+              </a:rPr>
+              <a:t>opened</a:t>
+            </a:r>
+            <a:r>
+              <a:rPr lang="de-CH" sz="1000" b="1" dirty="0">
+                <a:solidFill>
+                  <a:schemeClr val="tx1"/>
+                </a:solidFill>
+                <a:latin typeface="Arial" panose="020B0604020202020204" pitchFamily="34" charset="0"/>
+                <a:cs typeface="Arial" panose="020B0604020202020204" pitchFamily="34" charset="0"/>
+              </a:rPr>
+              <a:t> </a:t>
+            </a:r>
+            <a:r>
+              <a:rPr lang="de-CH" sz="1000" b="1" dirty="0" err="1">
+                <a:solidFill>
+                  <a:schemeClr val="tx1"/>
+                </a:solidFill>
+                <a:latin typeface="Arial" panose="020B0604020202020204" pitchFamily="34" charset="0"/>
+                <a:cs typeface="Arial" panose="020B0604020202020204" pitchFamily="34" charset="0"/>
+              </a:rPr>
+              <a:t>object</a:t>
+            </a:r>
+            <a:r>
+              <a:rPr lang="de-CH" sz="1000" b="1" dirty="0">
+                <a:solidFill>
+                  <a:schemeClr val="tx1"/>
+                </a:solidFill>
+                <a:latin typeface="Arial" panose="020B0604020202020204" pitchFamily="34" charset="0"/>
+                <a:cs typeface="Arial" panose="020B0604020202020204" pitchFamily="34" charset="0"/>
+              </a:rPr>
+              <a:t> </a:t>
+            </a:r>
+            <a:r>
+              <a:rPr lang="de-CH" sz="1000" b="1" dirty="0" err="1">
+                <a:solidFill>
+                  <a:schemeClr val="tx1"/>
+                </a:solidFill>
+                <a:latin typeface="Arial" panose="020B0604020202020204" pitchFamily="34" charset="0"/>
+                <a:cs typeface="Arial" panose="020B0604020202020204" pitchFamily="34" charset="0"/>
+              </a:rPr>
+              <a:t>or</a:t>
+            </a:r>
+            <a:r>
+              <a:rPr lang="de-CH" sz="1000" b="1" dirty="0">
+                <a:solidFill>
+                  <a:schemeClr val="tx1"/>
+                </a:solidFill>
+                <a:latin typeface="Arial" panose="020B0604020202020204" pitchFamily="34" charset="0"/>
+                <a:cs typeface="Arial" panose="020B0604020202020204" pitchFamily="34" charset="0"/>
+              </a:rPr>
+              <a:t> </a:t>
+            </a:r>
+            <a:r>
+              <a:rPr lang="de-CH" sz="1000" b="1" dirty="0" err="1">
+                <a:solidFill>
+                  <a:schemeClr val="tx1"/>
+                </a:solidFill>
+                <a:latin typeface="Arial" panose="020B0604020202020204" pitchFamily="34" charset="0"/>
+                <a:cs typeface="Arial" panose="020B0604020202020204" pitchFamily="34" charset="0"/>
+              </a:rPr>
+              <a:t>from</a:t>
+            </a:r>
+            <a:r>
+              <a:rPr lang="de-CH" sz="1000" b="1" dirty="0">
+                <a:solidFill>
+                  <a:schemeClr val="tx1"/>
+                </a:solidFill>
+                <a:latin typeface="Arial" panose="020B0604020202020204" pitchFamily="34" charset="0"/>
+                <a:cs typeface="Arial" panose="020B0604020202020204" pitchFamily="34" charset="0"/>
+              </a:rPr>
+              <a:t>  </a:t>
+            </a:r>
+            <a:r>
+              <a:rPr lang="de-CH" sz="1000" b="1" dirty="0" err="1">
+                <a:solidFill>
+                  <a:schemeClr val="tx1"/>
+                </a:solidFill>
+                <a:latin typeface="Arial" panose="020B0604020202020204" pitchFamily="34" charset="0"/>
+                <a:cs typeface="Arial" panose="020B0604020202020204" pitchFamily="34" charset="0"/>
+              </a:rPr>
+              <a:t>local</a:t>
+            </a:r>
+            <a:r>
+              <a:rPr lang="de-CH" sz="1000" b="1" dirty="0">
+                <a:solidFill>
+                  <a:schemeClr val="tx1"/>
+                </a:solidFill>
+                <a:latin typeface="Arial" panose="020B0604020202020204" pitchFamily="34" charset="0"/>
+                <a:cs typeface="Arial" panose="020B0604020202020204" pitchFamily="34" charset="0"/>
+              </a:rPr>
+              <a:t> </a:t>
+            </a:r>
+            <a:r>
+              <a:rPr lang="de-CH" sz="1000" b="1" dirty="0" err="1">
+                <a:solidFill>
+                  <a:schemeClr val="tx1"/>
+                </a:solidFill>
+                <a:latin typeface="Arial" panose="020B0604020202020204" pitchFamily="34" charset="0"/>
+                <a:cs typeface="Arial" panose="020B0604020202020204" pitchFamily="34" charset="0"/>
+              </a:rPr>
+              <a:t>storage</a:t>
+            </a:r>
+            <a:endParaRPr lang="de-CH" sz="1000" b="1" dirty="0">
+              <a:solidFill>
+                <a:schemeClr val="tx1"/>
+              </a:solidFill>
+              <a:latin typeface="Arial" panose="020B0604020202020204" pitchFamily="34" charset="0"/>
+              <a:cs typeface="Arial" panose="020B0604020202020204" pitchFamily="34" charset="0"/>
+            </a:endParaRPr>
+          </a:p>
+        </p:txBody>
+      </p:sp>
+      <p:sp>
+        <p:nvSpPr>
+          <p:cNvPr id="12" name="Pfeil: nach rechts 11">
+            <a:extLst>
+              <a:ext uri="{FF2B5EF4-FFF2-40B4-BE49-F238E27FC236}">
+                <a16:creationId xmlns:a16="http://schemas.microsoft.com/office/drawing/2014/main" id="{8CD902AF-2414-06B3-BBCB-5E9638A3676E}"/>
+              </a:ext>
+            </a:extLst>
+          </p:cNvPr>
+          <p:cNvSpPr/>
+          <p:nvPr/>
+        </p:nvSpPr>
+        <p:spPr>
+          <a:xfrm rot="1122447">
+            <a:off x="3268403" y="1342308"/>
+            <a:ext cx="433295" cy="234366"/>
+          </a:xfrm>
+          <a:prstGeom prst="rightArrow">
+            <a:avLst/>
+          </a:prstGeom>
+          <a:noFill/>
+          <a:ln w="25400"/>
+        </p:spPr>
+        <p:style>
+          <a:lnRef idx="2">
+            <a:schemeClr val="accent1">
+              <a:shade val="15000"/>
+            </a:schemeClr>
+          </a:lnRef>
+          <a:fillRef idx="1">
+            <a:schemeClr val="accent1"/>
+          </a:fillRef>
+          <a:effectRef idx="0">
+            <a:schemeClr val="accent1"/>
+          </a:effectRef>
+          <a:fontRef idx="minor">
+            <a:schemeClr val="lt1"/>
+          </a:fontRef>
+        </p:style>
+        <p:txBody>
+          <a:bodyPr rtlCol="0" anchor="ctr"/>
+          <a:lstStyle/>
+          <a:p>
+            <a:pPr algn="ctr"/>
+            <a:endParaRPr lang="de-CH"/>
+          </a:p>
+        </p:txBody>
+      </p:sp>
+      <p:sp>
+        <p:nvSpPr>
+          <p:cNvPr id="13" name="Pfeil: nach rechts 12">
+            <a:extLst>
+              <a:ext uri="{FF2B5EF4-FFF2-40B4-BE49-F238E27FC236}">
+                <a16:creationId xmlns:a16="http://schemas.microsoft.com/office/drawing/2014/main" id="{2A26D29E-305A-7C88-F963-184D0156158F}"/>
+              </a:ext>
+            </a:extLst>
+          </p:cNvPr>
+          <p:cNvSpPr/>
+          <p:nvPr/>
+        </p:nvSpPr>
+        <p:spPr>
+          <a:xfrm rot="18983583">
+            <a:off x="3357966" y="2614349"/>
+            <a:ext cx="433295" cy="234366"/>
+          </a:xfrm>
+          <a:prstGeom prst="rightArrow">
+            <a:avLst/>
+          </a:prstGeom>
+          <a:noFill/>
+          <a:ln w="25400"/>
+        </p:spPr>
+        <p:style>
+          <a:lnRef idx="2">
+            <a:schemeClr val="accent1">
+              <a:shade val="15000"/>
+            </a:schemeClr>
+          </a:lnRef>
+          <a:fillRef idx="1">
+            <a:schemeClr val="accent1"/>
+          </a:fillRef>
+          <a:effectRef idx="0">
+            <a:schemeClr val="accent1"/>
+          </a:effectRef>
+          <a:fontRef idx="minor">
+            <a:schemeClr val="lt1"/>
+          </a:fontRef>
+        </p:style>
+        <p:txBody>
+          <a:bodyPr rtlCol="0" anchor="ctr"/>
+          <a:lstStyle/>
+          <a:p>
+            <a:pPr algn="ctr"/>
+            <a:endParaRPr lang="de-CH"/>
+          </a:p>
+        </p:txBody>
+      </p:sp>
+      <p:sp>
+        <p:nvSpPr>
+          <p:cNvPr id="14" name="Pfeil: nach rechts 13">
+            <a:extLst>
+              <a:ext uri="{FF2B5EF4-FFF2-40B4-BE49-F238E27FC236}">
+                <a16:creationId xmlns:a16="http://schemas.microsoft.com/office/drawing/2014/main" id="{10C21F40-0C48-EA7E-D1BE-DDB15A737EBF}"/>
+              </a:ext>
+            </a:extLst>
+          </p:cNvPr>
+          <p:cNvSpPr/>
+          <p:nvPr/>
+        </p:nvSpPr>
+        <p:spPr>
+          <a:xfrm rot="19046199">
+            <a:off x="3333847" y="2106843"/>
+            <a:ext cx="433295" cy="234366"/>
+          </a:xfrm>
+          <a:prstGeom prst="rightArrow">
+            <a:avLst/>
+          </a:prstGeom>
+          <a:noFill/>
+          <a:ln w="25400"/>
+        </p:spPr>
+        <p:style>
+          <a:lnRef idx="2">
+            <a:schemeClr val="accent1">
+              <a:shade val="15000"/>
+            </a:schemeClr>
+          </a:lnRef>
+          <a:fillRef idx="1">
+            <a:schemeClr val="accent1"/>
+          </a:fillRef>
+          <a:effectRef idx="0">
+            <a:schemeClr val="accent1"/>
+          </a:effectRef>
+          <a:fontRef idx="minor">
+            <a:schemeClr val="lt1"/>
+          </a:fontRef>
+        </p:style>
+        <p:txBody>
+          <a:bodyPr rtlCol="0" anchor="ctr"/>
+          <a:lstStyle/>
+          <a:p>
+            <a:pPr algn="ctr"/>
+            <a:endParaRPr lang="de-CH"/>
+          </a:p>
+        </p:txBody>
+      </p:sp>
+      <p:sp>
+        <p:nvSpPr>
+          <p:cNvPr id="15" name="Pfeil: nach rechts 14">
+            <a:extLst>
+              <a:ext uri="{FF2B5EF4-FFF2-40B4-BE49-F238E27FC236}">
+                <a16:creationId xmlns:a16="http://schemas.microsoft.com/office/drawing/2014/main" id="{D22B274E-0788-2D1F-97C3-C0B2E663F2D7}"/>
+              </a:ext>
+            </a:extLst>
+          </p:cNvPr>
+          <p:cNvSpPr/>
+          <p:nvPr/>
+        </p:nvSpPr>
+        <p:spPr>
+          <a:xfrm rot="19821310">
+            <a:off x="6703370" y="2590012"/>
+            <a:ext cx="433295" cy="234366"/>
+          </a:xfrm>
+          <a:prstGeom prst="rightArrow">
+            <a:avLst/>
+          </a:prstGeom>
+          <a:noFill/>
+          <a:ln w="25400"/>
+        </p:spPr>
+        <p:style>
+          <a:lnRef idx="2">
+            <a:schemeClr val="accent1">
+              <a:shade val="15000"/>
+            </a:schemeClr>
+          </a:lnRef>
+          <a:fillRef idx="1">
+            <a:schemeClr val="accent1"/>
+          </a:fillRef>
+          <a:effectRef idx="0">
+            <a:schemeClr val="accent1"/>
+          </a:effectRef>
+          <a:fontRef idx="minor">
+            <a:schemeClr val="lt1"/>
+          </a:fontRef>
+        </p:style>
+        <p:txBody>
+          <a:bodyPr rtlCol="0" anchor="ctr"/>
+          <a:lstStyle/>
+          <a:p>
+            <a:pPr algn="ctr"/>
+            <a:endParaRPr lang="de-CH"/>
+          </a:p>
+        </p:txBody>
+      </p:sp>
+      <p:sp>
+        <p:nvSpPr>
+          <p:cNvPr id="16" name="Pfeil: nach rechts 15">
+            <a:extLst>
+              <a:ext uri="{FF2B5EF4-FFF2-40B4-BE49-F238E27FC236}">
+                <a16:creationId xmlns:a16="http://schemas.microsoft.com/office/drawing/2014/main" id="{70F2DAE6-A7C2-5D21-7A28-03306CD47A25}"/>
+              </a:ext>
+            </a:extLst>
+          </p:cNvPr>
+          <p:cNvSpPr/>
+          <p:nvPr/>
+        </p:nvSpPr>
+        <p:spPr>
+          <a:xfrm rot="16200000">
+            <a:off x="8568108" y="3154919"/>
+            <a:ext cx="279194" cy="196793"/>
+          </a:xfrm>
+          <a:prstGeom prst="rightArrow">
+            <a:avLst/>
+          </a:prstGeom>
+          <a:noFill/>
+          <a:ln w="25400"/>
+        </p:spPr>
+        <p:style>
+          <a:lnRef idx="2">
+            <a:schemeClr val="accent1">
+              <a:shade val="15000"/>
+            </a:schemeClr>
+          </a:lnRef>
+          <a:fillRef idx="1">
+            <a:schemeClr val="accent1"/>
+          </a:fillRef>
+          <a:effectRef idx="0">
+            <a:schemeClr val="accent1"/>
+          </a:effectRef>
+          <a:fontRef idx="minor">
+            <a:schemeClr val="lt1"/>
+          </a:fontRef>
+        </p:style>
+        <p:txBody>
+          <a:bodyPr rtlCol="0" anchor="ctr"/>
+          <a:lstStyle/>
+          <a:p>
+            <a:pPr algn="ctr"/>
+            <a:endParaRPr lang="de-CH"/>
+          </a:p>
+        </p:txBody>
+      </p:sp>
+      <p:sp>
+        <p:nvSpPr>
+          <p:cNvPr id="17" name="Rechteck 16">
+            <a:extLst>
+              <a:ext uri="{FF2B5EF4-FFF2-40B4-BE49-F238E27FC236}">
+                <a16:creationId xmlns:a16="http://schemas.microsoft.com/office/drawing/2014/main" id="{3F01D55D-4F95-9D4C-3AE3-75AAFBB01431}"/>
+              </a:ext>
+            </a:extLst>
+          </p:cNvPr>
+          <p:cNvSpPr/>
+          <p:nvPr/>
+        </p:nvSpPr>
+        <p:spPr>
+          <a:xfrm>
+            <a:off x="3780206" y="3892313"/>
+            <a:ext cx="2806490" cy="369333"/>
+          </a:xfrm>
+          <a:prstGeom prst="rect">
+            <a:avLst/>
+          </a:prstGeom>
+          <a:noFill/>
+          <a:ln>
+            <a:solidFill>
+              <a:schemeClr val="tx1"/>
+            </a:solidFill>
+          </a:ln>
+        </p:spPr>
+        <p:style>
+          <a:lnRef idx="2">
+            <a:schemeClr val="accent1">
+              <a:shade val="50000"/>
+            </a:schemeClr>
+          </a:lnRef>
+          <a:fillRef idx="1">
+            <a:schemeClr val="accent1"/>
+          </a:fillRef>
+          <a:effectRef idx="0">
+            <a:schemeClr val="accent1"/>
+          </a:effectRef>
+          <a:fontRef idx="minor">
+            <a:schemeClr val="lt1"/>
+          </a:fontRef>
+        </p:style>
+        <p:txBody>
+          <a:bodyPr rtlCol="0" anchor="ctr"/>
+          <a:lstStyle/>
+          <a:p>
+            <a:pPr algn="ctr"/>
+            <a:r>
+              <a:rPr lang="de-CH" sz="1000" b="1" dirty="0" err="1">
+                <a:solidFill>
+                  <a:schemeClr val="tx1"/>
+                </a:solidFill>
+                <a:latin typeface="Arial" panose="020B0604020202020204" pitchFamily="34" charset="0"/>
+                <a:cs typeface="Arial" panose="020B0604020202020204" pitchFamily="34" charset="0"/>
+              </a:rPr>
+              <a:t>localStorage</a:t>
+            </a:r>
+            <a:endParaRPr lang="de-CH" sz="1000" b="1" dirty="0">
+              <a:solidFill>
+                <a:schemeClr val="tx1"/>
+              </a:solidFill>
+              <a:latin typeface="Arial" panose="020B0604020202020204" pitchFamily="34" charset="0"/>
+              <a:cs typeface="Arial" panose="020B0604020202020204" pitchFamily="34" charset="0"/>
+            </a:endParaRPr>
+          </a:p>
+        </p:txBody>
+      </p:sp>
+      <p:sp>
+        <p:nvSpPr>
+          <p:cNvPr id="18" name="Pfeil: nach rechts 17">
+            <a:extLst>
+              <a:ext uri="{FF2B5EF4-FFF2-40B4-BE49-F238E27FC236}">
+                <a16:creationId xmlns:a16="http://schemas.microsoft.com/office/drawing/2014/main" id="{55B7035E-B91F-6418-957D-0A1E9A7D0812}"/>
+              </a:ext>
+            </a:extLst>
+          </p:cNvPr>
+          <p:cNvSpPr/>
+          <p:nvPr/>
+        </p:nvSpPr>
+        <p:spPr>
+          <a:xfrm rot="5400000">
+            <a:off x="5142251" y="3610987"/>
+            <a:ext cx="279194" cy="196793"/>
+          </a:xfrm>
+          <a:prstGeom prst="rightArrow">
+            <a:avLst/>
+          </a:prstGeom>
+          <a:noFill/>
+          <a:ln w="25400"/>
+        </p:spPr>
+        <p:style>
+          <a:lnRef idx="2">
+            <a:schemeClr val="accent1">
+              <a:shade val="15000"/>
+            </a:schemeClr>
+          </a:lnRef>
+          <a:fillRef idx="1">
+            <a:schemeClr val="accent1"/>
+          </a:fillRef>
+          <a:effectRef idx="0">
+            <a:schemeClr val="accent1"/>
+          </a:effectRef>
+          <a:fontRef idx="minor">
+            <a:schemeClr val="lt1"/>
+          </a:fontRef>
+        </p:style>
+        <p:txBody>
+          <a:bodyPr rtlCol="0" anchor="ctr"/>
+          <a:lstStyle/>
+          <a:p>
+            <a:pPr algn="ctr"/>
+            <a:endParaRPr lang="de-CH"/>
+          </a:p>
+        </p:txBody>
+      </p:sp>
+      <p:sp>
+        <p:nvSpPr>
+          <p:cNvPr id="19" name="Pfeil: nach rechts 18">
+            <a:extLst>
+              <a:ext uri="{FF2B5EF4-FFF2-40B4-BE49-F238E27FC236}">
+                <a16:creationId xmlns:a16="http://schemas.microsoft.com/office/drawing/2014/main" id="{DDD3A720-E515-D9FC-5FEE-C2931D660549}"/>
+              </a:ext>
+            </a:extLst>
+          </p:cNvPr>
+          <p:cNvSpPr/>
+          <p:nvPr/>
+        </p:nvSpPr>
+        <p:spPr>
+          <a:xfrm>
+            <a:off x="6709318" y="3971003"/>
+            <a:ext cx="433295" cy="234366"/>
+          </a:xfrm>
+          <a:prstGeom prst="rightArrow">
+            <a:avLst/>
+          </a:prstGeom>
+          <a:noFill/>
+          <a:ln w="25400"/>
+        </p:spPr>
+        <p:style>
+          <a:lnRef idx="2">
+            <a:schemeClr val="accent1">
+              <a:shade val="15000"/>
+            </a:schemeClr>
+          </a:lnRef>
+          <a:fillRef idx="1">
+            <a:schemeClr val="accent1"/>
+          </a:fillRef>
+          <a:effectRef idx="0">
+            <a:schemeClr val="accent1"/>
+          </a:effectRef>
+          <a:fontRef idx="minor">
+            <a:schemeClr val="lt1"/>
+          </a:fontRef>
+        </p:style>
+        <p:txBody>
+          <a:bodyPr rtlCol="0" anchor="ctr"/>
+          <a:lstStyle/>
+          <a:p>
+            <a:pPr algn="ctr"/>
+            <a:endParaRPr lang="de-CH"/>
+          </a:p>
+        </p:txBody>
+      </p:sp>
+    </p:spTree>
+    <p:extLst>
+      <p:ext uri="{BB962C8B-B14F-4D97-AF65-F5344CB8AC3E}">
+        <p14:creationId xmlns:p14="http://schemas.microsoft.com/office/powerpoint/2010/main" val="3998550387"/>
+      </p:ext>
+    </p:extLst>
+  </p:cSld>
+  <p:clrMapOvr>
+    <a:masterClrMapping/>
+  </p:clrMapOvr>
+</p:sld>
+</file>
+
+<file path=ppt/slides/slide4.xml><?xml version="1.0" encoding="utf-8"?>
 <p:sld xmlns:a="http://schemas.openxmlformats.org/drawingml/2006/main" xmlns:r="http://schemas.openxmlformats.org/officeDocument/2006/relationships" xmlns:p="http://schemas.openxmlformats.org/presentationml/2006/main">
   <p:cSld>
     <p:spTree>
@@ -5389,7 +9415,7 @@
 </p:sld>
 </file>
 
-<file path=ppt/slides/slide4.xml><?xml version="1.0" encoding="utf-8"?>
+<file path=ppt/slides/slide5.xml><?xml version="1.0" encoding="utf-8"?>
 <p:sld xmlns:a="http://schemas.openxmlformats.org/drawingml/2006/main" xmlns:r="http://schemas.openxmlformats.org/officeDocument/2006/relationships" xmlns:p="http://schemas.openxmlformats.org/presentationml/2006/main">
   <p:cSld>
     <p:spTree>
@@ -6578,7 +10604,7 @@
 </p:sld>
 </file>
 
-<file path=ppt/slides/slide5.xml><?xml version="1.0" encoding="utf-8"?>
+<file path=ppt/slides/slide6.xml><?xml version="1.0" encoding="utf-8"?>
 <p:sld xmlns:a="http://schemas.openxmlformats.org/drawingml/2006/main" xmlns:r="http://schemas.openxmlformats.org/officeDocument/2006/relationships" xmlns:p="http://schemas.openxmlformats.org/presentationml/2006/main">
   <p:cSld>
     <p:spTree>
